--- a/slides/CSC270-Lecture-03-Database-Languages-and-Functions.pptx
+++ b/slides/CSC270-Lecture-03-Database-Languages-and-Functions.pptx
@@ -9,11 +9,22 @@
     <p:sldId id="257" r:id="rId3"/>
     <p:sldId id="258" r:id="rId4"/>
     <p:sldId id="259" r:id="rId5"/>
+    <p:sldId id="265" r:id="rId16"/>
+    <p:sldId id="266" r:id="rId17"/>
     <p:sldId id="260" r:id="rId6"/>
+    <p:sldId id="267" r:id="rId18"/>
+    <p:sldId id="268" r:id="rId19"/>
+    <p:sldId id="269" r:id="rId20"/>
     <p:sldId id="261" r:id="rId7"/>
+    <p:sldId id="270" r:id="rId21"/>
+    <p:sldId id="271" r:id="rId22"/>
     <p:sldId id="262" r:id="rId8"/>
+    <p:sldId id="272" r:id="rId23"/>
     <p:sldId id="263" r:id="rId9"/>
+    <p:sldId id="273" r:id="rId24"/>
+    <p:sldId id="274" r:id="rId25"/>
     <p:sldId id="264" r:id="rId10"/>
+    <p:sldId id="275" r:id="rId26"/>
   </p:sldIdLst>
   <p:notesMasterIdLst>
     <p:notesMasterId r:id="rId11"/>
@@ -1612,7 +1623,7 @@
               <a:buNone/>
             </a:pPr>
             <a:r>
-              <a:rPr lang="en-US" sz="1600" b="1" spc="300" kern="0" dirty="0">
+              <a:rPr lang="en-US" sz="1800" b="1" spc="300" kern="0" dirty="0">
                 <a:solidFill>
                   <a:srgbClr val="2FE6C4"/>
                 </a:solidFill>
@@ -1622,7 +1633,7 @@
               </a:rPr>
               <a:t>LECTURE 3</a:t>
             </a:r>
-            <a:endParaRPr lang="en-US" sz="1600" dirty="0"/>
+            <a:endParaRPr lang="en-US" sz="1800" dirty="0"/>
           </a:p>
         </p:txBody>
       </p:sp>
@@ -1729,7 +1740,7 @@
               <a:buNone/>
             </a:pPr>
             <a:r>
-              <a:rPr lang="en-US" sz="1300" dirty="0">
+              <a:rPr lang="en-US" sz="1800" dirty="0">
                 <a:solidFill>
                   <a:srgbClr val="8A939B"/>
                 </a:solidFill>
@@ -1739,7 +1750,7 @@
               </a:rPr>
               <a:t>COMSATS University Islamabad, Lahore Campus</a:t>
             </a:r>
-            <a:endParaRPr lang="en-US" sz="1300" dirty="0"/>
+            <a:endParaRPr lang="en-US" sz="1800" dirty="0"/>
           </a:p>
         </p:txBody>
       </p:sp>
@@ -1768,7 +1779,7 @@
               <a:buNone/>
             </a:pPr>
             <a:r>
-              <a:rPr lang="en-US" sz="1000" u="sng" dirty="0">
+              <a:rPr lang="en-US" sz="1200" u="sng" dirty="0">
                 <a:solidFill>
                   <a:srgbClr val="8A939B"/>
                 </a:solidFill>
@@ -1789,7 +1800,7 @@
               <a:buNone/>
             </a:pPr>
             <a:r>
-              <a:rPr lang="en-US" sz="1000" dirty="0">
+              <a:rPr lang="en-US" sz="1200" dirty="0">
                 <a:solidFill>
                   <a:srgbClr val="8A939B"/>
                 </a:solidFill>
@@ -1799,7 +1810,4002 @@
               </a:rPr>
               <a:t>  ·  1</a:t>
             </a:r>
-            <a:endParaRPr lang="en-US" sz="1000" dirty="0"/>
+            <a:endParaRPr lang="en-US" sz="1200" dirty="0"/>
+          </a:p>
+        </p:txBody>
+      </p:sp>
+    </p:spTree>
+  </p:cSld>
+  <p:clrMapOvr>
+    <a:masterClrMapping/>
+  </p:clrMapOvr>
+</p:sld>
+</file>
+
+<file path=ppt/slides/slide10.xml><?xml version="1.0" encoding="utf-8"?>
+<p:sld xmlns:a="http://schemas.openxmlformats.org/drawingml/2006/main" xmlns:r="http://schemas.openxmlformats.org/officeDocument/2006/relationships" xmlns:p="http://schemas.openxmlformats.org/presentationml/2006/main">
+  <p:cSld name="Slide 2">
+    <p:bg>
+      <p:bgPr>
+        <a:solidFill>
+          <a:srgbClr val="F7F8F9"/>
+        </a:solidFill>
+      </p:bgPr>
+    </p:bg>
+    <p:spTree>
+      <p:nvGrpSpPr>
+        <p:cNvPr id="1" name=""/>
+        <p:cNvGrpSpPr/>
+        <p:nvPr/>
+      </p:nvGrpSpPr>
+      <p:grpSpPr>
+        <a:xfrm>
+          <a:off x="0" y="0"/>
+          <a:ext cx="0" cy="0"/>
+          <a:chOff x="0" y="0"/>
+          <a:chExt cx="0" cy="0"/>
+        </a:xfrm>
+      </p:grpSpPr>
+      <p:sp>
+        <p:nvSpPr>
+          <p:cNvPr id="2" name="Text 0"/>
+          <p:cNvSpPr txBox="1"/>
+          <p:nvPr/>
+        </p:nvSpPr>
+        <p:spPr>
+          <a:xfrm>
+            <a:off x="548640" y="365760"/>
+            <a:ext cx="11064240" cy="731520"/>
+          </a:xfrm>
+          <a:prstGeom prst="rect">
+            <a:avLst/>
+          </a:prstGeom>
+          <a:noFill/>
+          <a:ln/>
+        </p:spPr>
+        <p:txBody>
+          <a:bodyPr wrap="square" lIns="0" tIns="0" rIns="0" bIns="0" rtlCol="0" anchor="ctr"/>
+          <a:lstStyle/>
+          <a:p>
+            <a:pPr indent="0" marL="0">
+              <a:buNone/>
+            </a:pPr>
+            <a:r>
+              <a:rPr lang="en-US" sz="2800" b="1" dirty="0">
+                <a:solidFill>
+                  <a:srgbClr val="1F2429"/>
+                </a:solidFill>
+                <a:latin typeface="Calibri" pitchFamily="34" charset="0"/>
+                <a:ea typeface="Calibri" pitchFamily="34" charset="-122"/>
+                <a:cs typeface="Calibri" pitchFamily="34" charset="-120"/>
+              </a:rPr>
+              <a:t>Building the Library Schema, Step by Step</a:t>
+            </a:r>
+            <a:endParaRPr lang="en-US" sz="2800" dirty="0"/>
+          </a:p>
+        </p:txBody>
+      </p:sp>
+      <p:sp>
+        <p:nvSpPr>
+          <p:cNvPr id="3" name="Text 1"/>
+          <p:cNvSpPr txBox="1"/>
+          <p:nvPr/>
+        </p:nvSpPr>
+        <p:spPr>
+          <a:xfrm>
+            <a:off x="9951415" y="6455664"/>
+            <a:ext cx="2011680" cy="292608"/>
+          </a:xfrm>
+          <a:prstGeom prst="rect">
+            <a:avLst/>
+          </a:prstGeom>
+          <a:noFill/>
+          <a:ln/>
+        </p:spPr>
+        <p:txBody>
+          <a:bodyPr wrap="square" lIns="0" tIns="0" rIns="0" bIns="0" rtlCol="0" anchor="ctr"/>
+          <a:lstStyle/>
+          <a:p>
+            <a:pPr algn="r" indent="0" marL="0">
+              <a:buNone/>
+            </a:pPr>
+            <a:r>
+              <a:rPr lang="en-US" sz="1200" u="sng" dirty="0">
+                <a:solidFill>
+                  <a:srgbClr val="8A939B"/>
+                </a:solidFill>
+                <a:latin typeface="Calibri" pitchFamily="34" charset="0"/>
+                <a:ea typeface="Calibri" pitchFamily="34" charset="-122"/>
+                <a:cs typeface="Calibri" pitchFamily="34" charset="-120"/>
+                <a:hlinkClick r:id="rId1" invalidUrl="" action="" tgtFrame="" tooltip="" history="1" highlightClick="0" endSnd="0">
+                  <a:extLst>
+                    <a:ext uri="{A12FA001-AC4F-418D-AE19-62706E023703}">
+                      <ahyp:hlinkClr xmlns:ahyp="http://schemas.microsoft.com/office/drawing/2018/hyperlinkcolor" val="tx"/>
+                    </a:ext>
+                  </a:extLst>
+                </a:hlinkClick>
+              </a:rPr>
+              <a:t>cuinotes.com</a:t>
+            </a:r>
+            <a:pPr algn="r" indent="0" marL="0">
+              <a:buNone/>
+            </a:pPr>
+            <a:r>
+              <a:rPr lang="en-US" sz="1200" dirty="0">
+                <a:solidFill>
+                  <a:srgbClr val="8A939B"/>
+                </a:solidFill>
+                <a:latin typeface="Calibri" pitchFamily="34" charset="0"/>
+                <a:ea typeface="Calibri" pitchFamily="34" charset="-122"/>
+                <a:cs typeface="Calibri" pitchFamily="34" charset="-120"/>
+              </a:rPr>
+              <a:t>  ·  5</a:t>
+            </a:r>
+            <a:endParaRPr lang="en-US" sz="1200" dirty="0"/>
+          </a:p>
+        </p:txBody>
+      </p:sp>
+      <p:sp>
+        <p:nvSpPr>
+          <p:cNvPr id="4" name="Text 2"/>
+          <p:cNvSpPr txBox="1"/>
+          <p:nvPr/>
+        </p:nvSpPr>
+        <p:spPr>
+          <a:xfrm>
+            <a:off x="640080" y="1371600"/>
+            <a:ext cx="10332720" cy="4846320"/>
+          </a:xfrm>
+          <a:prstGeom prst="rect">
+            <a:avLst/>
+          </a:prstGeom>
+          <a:noFill/>
+          <a:ln/>
+        </p:spPr>
+        <p:txBody>
+          <a:bodyPr wrap="square" lIns="0" tIns="0" rIns="0" bIns="0" rtlCol="0" anchor="t"/>
+          <a:lstStyle/>
+          <a:p>
+            <a:pPr marL="342900" indent="-342900">
+              <a:spcAft>
+                <a:spcPts val="1800"/>
+              </a:spcAft>
+              <a:buSzPct val="100000"/>
+              <a:buChar char="•"/>
+            </a:pPr>
+            <a:r>
+              <a:rPr lang="en-US" sz="1800" dirty="0">
+                <a:solidFill>
+                  <a:srgbClr val="1F2429"/>
+                </a:solidFill>
+                <a:latin typeface="Calibri" pitchFamily="34" charset="0"/>
+                <a:ea typeface="Calibri" pitchFamily="34" charset="-122"/>
+                <a:cs typeface="Calibri" pitchFamily="34" charset="-120"/>
+              </a:rPr>
+              <a:t>Step 1 — CREATE TABLE Book declares isbn, title, author, and available, with isbn as the primary key</a:t>
+            </a:r>
+            <a:endParaRPr lang="en-US" sz="1800" dirty="0"/>
+          </a:p>
+          <a:p>
+            <a:pPr marL="342900" indent="-342900">
+              <a:spcAft>
+                <a:spcPts val="1800"/>
+              </a:spcAft>
+              <a:buSzPct val="100000"/>
+              <a:buChar char="•"/>
+            </a:pPr>
+            <a:r>
+              <a:rPr lang="en-US" sz="1800" dirty="0">
+                <a:solidFill>
+                  <a:srgbClr val="1F2429"/>
+                </a:solidFill>
+                <a:latin typeface="Calibri" pitchFamily="34" charset="0"/>
+                <a:ea typeface="Calibri" pitchFamily="34" charset="-122"/>
+                <a:cs typeface="Calibri" pitchFamily="34" charset="-120"/>
+              </a:rPr>
+              <a:t>Step 2 — CREATE TABLE Member declares the member's ID, name, and contact details, again with a primary key</a:t>
+            </a:r>
+            <a:endParaRPr lang="en-US" sz="1800" dirty="0"/>
+          </a:p>
+          <a:p>
+            <a:pPr marL="342900" indent="-342900">
+              <a:spcAft>
+                <a:spcPts val="1800"/>
+              </a:spcAft>
+              <a:buSzPct val="100000"/>
+              <a:buChar char="•"/>
+            </a:pPr>
+            <a:r>
+              <a:rPr lang="en-US" sz="1800" dirty="0">
+                <a:solidFill>
+                  <a:srgbClr val="1F2429"/>
+                </a:solidFill>
+                <a:latin typeface="Calibri" pitchFamily="34" charset="0"/>
+                <a:ea typeface="Calibri" pitchFamily="34" charset="-122"/>
+                <a:cs typeface="Calibri" pitchFamily="34" charset="-120"/>
+              </a:rPr>
+              <a:t>Step 3 — ALTER TABLE Book ADD publicationYear: the library starts tracking a year it never recorded before</a:t>
+            </a:r>
+            <a:endParaRPr lang="en-US" sz="1800" dirty="0"/>
+          </a:p>
+          <a:p>
+            <a:pPr marL="342900" indent="-342900">
+              <a:spcAft>
+                <a:spcPts val="1800"/>
+              </a:spcAft>
+              <a:buSzPct val="100000"/>
+              <a:buChar char="•"/>
+            </a:pPr>
+            <a:r>
+              <a:rPr lang="en-US" sz="1800" dirty="0">
+                <a:solidFill>
+                  <a:srgbClr val="1F2429"/>
+                </a:solidFill>
+                <a:latin typeface="Calibri" pitchFamily="34" charset="0"/>
+                <a:ea typeface="Calibri" pitchFamily="34" charset="-122"/>
+                <a:cs typeface="Calibri" pitchFamily="34" charset="-120"/>
+              </a:rPr>
+              <a:t>Step 4 — every existing Book row gets a NULL publicationYear until someone fills it in; no data is lost</a:t>
+            </a:r>
+            <a:endParaRPr lang="en-US" sz="1800" dirty="0"/>
+          </a:p>
+          <a:p>
+            <a:pPr marL="342900" indent="-342900">
+              <a:spcAft>
+                <a:spcPts val="1800"/>
+              </a:spcAft>
+              <a:buSzPct val="100000"/>
+              <a:buChar char="•"/>
+            </a:pPr>
+            <a:r>
+              <a:rPr lang="en-US" sz="1800" dirty="0">
+                <a:solidFill>
+                  <a:srgbClr val="1F2429"/>
+                </a:solidFill>
+                <a:latin typeface="Calibri" pitchFamily="34" charset="0"/>
+                <a:ea typeface="Calibri" pitchFamily="34" charset="-122"/>
+                <a:cs typeface="Calibri" pitchFamily="34" charset="-120"/>
+              </a:rPr>
+              <a:t>Step 5 — the catalog records the new column, so every later query and application sees it immediately</a:t>
+            </a:r>
+            <a:endParaRPr lang="en-US" sz="1800" dirty="0"/>
+          </a:p>
+        </p:txBody>
+      </p:sp>
+    </p:spTree>
+  </p:cSld>
+  <p:clrMapOvr>
+    <a:masterClrMapping/>
+  </p:clrMapOvr>
+</p:sld>
+</file>
+
+<file path=ppt/slides/slide11.xml><?xml version="1.0" encoding="utf-8"?>
+<p:sld xmlns:a="http://schemas.openxmlformats.org/drawingml/2006/main" xmlns:r="http://schemas.openxmlformats.org/officeDocument/2006/relationships" xmlns:p="http://schemas.openxmlformats.org/presentationml/2006/main">
+  <p:cSld name="Slide 2">
+    <p:bg>
+      <p:bgPr>
+        <a:solidFill>
+          <a:srgbClr val="F7F8F9"/>
+        </a:solidFill>
+      </p:bgPr>
+    </p:bg>
+    <p:spTree>
+      <p:nvGrpSpPr>
+        <p:cNvPr id="1" name=""/>
+        <p:cNvGrpSpPr/>
+        <p:nvPr/>
+      </p:nvGrpSpPr>
+      <p:grpSpPr>
+        <a:xfrm>
+          <a:off x="0" y="0"/>
+          <a:ext cx="0" cy="0"/>
+          <a:chOff x="0" y="0"/>
+          <a:chExt cx="0" cy="0"/>
+        </a:xfrm>
+      </p:grpSpPr>
+      <p:sp>
+        <p:nvSpPr>
+          <p:cNvPr id="2" name="Text 0"/>
+          <p:cNvSpPr txBox="1"/>
+          <p:nvPr/>
+        </p:nvSpPr>
+        <p:spPr>
+          <a:xfrm>
+            <a:off x="548640" y="365760"/>
+            <a:ext cx="11064240" cy="731520"/>
+          </a:xfrm>
+          <a:prstGeom prst="rect">
+            <a:avLst/>
+          </a:prstGeom>
+          <a:noFill/>
+          <a:ln/>
+        </p:spPr>
+        <p:txBody>
+          <a:bodyPr wrap="square" lIns="0" tIns="0" rIns="0" bIns="0" rtlCol="0" anchor="ctr"/>
+          <a:lstStyle/>
+          <a:p>
+            <a:pPr indent="0" marL="0">
+              <a:buNone/>
+            </a:pPr>
+            <a:r>
+              <a:rPr lang="en-US" sz="2800" b="1" dirty="0">
+                <a:solidFill>
+                  <a:srgbClr val="1F2429"/>
+                </a:solidFill>
+                <a:latin typeface="Calibri" pitchFamily="34" charset="0"/>
+                <a:ea typeface="Calibri" pitchFamily="34" charset="-122"/>
+                <a:cs typeface="Calibri" pitchFamily="34" charset="-120"/>
+              </a:rPr>
+              <a:t>Why DDL Changes Are Felt Everywhere at Once</a:t>
+            </a:r>
+            <a:endParaRPr lang="en-US" sz="2800" dirty="0"/>
+          </a:p>
+        </p:txBody>
+      </p:sp>
+      <p:sp>
+        <p:nvSpPr>
+          <p:cNvPr id="3" name="Text 1"/>
+          <p:cNvSpPr txBox="1"/>
+          <p:nvPr/>
+        </p:nvSpPr>
+        <p:spPr>
+          <a:xfrm>
+            <a:off x="9951415" y="6455664"/>
+            <a:ext cx="2011680" cy="292608"/>
+          </a:xfrm>
+          <a:prstGeom prst="rect">
+            <a:avLst/>
+          </a:prstGeom>
+          <a:noFill/>
+          <a:ln/>
+        </p:spPr>
+        <p:txBody>
+          <a:bodyPr wrap="square" lIns="0" tIns="0" rIns="0" bIns="0" rtlCol="0" anchor="ctr"/>
+          <a:lstStyle/>
+          <a:p>
+            <a:pPr algn="r" indent="0" marL="0">
+              <a:buNone/>
+            </a:pPr>
+            <a:r>
+              <a:rPr lang="en-US" sz="1200" u="sng" dirty="0">
+                <a:solidFill>
+                  <a:srgbClr val="8A939B"/>
+                </a:solidFill>
+                <a:latin typeface="Calibri" pitchFamily="34" charset="0"/>
+                <a:ea typeface="Calibri" pitchFamily="34" charset="-122"/>
+                <a:cs typeface="Calibri" pitchFamily="34" charset="-120"/>
+                <a:hlinkClick r:id="rId1" invalidUrl="" action="" tgtFrame="" tooltip="" history="1" highlightClick="0" endSnd="0">
+                  <a:extLst>
+                    <a:ext uri="{A12FA001-AC4F-418D-AE19-62706E023703}">
+                      <ahyp:hlinkClr xmlns:ahyp="http://schemas.microsoft.com/office/drawing/2018/hyperlinkcolor" val="tx"/>
+                    </a:ext>
+                  </a:extLst>
+                </a:hlinkClick>
+              </a:rPr>
+              <a:t>cuinotes.com</a:t>
+            </a:r>
+            <a:pPr algn="r" indent="0" marL="0">
+              <a:buNone/>
+            </a:pPr>
+            <a:r>
+              <a:rPr lang="en-US" sz="1200" dirty="0">
+                <a:solidFill>
+                  <a:srgbClr val="8A939B"/>
+                </a:solidFill>
+                <a:latin typeface="Calibri" pitchFamily="34" charset="0"/>
+                <a:ea typeface="Calibri" pitchFamily="34" charset="-122"/>
+                <a:cs typeface="Calibri" pitchFamily="34" charset="-120"/>
+              </a:rPr>
+              <a:t>  ·  6</a:t>
+            </a:r>
+            <a:endParaRPr lang="en-US" sz="1200" dirty="0"/>
+          </a:p>
+        </p:txBody>
+      </p:sp>
+      <p:sp>
+        <p:nvSpPr>
+          <p:cNvPr id="4" name="Text 2"/>
+          <p:cNvSpPr txBox="1"/>
+          <p:nvPr/>
+        </p:nvSpPr>
+        <p:spPr>
+          <a:xfrm>
+            <a:off x="640080" y="1371600"/>
+            <a:ext cx="10332720" cy="4846320"/>
+          </a:xfrm>
+          <a:prstGeom prst="rect">
+            <a:avLst/>
+          </a:prstGeom>
+          <a:noFill/>
+          <a:ln/>
+        </p:spPr>
+        <p:txBody>
+          <a:bodyPr wrap="square" lIns="0" tIns="0" rIns="0" bIns="0" rtlCol="0" anchor="t"/>
+          <a:lstStyle/>
+          <a:p>
+            <a:pPr marL="342900" indent="-342900">
+              <a:spcAft>
+                <a:spcPts val="1800"/>
+              </a:spcAft>
+              <a:buSzPct val="100000"/>
+              <a:buChar char="•"/>
+            </a:pPr>
+            <a:r>
+              <a:rPr lang="en-US" sz="1800" dirty="0">
+                <a:solidFill>
+                  <a:srgbClr val="1F2429"/>
+                </a:solidFill>
+                <a:latin typeface="Calibri" pitchFamily="34" charset="0"/>
+                <a:ea typeface="Calibri" pitchFamily="34" charset="-122"/>
+                <a:cs typeface="Calibri" pitchFamily="34" charset="-120"/>
+              </a:rPr>
+              <a:t>Every DDL statement writes to the system catalog — the metadata layer introduced in Lecture 2</a:t>
+            </a:r>
+            <a:endParaRPr lang="en-US" sz="1800" dirty="0"/>
+          </a:p>
+          <a:p>
+            <a:pPr marL="342900" indent="-342900">
+              <a:spcAft>
+                <a:spcPts val="1800"/>
+              </a:spcAft>
+              <a:buSzPct val="100000"/>
+              <a:buChar char="•"/>
+            </a:pPr>
+            <a:r>
+              <a:rPr lang="en-US" sz="1800" dirty="0">
+                <a:solidFill>
+                  <a:srgbClr val="1F2429"/>
+                </a:solidFill>
+                <a:latin typeface="Calibri" pitchFamily="34" charset="0"/>
+                <a:ea typeface="Calibri" pitchFamily="34" charset="-122"/>
+                <a:cs typeface="Calibri" pitchFamily="34" charset="-120"/>
+              </a:rPr>
+              <a:t>Any component that consults the catalog sees the change at once: the query processor, the optimizer, the authorization checks</a:t>
+            </a:r>
+            <a:endParaRPr lang="en-US" sz="1800" dirty="0"/>
+          </a:p>
+          <a:p>
+            <a:pPr marL="342900" indent="-342900">
+              <a:spcAft>
+                <a:spcPts val="1800"/>
+              </a:spcAft>
+              <a:buSzPct val="100000"/>
+              <a:buChar char="•"/>
+            </a:pPr>
+            <a:r>
+              <a:rPr lang="en-US" sz="1800" dirty="0">
+                <a:solidFill>
+                  <a:srgbClr val="1F2429"/>
+                </a:solidFill>
+                <a:latin typeface="Calibri" pitchFamily="34" charset="0"/>
+                <a:ea typeface="Calibri" pitchFamily="34" charset="-122"/>
+                <a:cs typeface="Calibri" pitchFamily="34" charset="-120"/>
+              </a:rPr>
+              <a:t>So a column added from one terminal is immediately queryable by the cataloging librarian's reports</a:t>
+            </a:r>
+            <a:endParaRPr lang="en-US" sz="1800" dirty="0"/>
+          </a:p>
+          <a:p>
+            <a:pPr marL="342900" indent="-342900">
+              <a:spcAft>
+                <a:spcPts val="1800"/>
+              </a:spcAft>
+              <a:buSzPct val="100000"/>
+              <a:buChar char="•"/>
+            </a:pPr>
+            <a:r>
+              <a:rPr lang="en-US" sz="1800" dirty="0">
+                <a:solidFill>
+                  <a:srgbClr val="1F2429"/>
+                </a:solidFill>
+                <a:latin typeface="Calibri" pitchFamily="34" charset="0"/>
+                <a:ea typeface="Calibri" pitchFamily="34" charset="-122"/>
+                <a:cs typeface="Calibri" pitchFamily="34" charset="-120"/>
+              </a:rPr>
+              <a:t>The flip side: a DROP is equally immediate, which is why DDL is restricted to a small set of trusted accounts</a:t>
+            </a:r>
+            <a:endParaRPr lang="en-US" sz="1800" dirty="0"/>
+          </a:p>
+          <a:p>
+            <a:pPr marL="342900" indent="-342900">
+              <a:spcAft>
+                <a:spcPts val="1800"/>
+              </a:spcAft>
+              <a:buSzPct val="100000"/>
+              <a:buChar char="•"/>
+            </a:pPr>
+            <a:r>
+              <a:rPr lang="en-US" sz="1800" dirty="0">
+                <a:solidFill>
+                  <a:srgbClr val="1F2429"/>
+                </a:solidFill>
+                <a:latin typeface="Calibri" pitchFamily="34" charset="0"/>
+                <a:ea typeface="Calibri" pitchFamily="34" charset="-122"/>
+                <a:cs typeface="Calibri" pitchFamily="34" charset="-120"/>
+              </a:rPr>
+              <a:t>One DDL statement can change what every application sees — treat it as a high-impact operation</a:t>
+            </a:r>
+            <a:endParaRPr lang="en-US" sz="1800" dirty="0"/>
+          </a:p>
+        </p:txBody>
+      </p:sp>
+    </p:spTree>
+  </p:cSld>
+  <p:clrMapOvr>
+    <a:masterClrMapping/>
+  </p:clrMapOvr>
+</p:sld>
+</file>
+
+<file path=ppt/slides/slide12.xml><?xml version="1.0" encoding="utf-8"?>
+<p:sld xmlns:a="http://schemas.openxmlformats.org/drawingml/2006/main" xmlns:r="http://schemas.openxmlformats.org/officeDocument/2006/relationships" xmlns:p="http://schemas.openxmlformats.org/presentationml/2006/main">
+  <p:cSld name="Slide 2">
+    <p:bg>
+      <p:bgPr>
+        <a:solidFill>
+          <a:srgbClr val="F7F8F9"/>
+        </a:solidFill>
+      </p:bgPr>
+    </p:bg>
+    <p:spTree>
+      <p:nvGrpSpPr>
+        <p:cNvPr id="1" name=""/>
+        <p:cNvGrpSpPr/>
+        <p:nvPr/>
+      </p:nvGrpSpPr>
+      <p:grpSpPr>
+        <a:xfrm>
+          <a:off x="0" y="0"/>
+          <a:ext cx="0" cy="0"/>
+          <a:chOff x="0" y="0"/>
+          <a:chExt cx="0" cy="0"/>
+        </a:xfrm>
+      </p:grpSpPr>
+      <p:sp>
+        <p:nvSpPr>
+          <p:cNvPr id="2" name="Text 0"/>
+          <p:cNvSpPr txBox="1"/>
+          <p:nvPr/>
+        </p:nvSpPr>
+        <p:spPr>
+          <a:xfrm>
+            <a:off x="548640" y="365760"/>
+            <a:ext cx="11064240" cy="731520"/>
+          </a:xfrm>
+          <a:prstGeom prst="rect">
+            <a:avLst/>
+          </a:prstGeom>
+          <a:noFill/>
+          <a:ln/>
+        </p:spPr>
+        <p:txBody>
+          <a:bodyPr wrap="square" lIns="0" tIns="0" rIns="0" bIns="0" rtlCol="0" anchor="ctr"/>
+          <a:lstStyle/>
+          <a:p>
+            <a:pPr indent="0" marL="0">
+              <a:buNone/>
+            </a:pPr>
+            <a:r>
+              <a:rPr lang="en-US" sz="2800" b="1" dirty="0">
+                <a:solidFill>
+                  <a:srgbClr val="1F2429"/>
+                </a:solidFill>
+                <a:latin typeface="Calibri" pitchFamily="34" charset="0"/>
+                <a:ea typeface="Calibri" pitchFamily="34" charset="-122"/>
+                <a:cs typeface="Calibri" pitchFamily="34" charset="-120"/>
+              </a:rPr>
+              <a:t>Retrieval, Step by Step: Which Books Are Available?</a:t>
+            </a:r>
+            <a:endParaRPr lang="en-US" sz="2800" dirty="0"/>
+          </a:p>
+        </p:txBody>
+      </p:sp>
+      <p:sp>
+        <p:nvSpPr>
+          <p:cNvPr id="3" name="Text 1"/>
+          <p:cNvSpPr txBox="1"/>
+          <p:nvPr/>
+        </p:nvSpPr>
+        <p:spPr>
+          <a:xfrm>
+            <a:off x="9951415" y="6455664"/>
+            <a:ext cx="2011680" cy="292608"/>
+          </a:xfrm>
+          <a:prstGeom prst="rect">
+            <a:avLst/>
+          </a:prstGeom>
+          <a:noFill/>
+          <a:ln/>
+        </p:spPr>
+        <p:txBody>
+          <a:bodyPr wrap="square" lIns="0" tIns="0" rIns="0" bIns="0" rtlCol="0" anchor="ctr"/>
+          <a:lstStyle/>
+          <a:p>
+            <a:pPr algn="r" indent="0" marL="0">
+              <a:buNone/>
+            </a:pPr>
+            <a:r>
+              <a:rPr lang="en-US" sz="1200" u="sng" dirty="0">
+                <a:solidFill>
+                  <a:srgbClr val="8A939B"/>
+                </a:solidFill>
+                <a:latin typeface="Calibri" pitchFamily="34" charset="0"/>
+                <a:ea typeface="Calibri" pitchFamily="34" charset="-122"/>
+                <a:cs typeface="Calibri" pitchFamily="34" charset="-120"/>
+                <a:hlinkClick r:id="rId1" invalidUrl="" action="" tgtFrame="" tooltip="" history="1" highlightClick="0" endSnd="0">
+                  <a:extLst>
+                    <a:ext uri="{A12FA001-AC4F-418D-AE19-62706E023703}">
+                      <ahyp:hlinkClr xmlns:ahyp="http://schemas.microsoft.com/office/drawing/2018/hyperlinkcolor" val="tx"/>
+                    </a:ext>
+                  </a:extLst>
+                </a:hlinkClick>
+              </a:rPr>
+              <a:t>cuinotes.com</a:t>
+            </a:r>
+            <a:pPr algn="r" indent="0" marL="0">
+              <a:buNone/>
+            </a:pPr>
+            <a:r>
+              <a:rPr lang="en-US" sz="1200" dirty="0">
+                <a:solidFill>
+                  <a:srgbClr val="8A939B"/>
+                </a:solidFill>
+                <a:latin typeface="Calibri" pitchFamily="34" charset="0"/>
+                <a:ea typeface="Calibri" pitchFamily="34" charset="-122"/>
+                <a:cs typeface="Calibri" pitchFamily="34" charset="-120"/>
+              </a:rPr>
+              <a:t>  ·  8</a:t>
+            </a:r>
+            <a:endParaRPr lang="en-US" sz="1200" dirty="0"/>
+          </a:p>
+        </p:txBody>
+      </p:sp>
+      <p:sp>
+        <p:nvSpPr>
+          <p:cNvPr id="4" name="Text 2"/>
+          <p:cNvSpPr txBox="1"/>
+          <p:nvPr/>
+        </p:nvSpPr>
+        <p:spPr>
+          <a:xfrm>
+            <a:off x="640080" y="1371600"/>
+            <a:ext cx="10332720" cy="4846320"/>
+          </a:xfrm>
+          <a:prstGeom prst="rect">
+            <a:avLst/>
+          </a:prstGeom>
+          <a:noFill/>
+          <a:ln/>
+        </p:spPr>
+        <p:txBody>
+          <a:bodyPr wrap="square" lIns="0" tIns="0" rIns="0" bIns="0" rtlCol="0" anchor="t"/>
+          <a:lstStyle/>
+          <a:p>
+            <a:pPr marL="342900" indent="-342900">
+              <a:spcAft>
+                <a:spcPts val="1800"/>
+              </a:spcAft>
+              <a:buSzPct val="100000"/>
+              <a:buChar char="•"/>
+            </a:pPr>
+            <a:r>
+              <a:rPr lang="en-US" sz="1800" dirty="0">
+                <a:solidFill>
+                  <a:srgbClr val="1F2429"/>
+                </a:solidFill>
+                <a:latin typeface="Calibri" pitchFamily="34" charset="0"/>
+                <a:ea typeface="Calibri" pitchFamily="34" charset="-122"/>
+                <a:cs typeface="Calibri" pitchFamily="34" charset="-120"/>
+              </a:rPr>
+              <a:t>The question: which books by Robert C. Martin are currently available?</a:t>
+            </a:r>
+            <a:endParaRPr lang="en-US" sz="1800" dirty="0"/>
+          </a:p>
+          <a:p>
+            <a:pPr marL="342900" indent="-342900">
+              <a:spcAft>
+                <a:spcPts val="1800"/>
+              </a:spcAft>
+              <a:buSzPct val="100000"/>
+              <a:buChar char="•"/>
+            </a:pPr>
+            <a:r>
+              <a:rPr lang="en-US" sz="1800" dirty="0">
+                <a:solidFill>
+                  <a:srgbClr val="1F2429"/>
+                </a:solidFill>
+                <a:latin typeface="Calibri" pitchFamily="34" charset="0"/>
+                <a:ea typeface="Calibri" pitchFamily="34" charset="-122"/>
+                <a:cs typeface="Calibri" pitchFamily="34" charset="-120"/>
+              </a:rPr>
+              <a:t>Step 1 — identify the author, Robert C. Martin, and the column that holds it (Book.author)</a:t>
+            </a:r>
+            <a:endParaRPr lang="en-US" sz="1800" dirty="0"/>
+          </a:p>
+          <a:p>
+            <a:pPr marL="342900" indent="-342900">
+              <a:spcAft>
+                <a:spcPts val="1800"/>
+              </a:spcAft>
+              <a:buSzPct val="100000"/>
+              <a:buChar char="•"/>
+            </a:pPr>
+            <a:r>
+              <a:rPr lang="en-US" sz="1800" dirty="0">
+                <a:solidFill>
+                  <a:srgbClr val="1F2429"/>
+                </a:solidFill>
+                <a:latin typeface="Calibri" pitchFamily="34" charset="0"/>
+                <a:ea typeface="Calibri" pitchFamily="34" charset="-122"/>
+                <a:cs typeface="Calibri" pitchFamily="34" charset="-120"/>
+              </a:rPr>
+              <a:t>Step 2 — keep only rows where author matches and available is true</a:t>
+            </a:r>
+            <a:endParaRPr lang="en-US" sz="1800" dirty="0"/>
+          </a:p>
+          <a:p>
+            <a:pPr marL="342900" indent="-342900">
+              <a:spcAft>
+                <a:spcPts val="1800"/>
+              </a:spcAft>
+              <a:buSzPct val="100000"/>
+              <a:buChar char="•"/>
+            </a:pPr>
+            <a:r>
+              <a:rPr lang="en-US" sz="1800" dirty="0">
+                <a:solidFill>
+                  <a:srgbClr val="1F2429"/>
+                </a:solidFill>
+                <a:latin typeface="Calibri" pitchFamily="34" charset="0"/>
+                <a:ea typeface="Calibri" pitchFamily="34" charset="-122"/>
+                <a:cs typeface="Calibri" pitchFamily="34" charset="-120"/>
+              </a:rPr>
+              <a:t>Step 3 — return only the columns the question needs, such as title and isbn</a:t>
+            </a:r>
+            <a:endParaRPr lang="en-US" sz="1800" dirty="0"/>
+          </a:p>
+          <a:p>
+            <a:pPr marL="342900" indent="-342900">
+              <a:spcAft>
+                <a:spcPts val="1800"/>
+              </a:spcAft>
+              <a:buSzPct val="100000"/>
+              <a:buChar char="•"/>
+            </a:pPr>
+            <a:r>
+              <a:rPr lang="en-US" sz="1800" dirty="0">
+                <a:solidFill>
+                  <a:srgbClr val="1F2429"/>
+                </a:solidFill>
+                <a:latin typeface="Calibri" pitchFamily="34" charset="0"/>
+                <a:ea typeface="Calibri" pitchFamily="34" charset="-122"/>
+                <a:cs typeface="Calibri" pitchFamily="34" charset="-120"/>
+              </a:rPr>
+              <a:t>Notice: nothing in the question says how to scan, which index to use, or what order to read rows in</a:t>
+            </a:r>
+            <a:endParaRPr lang="en-US" sz="1800" dirty="0"/>
+          </a:p>
+          <a:p>
+            <a:pPr marL="342900" indent="-342900">
+              <a:spcAft>
+                <a:spcPts val="1800"/>
+              </a:spcAft>
+              <a:buSzPct val="100000"/>
+              <a:buChar char="•"/>
+            </a:pPr>
+            <a:r>
+              <a:rPr lang="en-US" sz="1800" dirty="0">
+                <a:solidFill>
+                  <a:srgbClr val="1F2429"/>
+                </a:solidFill>
+                <a:latin typeface="Calibri" pitchFamily="34" charset="0"/>
+                <a:ea typeface="Calibri" pitchFamily="34" charset="-122"/>
+                <a:cs typeface="Calibri" pitchFamily="34" charset="-120"/>
+              </a:rPr>
+              <a:t>That gap is exactly what declarative DML hands over to the query optimizer</a:t>
+            </a:r>
+            <a:endParaRPr lang="en-US" sz="1800" dirty="0"/>
+          </a:p>
+        </p:txBody>
+      </p:sp>
+    </p:spTree>
+  </p:cSld>
+  <p:clrMapOvr>
+    <a:masterClrMapping/>
+  </p:clrMapOvr>
+</p:sld>
+</file>
+
+<file path=ppt/slides/slide13.xml><?xml version="1.0" encoding="utf-8"?>
+<p:sld xmlns:a="http://schemas.openxmlformats.org/drawingml/2006/main" xmlns:r="http://schemas.openxmlformats.org/officeDocument/2006/relationships" xmlns:p="http://schemas.openxmlformats.org/presentationml/2006/main">
+  <p:cSld name="Slide 2">
+    <p:bg>
+      <p:bgPr>
+        <a:solidFill>
+          <a:srgbClr val="F7F8F9"/>
+        </a:solidFill>
+      </p:bgPr>
+    </p:bg>
+    <p:spTree>
+      <p:nvGrpSpPr>
+        <p:cNvPr id="1" name=""/>
+        <p:cNvGrpSpPr/>
+        <p:nvPr/>
+      </p:nvGrpSpPr>
+      <p:grpSpPr>
+        <a:xfrm>
+          <a:off x="0" y="0"/>
+          <a:ext cx="0" cy="0"/>
+          <a:chOff x="0" y="0"/>
+          <a:chExt cx="0" cy="0"/>
+        </a:xfrm>
+      </p:grpSpPr>
+      <p:sp>
+        <p:nvSpPr>
+          <p:cNvPr id="2" name="Text 0"/>
+          <p:cNvSpPr txBox="1"/>
+          <p:nvPr/>
+        </p:nvSpPr>
+        <p:spPr>
+          <a:xfrm>
+            <a:off x="548640" y="365760"/>
+            <a:ext cx="11064240" cy="731520"/>
+          </a:xfrm>
+          <a:prstGeom prst="rect">
+            <a:avLst/>
+          </a:prstGeom>
+          <a:noFill/>
+          <a:ln/>
+        </p:spPr>
+        <p:txBody>
+          <a:bodyPr wrap="square" lIns="0" tIns="0" rIns="0" bIns="0" rtlCol="0" anchor="ctr"/>
+          <a:lstStyle/>
+          <a:p>
+            <a:pPr indent="0" marL="0">
+              <a:buNone/>
+            </a:pPr>
+            <a:r>
+              <a:rPr lang="en-US" sz="2800" b="1" dirty="0">
+                <a:solidFill>
+                  <a:srgbClr val="1F2429"/>
+                </a:solidFill>
+                <a:latin typeface="Calibri" pitchFamily="34" charset="0"/>
+                <a:ea typeface="Calibri" pitchFamily="34" charset="-122"/>
+                <a:cs typeface="Calibri" pitchFamily="34" charset="-120"/>
+              </a:rPr>
+              <a:t>Procedural vs. Declarative: The Same Question Two Ways</a:t>
+            </a:r>
+            <a:endParaRPr lang="en-US" sz="2800" dirty="0"/>
+          </a:p>
+        </p:txBody>
+      </p:sp>
+      <p:sp>
+        <p:nvSpPr>
+          <p:cNvPr id="3" name="Text 1"/>
+          <p:cNvSpPr txBox="1"/>
+          <p:nvPr/>
+        </p:nvSpPr>
+        <p:spPr>
+          <a:xfrm>
+            <a:off x="9951415" y="6455664"/>
+            <a:ext cx="2011680" cy="292608"/>
+          </a:xfrm>
+          <a:prstGeom prst="rect">
+            <a:avLst/>
+          </a:prstGeom>
+          <a:noFill/>
+          <a:ln/>
+        </p:spPr>
+        <p:txBody>
+          <a:bodyPr wrap="square" lIns="0" tIns="0" rIns="0" bIns="0" rtlCol="0" anchor="ctr"/>
+          <a:lstStyle/>
+          <a:p>
+            <a:pPr algn="r" indent="0" marL="0">
+              <a:buNone/>
+            </a:pPr>
+            <a:r>
+              <a:rPr lang="en-US" sz="1200" u="sng" dirty="0">
+                <a:solidFill>
+                  <a:srgbClr val="8A939B"/>
+                </a:solidFill>
+                <a:latin typeface="Calibri" pitchFamily="34" charset="0"/>
+                <a:ea typeface="Calibri" pitchFamily="34" charset="-122"/>
+                <a:cs typeface="Calibri" pitchFamily="34" charset="-120"/>
+                <a:hlinkClick r:id="rId1" invalidUrl="" action="" tgtFrame="" tooltip="" history="1" highlightClick="0" endSnd="0">
+                  <a:extLst>
+                    <a:ext uri="{A12FA001-AC4F-418D-AE19-62706E023703}">
+                      <ahyp:hlinkClr xmlns:ahyp="http://schemas.microsoft.com/office/drawing/2018/hyperlinkcolor" val="tx"/>
+                    </a:ext>
+                  </a:extLst>
+                </a:hlinkClick>
+              </a:rPr>
+              <a:t>cuinotes.com</a:t>
+            </a:r>
+            <a:pPr algn="r" indent="0" marL="0">
+              <a:buNone/>
+            </a:pPr>
+            <a:r>
+              <a:rPr lang="en-US" sz="1200" dirty="0">
+                <a:solidFill>
+                  <a:srgbClr val="8A939B"/>
+                </a:solidFill>
+                <a:latin typeface="Calibri" pitchFamily="34" charset="0"/>
+                <a:ea typeface="Calibri" pitchFamily="34" charset="-122"/>
+                <a:cs typeface="Calibri" pitchFamily="34" charset="-120"/>
+              </a:rPr>
+              <a:t>  ·  9</a:t>
+            </a:r>
+            <a:endParaRPr lang="en-US" sz="1200" dirty="0"/>
+          </a:p>
+        </p:txBody>
+      </p:sp>
+      <p:sp>
+        <p:nvSpPr>
+          <p:cNvPr id="4" name="Text 2"/>
+          <p:cNvSpPr txBox="1"/>
+          <p:nvPr/>
+        </p:nvSpPr>
+        <p:spPr>
+          <a:xfrm>
+            <a:off x="640080" y="1371600"/>
+            <a:ext cx="10332720" cy="4846320"/>
+          </a:xfrm>
+          <a:prstGeom prst="rect">
+            <a:avLst/>
+          </a:prstGeom>
+          <a:noFill/>
+          <a:ln/>
+        </p:spPr>
+        <p:txBody>
+          <a:bodyPr wrap="square" lIns="0" tIns="0" rIns="0" bIns="0" rtlCol="0" anchor="t"/>
+          <a:lstStyle/>
+          <a:p>
+            <a:pPr marL="342900" indent="-342900">
+              <a:spcAft>
+                <a:spcPts val="1800"/>
+              </a:spcAft>
+              <a:buSzPct val="100000"/>
+              <a:buChar char="•"/>
+            </a:pPr>
+            <a:r>
+              <a:rPr lang="en-US" sz="1800" dirty="0">
+                <a:solidFill>
+                  <a:srgbClr val="1F2429"/>
+                </a:solidFill>
+                <a:latin typeface="Calibri" pitchFamily="34" charset="0"/>
+                <a:ea typeface="Calibri" pitchFamily="34" charset="-122"/>
+                <a:cs typeface="Calibri" pitchFamily="34" charset="-120"/>
+              </a:rPr>
+              <a:t>Procedural (relational-algebra style): take Book, select rows where author is Martin, select rows where available is true, then project title and isbn</a:t>
+            </a:r>
+            <a:endParaRPr lang="en-US" sz="1800" dirty="0"/>
+          </a:p>
+          <a:p>
+            <a:pPr marL="342900" indent="-342900">
+              <a:spcAft>
+                <a:spcPts val="1800"/>
+              </a:spcAft>
+              <a:buSzPct val="100000"/>
+              <a:buChar char="•"/>
+            </a:pPr>
+            <a:r>
+              <a:rPr lang="en-US" sz="1800" dirty="0">
+                <a:solidFill>
+                  <a:srgbClr val="1F2429"/>
+                </a:solidFill>
+                <a:latin typeface="Calibri" pitchFamily="34" charset="0"/>
+                <a:ea typeface="Calibri" pitchFamily="34" charset="-122"/>
+                <a:cs typeface="Calibri" pitchFamily="34" charset="-120"/>
+              </a:rPr>
+              <a:t>Every step is spelled out in order; the writer of the query controls the evaluation sequence</a:t>
+            </a:r>
+            <a:endParaRPr lang="en-US" sz="1800" dirty="0"/>
+          </a:p>
+          <a:p>
+            <a:pPr marL="342900" indent="-342900">
+              <a:spcAft>
+                <a:spcPts val="1800"/>
+              </a:spcAft>
+              <a:buSzPct val="100000"/>
+              <a:buChar char="•"/>
+            </a:pPr>
+            <a:r>
+              <a:rPr lang="en-US" sz="1800" dirty="0">
+                <a:solidFill>
+                  <a:srgbClr val="1F2429"/>
+                </a:solidFill>
+                <a:latin typeface="Calibri" pitchFamily="34" charset="0"/>
+                <a:ea typeface="Calibri" pitchFamily="34" charset="-122"/>
+                <a:cs typeface="Calibri" pitchFamily="34" charset="-120"/>
+              </a:rPr>
+              <a:t>Declarative (SQL style): SELECT title, isbn FROM Book WHERE author = 'Robert C. Martin' AND available = true</a:t>
+            </a:r>
+            <a:endParaRPr lang="en-US" sz="1800" dirty="0"/>
+          </a:p>
+          <a:p>
+            <a:pPr marL="342900" indent="-342900">
+              <a:spcAft>
+                <a:spcPts val="1800"/>
+              </a:spcAft>
+              <a:buSzPct val="100000"/>
+              <a:buChar char="•"/>
+            </a:pPr>
+            <a:r>
+              <a:rPr lang="en-US" sz="1800" dirty="0">
+                <a:solidFill>
+                  <a:srgbClr val="1F2429"/>
+                </a:solidFill>
+                <a:latin typeface="Calibri" pitchFamily="34" charset="0"/>
+                <a:ea typeface="Calibri" pitchFamily="34" charset="-122"/>
+                <a:cs typeface="Calibri" pitchFamily="34" charset="-120"/>
+              </a:rPr>
+              <a:t>The declarative version states only the result wanted; the optimizer chooses an index or a full scan</a:t>
+            </a:r>
+            <a:endParaRPr lang="en-US" sz="1800" dirty="0"/>
+          </a:p>
+          <a:p>
+            <a:pPr marL="342900" indent="-342900">
+              <a:spcAft>
+                <a:spcPts val="1800"/>
+              </a:spcAft>
+              <a:buSzPct val="100000"/>
+              <a:buChar char="•"/>
+            </a:pPr>
+            <a:r>
+              <a:rPr lang="en-US" sz="1800" dirty="0">
+                <a:solidFill>
+                  <a:srgbClr val="1F2429"/>
+                </a:solidFill>
+                <a:latin typeface="Calibri" pitchFamily="34" charset="0"/>
+                <a:ea typeface="Calibri" pitchFamily="34" charset="-122"/>
+                <a:cs typeface="Calibri" pitchFamily="34" charset="-120"/>
+              </a:rPr>
+              <a:t>Both produce the same rows — the difference is who decides how the rows are fetched</a:t>
+            </a:r>
+            <a:endParaRPr lang="en-US" sz="1800" dirty="0"/>
+          </a:p>
+        </p:txBody>
+      </p:sp>
+    </p:spTree>
+  </p:cSld>
+  <p:clrMapOvr>
+    <a:masterClrMapping/>
+  </p:clrMapOvr>
+</p:sld>
+</file>
+
+<file path=ppt/slides/slide14.xml><?xml version="1.0" encoding="utf-8"?>
+<p:sld xmlns:a="http://schemas.openxmlformats.org/drawingml/2006/main" xmlns:r="http://schemas.openxmlformats.org/officeDocument/2006/relationships" xmlns:p="http://schemas.openxmlformats.org/presentationml/2006/main">
+  <p:cSld name="Slide 2">
+    <p:bg>
+      <p:bgPr>
+        <a:solidFill>
+          <a:srgbClr val="F7F8F9"/>
+        </a:solidFill>
+      </p:bgPr>
+    </p:bg>
+    <p:spTree>
+      <p:nvGrpSpPr>
+        <p:cNvPr id="1" name=""/>
+        <p:cNvGrpSpPr/>
+        <p:nvPr/>
+      </p:nvGrpSpPr>
+      <p:grpSpPr>
+        <a:xfrm>
+          <a:off x="0" y="0"/>
+          <a:ext cx="0" cy="0"/>
+          <a:chOff x="0" y="0"/>
+          <a:chExt cx="0" cy="0"/>
+        </a:xfrm>
+      </p:grpSpPr>
+      <p:sp>
+        <p:nvSpPr>
+          <p:cNvPr id="2" name="Text 0"/>
+          <p:cNvSpPr txBox="1"/>
+          <p:nvPr/>
+        </p:nvSpPr>
+        <p:spPr>
+          <a:xfrm>
+            <a:off x="548640" y="365760"/>
+            <a:ext cx="11064240" cy="731520"/>
+          </a:xfrm>
+          <a:prstGeom prst="rect">
+            <a:avLst/>
+          </a:prstGeom>
+          <a:noFill/>
+          <a:ln/>
+        </p:spPr>
+        <p:txBody>
+          <a:bodyPr wrap="square" lIns="0" tIns="0" rIns="0" bIns="0" rtlCol="0" anchor="ctr"/>
+          <a:lstStyle/>
+          <a:p>
+            <a:pPr indent="0" marL="0">
+              <a:buNone/>
+            </a:pPr>
+            <a:r>
+              <a:rPr lang="en-US" sz="2800" b="1" dirty="0">
+                <a:solidFill>
+                  <a:srgbClr val="1F2429"/>
+                </a:solidFill>
+                <a:latin typeface="Calibri" pitchFamily="34" charset="0"/>
+                <a:ea typeface="Calibri" pitchFamily="34" charset="-122"/>
+                <a:cs typeface="Calibri" pitchFamily="34" charset="-120"/>
+              </a:rPr>
+              <a:t>Returning a Book: One Action, Several Statements</a:t>
+            </a:r>
+            <a:endParaRPr lang="en-US" sz="2800" dirty="0"/>
+          </a:p>
+        </p:txBody>
+      </p:sp>
+      <p:sp>
+        <p:nvSpPr>
+          <p:cNvPr id="3" name="Text 1"/>
+          <p:cNvSpPr txBox="1"/>
+          <p:nvPr/>
+        </p:nvSpPr>
+        <p:spPr>
+          <a:xfrm>
+            <a:off x="9951415" y="6455664"/>
+            <a:ext cx="2011680" cy="292608"/>
+          </a:xfrm>
+          <a:prstGeom prst="rect">
+            <a:avLst/>
+          </a:prstGeom>
+          <a:noFill/>
+          <a:ln/>
+        </p:spPr>
+        <p:txBody>
+          <a:bodyPr wrap="square" lIns="0" tIns="0" rIns="0" bIns="0" rtlCol="0" anchor="ctr"/>
+          <a:lstStyle/>
+          <a:p>
+            <a:pPr algn="r" indent="0" marL="0">
+              <a:buNone/>
+            </a:pPr>
+            <a:r>
+              <a:rPr lang="en-US" sz="1200" u="sng" dirty="0">
+                <a:solidFill>
+                  <a:srgbClr val="8A939B"/>
+                </a:solidFill>
+                <a:latin typeface="Calibri" pitchFamily="34" charset="0"/>
+                <a:ea typeface="Calibri" pitchFamily="34" charset="-122"/>
+                <a:cs typeface="Calibri" pitchFamily="34" charset="-120"/>
+                <a:hlinkClick r:id="rId1" invalidUrl="" action="" tgtFrame="" tooltip="" history="1" highlightClick="0" endSnd="0">
+                  <a:extLst>
+                    <a:ext uri="{A12FA001-AC4F-418D-AE19-62706E023703}">
+                      <ahyp:hlinkClr xmlns:ahyp="http://schemas.microsoft.com/office/drawing/2018/hyperlinkcolor" val="tx"/>
+                    </a:ext>
+                  </a:extLst>
+                </a:hlinkClick>
+              </a:rPr>
+              <a:t>cuinotes.com</a:t>
+            </a:r>
+            <a:pPr algn="r" indent="0" marL="0">
+              <a:buNone/>
+            </a:pPr>
+            <a:r>
+              <a:rPr lang="en-US" sz="1200" dirty="0">
+                <a:solidFill>
+                  <a:srgbClr val="8A939B"/>
+                </a:solidFill>
+                <a:latin typeface="Calibri" pitchFamily="34" charset="0"/>
+                <a:ea typeface="Calibri" pitchFamily="34" charset="-122"/>
+                <a:cs typeface="Calibri" pitchFamily="34" charset="-120"/>
+              </a:rPr>
+              <a:t>  ·  10</a:t>
+            </a:r>
+            <a:endParaRPr lang="en-US" sz="1200" dirty="0"/>
+          </a:p>
+        </p:txBody>
+      </p:sp>
+      <p:sp>
+        <p:nvSpPr>
+          <p:cNvPr id="4" name="Text 2"/>
+          <p:cNvSpPr txBox="1"/>
+          <p:nvPr/>
+        </p:nvSpPr>
+        <p:spPr>
+          <a:xfrm>
+            <a:off x="640080" y="1371600"/>
+            <a:ext cx="10332720" cy="4846320"/>
+          </a:xfrm>
+          <a:prstGeom prst="rect">
+            <a:avLst/>
+          </a:prstGeom>
+          <a:noFill/>
+          <a:ln/>
+        </p:spPr>
+        <p:txBody>
+          <a:bodyPr wrap="square" lIns="0" tIns="0" rIns="0" bIns="0" rtlCol="0" anchor="t"/>
+          <a:lstStyle/>
+          <a:p>
+            <a:pPr marL="342900" indent="-342900">
+              <a:spcAft>
+                <a:spcPts val="1800"/>
+              </a:spcAft>
+              <a:buSzPct val="100000"/>
+              <a:buChar char="•"/>
+            </a:pPr>
+            <a:r>
+              <a:rPr lang="en-US" sz="1800" dirty="0">
+                <a:solidFill>
+                  <a:srgbClr val="1F2429"/>
+                </a:solidFill>
+                <a:latin typeface="Calibri" pitchFamily="34" charset="0"/>
+                <a:ea typeface="Calibri" pitchFamily="34" charset="-122"/>
+                <a:cs typeface="Calibri" pitchFamily="34" charset="-120"/>
+              </a:rPr>
+              <a:t>The logical action: a member returns Clean Code</a:t>
+            </a:r>
+            <a:endParaRPr lang="en-US" sz="1800" dirty="0"/>
+          </a:p>
+          <a:p>
+            <a:pPr marL="342900" indent="-342900">
+              <a:spcAft>
+                <a:spcPts val="1800"/>
+              </a:spcAft>
+              <a:buSzPct val="100000"/>
+              <a:buChar char="•"/>
+            </a:pPr>
+            <a:r>
+              <a:rPr lang="en-US" sz="1800" dirty="0">
+                <a:solidFill>
+                  <a:srgbClr val="1F2429"/>
+                </a:solidFill>
+                <a:latin typeface="Calibri" pitchFamily="34" charset="0"/>
+                <a:ea typeface="Calibri" pitchFamily="34" charset="-122"/>
+                <a:cs typeface="Calibri" pitchFamily="34" charset="-120"/>
+              </a:rPr>
+              <a:t>Statement 1 (UPDATE): set Book.available to true for that isbn</a:t>
+            </a:r>
+            <a:endParaRPr lang="en-US" sz="1800" dirty="0"/>
+          </a:p>
+          <a:p>
+            <a:pPr marL="342900" indent="-342900">
+              <a:spcAft>
+                <a:spcPts val="1800"/>
+              </a:spcAft>
+              <a:buSzPct val="100000"/>
+              <a:buChar char="•"/>
+            </a:pPr>
+            <a:r>
+              <a:rPr lang="en-US" sz="1800" dirty="0">
+                <a:solidFill>
+                  <a:srgbClr val="1F2429"/>
+                </a:solidFill>
+                <a:latin typeface="Calibri" pitchFamily="34" charset="0"/>
+                <a:ea typeface="Calibri" pitchFamily="34" charset="-122"/>
+                <a:cs typeface="Calibri" pitchFamily="34" charset="-120"/>
+              </a:rPr>
+              <a:t>Statement 2 (DELETE): remove the matching loan record</a:t>
+            </a:r>
+            <a:endParaRPr lang="en-US" sz="1800" dirty="0"/>
+          </a:p>
+          <a:p>
+            <a:pPr marL="342900" indent="-342900">
+              <a:spcAft>
+                <a:spcPts val="1800"/>
+              </a:spcAft>
+              <a:buSzPct val="100000"/>
+              <a:buChar char="•"/>
+            </a:pPr>
+            <a:r>
+              <a:rPr lang="en-US" sz="1800" dirty="0">
+                <a:solidFill>
+                  <a:srgbClr val="1F2429"/>
+                </a:solidFill>
+                <a:latin typeface="Calibri" pitchFamily="34" charset="0"/>
+                <a:ea typeface="Calibri" pitchFamily="34" charset="-122"/>
+                <a:cs typeface="Calibri" pitchFamily="34" charset="-120"/>
+              </a:rPr>
+              <a:t>Neither statement alone describes “the return” — the business event needs both</a:t>
+            </a:r>
+            <a:endParaRPr lang="en-US" sz="1800" dirty="0"/>
+          </a:p>
+          <a:p>
+            <a:pPr marL="342900" indent="-342900">
+              <a:spcAft>
+                <a:spcPts val="1800"/>
+              </a:spcAft>
+              <a:buSzPct val="100000"/>
+              <a:buChar char="•"/>
+            </a:pPr>
+            <a:r>
+              <a:rPr lang="en-US" sz="1800" dirty="0">
+                <a:solidFill>
+                  <a:srgbClr val="1F2429"/>
+                </a:solidFill>
+                <a:latin typeface="Calibri" pitchFamily="34" charset="0"/>
+                <a:ea typeface="Calibri" pitchFamily="34" charset="-122"/>
+                <a:cs typeface="Calibri" pitchFamily="34" charset="-120"/>
+              </a:rPr>
+              <a:t>If the server fails between them, the book shows as available while the loan still exists, or the reverse</a:t>
+            </a:r>
+            <a:endParaRPr lang="en-US" sz="1800" dirty="0"/>
+          </a:p>
+          <a:p>
+            <a:pPr marL="342900" indent="-342900">
+              <a:spcAft>
+                <a:spcPts val="1800"/>
+              </a:spcAft>
+              <a:buSzPct val="100000"/>
+              <a:buChar char="•"/>
+            </a:pPr>
+            <a:r>
+              <a:rPr lang="en-US" sz="1800" dirty="0">
+                <a:solidFill>
+                  <a:srgbClr val="1F2429"/>
+                </a:solidFill>
+                <a:latin typeface="Calibri" pitchFamily="34" charset="0"/>
+                <a:ea typeface="Calibri" pitchFamily="34" charset="-122"/>
+                <a:cs typeface="Calibri" pitchFamily="34" charset="-120"/>
+              </a:rPr>
+              <a:t>Lecture 29's transactions guarantee the group either completes together or not at all</a:t>
+            </a:r>
+            <a:endParaRPr lang="en-US" sz="1800" dirty="0"/>
+          </a:p>
+        </p:txBody>
+      </p:sp>
+    </p:spTree>
+  </p:cSld>
+  <p:clrMapOvr>
+    <a:masterClrMapping/>
+  </p:clrMapOvr>
+</p:sld>
+</file>
+
+<file path=ppt/slides/slide15.xml><?xml version="1.0" encoding="utf-8"?>
+<p:sld xmlns:a="http://schemas.openxmlformats.org/drawingml/2006/main" xmlns:r="http://schemas.openxmlformats.org/officeDocument/2006/relationships" xmlns:p="http://schemas.openxmlformats.org/presentationml/2006/main">
+  <p:cSld name="Slide 2">
+    <p:bg>
+      <p:bgPr>
+        <a:solidFill>
+          <a:srgbClr val="F7F8F9"/>
+        </a:solidFill>
+      </p:bgPr>
+    </p:bg>
+    <p:spTree>
+      <p:nvGrpSpPr>
+        <p:cNvPr id="1" name=""/>
+        <p:cNvGrpSpPr/>
+        <p:nvPr/>
+      </p:nvGrpSpPr>
+      <p:grpSpPr>
+        <a:xfrm>
+          <a:off x="0" y="0"/>
+          <a:ext cx="0" cy="0"/>
+          <a:chOff x="0" y="0"/>
+          <a:chExt cx="0" cy="0"/>
+        </a:xfrm>
+      </p:grpSpPr>
+      <p:sp>
+        <p:nvSpPr>
+          <p:cNvPr id="2" name="Text 0"/>
+          <p:cNvSpPr txBox="1"/>
+          <p:nvPr/>
+        </p:nvSpPr>
+        <p:spPr>
+          <a:xfrm>
+            <a:off x="548640" y="365760"/>
+            <a:ext cx="11064240" cy="731520"/>
+          </a:xfrm>
+          <a:prstGeom prst="rect">
+            <a:avLst/>
+          </a:prstGeom>
+          <a:noFill/>
+          <a:ln/>
+        </p:spPr>
+        <p:txBody>
+          <a:bodyPr wrap="square" lIns="0" tIns="0" rIns="0" bIns="0" rtlCol="0" anchor="ctr"/>
+          <a:lstStyle/>
+          <a:p>
+            <a:pPr indent="0" marL="0">
+              <a:buNone/>
+            </a:pPr>
+            <a:r>
+              <a:rPr lang="en-US" sz="2800" b="1" dirty="0">
+                <a:solidFill>
+                  <a:srgbClr val="1F2429"/>
+                </a:solidFill>
+                <a:latin typeface="Calibri" pitchFamily="34" charset="0"/>
+                <a:ea typeface="Calibri" pitchFamily="34" charset="-122"/>
+                <a:cs typeface="Calibri" pitchFamily="34" charset="-120"/>
+              </a:rPr>
+              <a:t>Granting and Revoking Privileges, Step by Step</a:t>
+            </a:r>
+            <a:endParaRPr lang="en-US" sz="2800" dirty="0"/>
+          </a:p>
+        </p:txBody>
+      </p:sp>
+      <p:sp>
+        <p:nvSpPr>
+          <p:cNvPr id="3" name="Text 1"/>
+          <p:cNvSpPr txBox="1"/>
+          <p:nvPr/>
+        </p:nvSpPr>
+        <p:spPr>
+          <a:xfrm>
+            <a:off x="9951415" y="6455664"/>
+            <a:ext cx="2011680" cy="292608"/>
+          </a:xfrm>
+          <a:prstGeom prst="rect">
+            <a:avLst/>
+          </a:prstGeom>
+          <a:noFill/>
+          <a:ln/>
+        </p:spPr>
+        <p:txBody>
+          <a:bodyPr wrap="square" lIns="0" tIns="0" rIns="0" bIns="0" rtlCol="0" anchor="ctr"/>
+          <a:lstStyle/>
+          <a:p>
+            <a:pPr algn="r" indent="0" marL="0">
+              <a:buNone/>
+            </a:pPr>
+            <a:r>
+              <a:rPr lang="en-US" sz="1200" u="sng" dirty="0">
+                <a:solidFill>
+                  <a:srgbClr val="8A939B"/>
+                </a:solidFill>
+                <a:latin typeface="Calibri" pitchFamily="34" charset="0"/>
+                <a:ea typeface="Calibri" pitchFamily="34" charset="-122"/>
+                <a:cs typeface="Calibri" pitchFamily="34" charset="-120"/>
+                <a:hlinkClick r:id="rId1" invalidUrl="" action="" tgtFrame="" tooltip="" history="1" highlightClick="0" endSnd="0">
+                  <a:extLst>
+                    <a:ext uri="{A12FA001-AC4F-418D-AE19-62706E023703}">
+                      <ahyp:hlinkClr xmlns:ahyp="http://schemas.microsoft.com/office/drawing/2018/hyperlinkcolor" val="tx"/>
+                    </a:ext>
+                  </a:extLst>
+                </a:hlinkClick>
+              </a:rPr>
+              <a:t>cuinotes.com</a:t>
+            </a:r>
+            <a:pPr algn="r" indent="0" marL="0">
+              <a:buNone/>
+            </a:pPr>
+            <a:r>
+              <a:rPr lang="en-US" sz="1200" dirty="0">
+                <a:solidFill>
+                  <a:srgbClr val="8A939B"/>
+                </a:solidFill>
+                <a:latin typeface="Calibri" pitchFamily="34" charset="0"/>
+                <a:ea typeface="Calibri" pitchFamily="34" charset="-122"/>
+                <a:cs typeface="Calibri" pitchFamily="34" charset="-120"/>
+              </a:rPr>
+              <a:t>  ·  12</a:t>
+            </a:r>
+            <a:endParaRPr lang="en-US" sz="1200" dirty="0"/>
+          </a:p>
+        </p:txBody>
+      </p:sp>
+      <p:sp>
+        <p:nvSpPr>
+          <p:cNvPr id="4" name="Text 2"/>
+          <p:cNvSpPr txBox="1"/>
+          <p:nvPr/>
+        </p:nvSpPr>
+        <p:spPr>
+          <a:xfrm>
+            <a:off x="640080" y="1371600"/>
+            <a:ext cx="10332720" cy="4846320"/>
+          </a:xfrm>
+          <a:prstGeom prst="rect">
+            <a:avLst/>
+          </a:prstGeom>
+          <a:noFill/>
+          <a:ln/>
+        </p:spPr>
+        <p:txBody>
+          <a:bodyPr wrap="square" lIns="0" tIns="0" rIns="0" bIns="0" rtlCol="0" anchor="t"/>
+          <a:lstStyle/>
+          <a:p>
+            <a:pPr marL="342900" indent="-342900">
+              <a:spcAft>
+                <a:spcPts val="1800"/>
+              </a:spcAft>
+              <a:buSzPct val="100000"/>
+              <a:buChar char="•"/>
+            </a:pPr>
+            <a:r>
+              <a:rPr lang="en-US" sz="1800" dirty="0">
+                <a:solidFill>
+                  <a:srgbClr val="1F2429"/>
+                </a:solidFill>
+                <a:latin typeface="Calibri" pitchFamily="34" charset="0"/>
+                <a:ea typeface="Calibri" pitchFamily="34" charset="-122"/>
+                <a:cs typeface="Calibri" pitchFamily="34" charset="-120"/>
+              </a:rPr>
+              <a:t>Step 1 — GRANT SELECT, UPDATE ON Book TO front_desk_clerk: the clerk can look up and change availability</a:t>
+            </a:r>
+            <a:endParaRPr lang="en-US" sz="1800" dirty="0"/>
+          </a:p>
+          <a:p>
+            <a:pPr marL="342900" indent="-342900">
+              <a:spcAft>
+                <a:spcPts val="1800"/>
+              </a:spcAft>
+              <a:buSzPct val="100000"/>
+              <a:buChar char="•"/>
+            </a:pPr>
+            <a:r>
+              <a:rPr lang="en-US" sz="1800" dirty="0">
+                <a:solidFill>
+                  <a:srgbClr val="1F2429"/>
+                </a:solidFill>
+                <a:latin typeface="Calibri" pitchFamily="34" charset="0"/>
+                <a:ea typeface="Calibri" pitchFamily="34" charset="-122"/>
+                <a:cs typeface="Calibri" pitchFamily="34" charset="-120"/>
+              </a:rPr>
+              <a:t>Step 2 — GRANT SELECT, INSERT, UPDATE, DELETE ON Book TO cataloging_librarian: full catalog maintenance</a:t>
+            </a:r>
+            <a:endParaRPr lang="en-US" sz="1800" dirty="0"/>
+          </a:p>
+          <a:p>
+            <a:pPr marL="342900" indent="-342900">
+              <a:spcAft>
+                <a:spcPts val="1800"/>
+              </a:spcAft>
+              <a:buSzPct val="100000"/>
+              <a:buChar char="•"/>
+            </a:pPr>
+            <a:r>
+              <a:rPr lang="en-US" sz="1800" dirty="0">
+                <a:solidFill>
+                  <a:srgbClr val="1F2429"/>
+                </a:solidFill>
+                <a:latin typeface="Calibri" pitchFamily="34" charset="0"/>
+                <a:ea typeface="Calibri" pitchFamily="34" charset="-122"/>
+                <a:cs typeface="Calibri" pitchFamily="34" charset="-120"/>
+              </a:rPr>
+              <a:t>Step 3 — GRANT SELECT ON Book TO patron_portal: read-only access for self-service search</a:t>
+            </a:r>
+            <a:endParaRPr lang="en-US" sz="1800" dirty="0"/>
+          </a:p>
+          <a:p>
+            <a:pPr marL="342900" indent="-342900">
+              <a:spcAft>
+                <a:spcPts val="1800"/>
+              </a:spcAft>
+              <a:buSzPct val="100000"/>
+              <a:buChar char="•"/>
+            </a:pPr>
+            <a:r>
+              <a:rPr lang="en-US" sz="1800" dirty="0">
+                <a:solidFill>
+                  <a:srgbClr val="1F2429"/>
+                </a:solidFill>
+                <a:latin typeface="Calibri" pitchFamily="34" charset="0"/>
+                <a:ea typeface="Calibri" pitchFamily="34" charset="-122"/>
+                <a:cs typeface="Calibri" pitchFamily="34" charset="-120"/>
+              </a:rPr>
+              <a:t>Step 4 — when a clerk leaves: REVOKE SELECT, UPDATE ON Book FROM front_desk_clerk takes the privilege back</a:t>
+            </a:r>
+            <a:endParaRPr lang="en-US" sz="1800" dirty="0"/>
+          </a:p>
+          <a:p>
+            <a:pPr marL="342900" indent="-342900">
+              <a:spcAft>
+                <a:spcPts val="1800"/>
+              </a:spcAft>
+              <a:buSzPct val="100000"/>
+              <a:buChar char="•"/>
+            </a:pPr>
+            <a:r>
+              <a:rPr lang="en-US" sz="1800" dirty="0">
+                <a:solidFill>
+                  <a:srgbClr val="1F2429"/>
+                </a:solidFill>
+                <a:latin typeface="Calibri" pitchFamily="34" charset="0"/>
+                <a:ea typeface="Calibri" pitchFamily="34" charset="-122"/>
+                <a:cs typeface="Calibri" pitchFamily="34" charset="-120"/>
+              </a:rPr>
+              <a:t>The policy lives in these statements, and the DBMS enforces it on every request — not only on the ones an application remembers to check</a:t>
+            </a:r>
+            <a:endParaRPr lang="en-US" sz="1800" dirty="0"/>
+          </a:p>
+        </p:txBody>
+      </p:sp>
+    </p:spTree>
+  </p:cSld>
+  <p:clrMapOvr>
+    <a:masterClrMapping/>
+  </p:clrMapOvr>
+</p:sld>
+</file>
+
+<file path=ppt/slides/slide16.xml><?xml version="1.0" encoding="utf-8"?>
+<p:sld xmlns:a="http://schemas.openxmlformats.org/drawingml/2006/main" xmlns:r="http://schemas.openxmlformats.org/officeDocument/2006/relationships" xmlns:p="http://schemas.openxmlformats.org/presentationml/2006/main">
+  <p:cSld name="Slide 7">
+    <p:bg>
+      <p:bgPr>
+        <a:solidFill>
+          <a:srgbClr val="F7F8F9"/>
+        </a:solidFill>
+      </p:bgPr>
+    </p:bg>
+    <p:spTree>
+      <p:nvGrpSpPr>
+        <p:cNvPr id="1" name=""/>
+        <p:cNvGrpSpPr/>
+        <p:nvPr/>
+      </p:nvGrpSpPr>
+      <p:grpSpPr>
+        <a:xfrm>
+          <a:off x="0" y="0"/>
+          <a:ext cx="0" cy="0"/>
+          <a:chOff x="0" y="0"/>
+          <a:chExt cx="0" cy="0"/>
+        </a:xfrm>
+      </p:grpSpPr>
+      <p:sp>
+        <p:nvSpPr>
+          <p:cNvPr id="2" name="Text 0"/>
+          <p:cNvSpPr txBox="1"/>
+          <p:nvPr/>
+        </p:nvSpPr>
+        <p:spPr>
+          <a:xfrm>
+            <a:off x="548640" y="365760"/>
+            <a:ext cx="11064240" cy="731520"/>
+          </a:xfrm>
+          <a:prstGeom prst="rect">
+            <a:avLst/>
+          </a:prstGeom>
+          <a:noFill/>
+          <a:ln/>
+        </p:spPr>
+        <p:txBody>
+          <a:bodyPr wrap="square" lIns="0" tIns="0" rIns="0" bIns="0" rtlCol="0" anchor="ctr"/>
+          <a:lstStyle/>
+          <a:p>
+            <a:pPr indent="0" marL="0">
+              <a:buNone/>
+            </a:pPr>
+            <a:r>
+              <a:rPr lang="en-US" sz="2800" b="1" dirty="0">
+                <a:solidFill>
+                  <a:srgbClr val="1F2429"/>
+                </a:solidFill>
+                <a:latin typeface="Calibri" pitchFamily="34" charset="0"/>
+                <a:ea typeface="Calibri" pitchFamily="34" charset="-122"/>
+                <a:cs typeface="Calibri" pitchFamily="34" charset="-120"/>
+              </a:rPr>
+              <a:t>Which Language Does This Task Use?</a:t>
+            </a:r>
+            <a:endParaRPr lang="en-US" sz="2800" dirty="0"/>
+          </a:p>
+        </p:txBody>
+      </p:sp>
+      <p:sp>
+        <p:nvSpPr>
+          <p:cNvPr id="3" name="Text 1"/>
+          <p:cNvSpPr txBox="1"/>
+          <p:nvPr/>
+        </p:nvSpPr>
+        <p:spPr>
+          <a:xfrm>
+            <a:off x="9951415" y="6455664"/>
+            <a:ext cx="2011680" cy="292608"/>
+          </a:xfrm>
+          <a:prstGeom prst="rect">
+            <a:avLst/>
+          </a:prstGeom>
+          <a:noFill/>
+          <a:ln/>
+        </p:spPr>
+        <p:txBody>
+          <a:bodyPr wrap="square" lIns="0" tIns="0" rIns="0" bIns="0" rtlCol="0" anchor="ctr"/>
+          <a:lstStyle/>
+          <a:p>
+            <a:pPr algn="r" indent="0" marL="0">
+              <a:buNone/>
+            </a:pPr>
+            <a:r>
+              <a:rPr lang="en-US" sz="1200" u="sng" dirty="0">
+                <a:solidFill>
+                  <a:srgbClr val="8A939B"/>
+                </a:solidFill>
+                <a:latin typeface="Calibri" pitchFamily="34" charset="0"/>
+                <a:ea typeface="Calibri" pitchFamily="34" charset="-122"/>
+                <a:cs typeface="Calibri" pitchFamily="34" charset="-120"/>
+                <a:hlinkClick r:id="rId1" invalidUrl="" action="" tgtFrame="" tooltip="" history="1" highlightClick="0" endSnd="0">
+                  <a:extLst>
+                    <a:ext uri="{A12FA001-AC4F-418D-AE19-62706E023703}">
+                      <ahyp:hlinkClr xmlns:ahyp="http://schemas.microsoft.com/office/drawing/2018/hyperlinkcolor" val="tx"/>
+                    </a:ext>
+                  </a:extLst>
+                </a:hlinkClick>
+              </a:rPr>
+              <a:t>cuinotes.com</a:t>
+            </a:r>
+            <a:pPr algn="r" indent="0" marL="0">
+              <a:buNone/>
+            </a:pPr>
+            <a:r>
+              <a:rPr lang="en-US" sz="1200" dirty="0">
+                <a:solidFill>
+                  <a:srgbClr val="8A939B"/>
+                </a:solidFill>
+                <a:latin typeface="Calibri" pitchFamily="34" charset="0"/>
+                <a:ea typeface="Calibri" pitchFamily="34" charset="-122"/>
+                <a:cs typeface="Calibri" pitchFamily="34" charset="-120"/>
+              </a:rPr>
+              <a:t>  ·  13</a:t>
+            </a:r>
+            <a:endParaRPr lang="en-US" sz="1200" dirty="0"/>
+          </a:p>
+        </p:txBody>
+      </p:sp>
+      <p:sp>
+        <p:nvSpPr>
+          <p:cNvPr id="4" name="Text 2"/>
+          <p:cNvSpPr txBox="1"/>
+          <p:nvPr/>
+        </p:nvSpPr>
+        <p:spPr>
+          <a:xfrm>
+            <a:off x="640080" y="1143000"/>
+            <a:ext cx="10881360" cy="777240"/>
+          </a:xfrm>
+          <a:prstGeom prst="rect">
+            <a:avLst/>
+          </a:prstGeom>
+          <a:noFill/>
+          <a:ln/>
+        </p:spPr>
+        <p:txBody>
+          <a:bodyPr wrap="square" lIns="0" tIns="0" rIns="0" bIns="0" rtlCol="0" anchor="t"/>
+          <a:lstStyle/>
+          <a:p>
+            <a:pPr indent="0" marL="0">
+              <a:buNone/>
+            </a:pPr>
+            <a:r>
+              <a:rPr lang="en-US" sz="1800" dirty="0">
+                <a:solidFill>
+                  <a:srgbClr val="1F2429"/>
+                </a:solidFill>
+                <a:latin typeface="Calibri" pitchFamily="34" charset="0"/>
+                <a:ea typeface="Calibri" pitchFamily="34" charset="-122"/>
+                <a:cs typeface="Calibri" pitchFamily="34" charset="-120"/>
+              </a:rPr>
+              <a:t>The same few statement types cover almost every library task. Match each task to the sub-language that owns it.</a:t>
+            </a:r>
+            <a:endParaRPr lang="en-US" sz="1800" dirty="0"/>
+          </a:p>
+        </p:txBody>
+      </p:sp>
+      <p:graphicFrame>
+        <p:nvGraphicFramePr>
+          <p:cNvPr id="8" name="Table 0"/>
+          <p:cNvGraphicFramePr>
+            <a:graphicFrameLocks noGrp="1"/>
+          </p:cNvGraphicFramePr>
+          <p:nvPr>
+            <p:extLst>
+              <p:ext uri="{D42A27DB-BD31-4B8C-83A1-F6EECF244321}">
+                <p14:modId xmlns:p14="http://schemas.microsoft.com/office/powerpoint/2010/main" val="1579011935"/>
+              </p:ext>
+            </p:extLst>
+          </p:nvPr>
+        </p:nvGraphicFramePr>
+        <p:xfrm>
+          <a:off x="640080" y="2011680"/>
+          <a:ext cx="10881360" cy="4023360"/>
+        </p:xfrm>
+        <a:graphic>
+          <a:graphicData uri="http://schemas.openxmlformats.org/drawingml/2006/table">
+            <a:tbl>
+              <a:tblPr/>
+              <a:tblGrid>
+                <a:gridCol w="2377440"/>
+                <a:gridCol w="4572000"/>
+                <a:gridCol w="3931920"/>
+              </a:tblGrid>
+              <a:tr h="574766">
+                <a:tc>
+                  <a:txBody>
+                    <a:bodyPr/>
+                    <a:lstStyle/>
+                    <a:p>
+                      <a:pPr indent="0" marL="0">
+                        <a:buNone/>
+                      </a:pPr>
+                      <a:r>
+                        <a:rPr lang="en-US" sz="1400" b="1" dirty="0">
+                          <a:solidFill>
+                            <a:srgbClr val="FFFFFF"/>
+                          </a:solidFill>
+                          <a:latin typeface="Calibri" pitchFamily="34" charset="0"/>
+                          <a:ea typeface="Calibri" pitchFamily="34" charset="-122"/>
+                          <a:cs typeface="Calibri" pitchFamily="34" charset="-120"/>
+                        </a:rPr>
+                        <a:t>Task</a:t>
+                      </a:r>
+                      <a:endParaRPr lang="en-US" sz="1400" dirty="0">
+                        <a:latin typeface="Calibri" charset="0"/>
+                        <a:ea typeface="Calibri" charset="0"/>
+                        <a:cs typeface="Calibri" charset="0"/>
+                      </a:endParaRPr>
+                    </a:p>
+                  </a:txBody>
+                  <a:tcPr marL="91440" marR="91440" marT="45720" marB="45720" anchor="ctr">
+                    <a:lnL w="9525" cap="flat" cmpd="sng" algn="ctr">
+                      <a:solidFill>
+                        <a:srgbClr val="E1E4E8"/>
+                      </a:solidFill>
+                      <a:prstDash val="solid"/>
+                      <a:round/>
+                      <a:headEnd type="none" w="med" len="med"/>
+                      <a:tailEnd type="none" w="med" len="med"/>
+                    </a:lnL>
+                    <a:lnR w="9525" cap="flat" cmpd="sng" algn="ctr">
+                      <a:solidFill>
+                        <a:srgbClr val="E1E4E8"/>
+                      </a:solidFill>
+                      <a:prstDash val="solid"/>
+                      <a:round/>
+                      <a:headEnd type="none" w="med" len="med"/>
+                      <a:tailEnd type="none" w="med" len="med"/>
+                    </a:lnR>
+                    <a:lnT w="9525" cap="flat" cmpd="sng" algn="ctr">
+                      <a:solidFill>
+                        <a:srgbClr val="E1E4E8"/>
+                      </a:solidFill>
+                      <a:prstDash val="solid"/>
+                      <a:round/>
+                      <a:headEnd type="none" w="med" len="med"/>
+                      <a:tailEnd type="none" w="med" len="med"/>
+                    </a:lnT>
+                    <a:lnB w="9525" cap="flat" cmpd="sng" algn="ctr">
+                      <a:solidFill>
+                        <a:srgbClr val="E1E4E8"/>
+                      </a:solidFill>
+                      <a:prstDash val="solid"/>
+                      <a:round/>
+                      <a:headEnd type="none" w="med" len="med"/>
+                      <a:tailEnd type="none" w="med" len="med"/>
+                    </a:lnB>
+                    <a:solidFill>
+                      <a:srgbClr val="1F2429"/>
+                    </a:solidFill>
+                  </a:tcPr>
+                </a:tc>
+                <a:tc>
+                  <a:txBody>
+                    <a:bodyPr/>
+                    <a:lstStyle/>
+                    <a:p>
+                      <a:pPr indent="0" marL="0">
+                        <a:buNone/>
+                      </a:pPr>
+                      <a:r>
+                        <a:rPr lang="en-US" sz="1400" b="1" dirty="0">
+                          <a:solidFill>
+                            <a:srgbClr val="FFFFFF"/>
+                          </a:solidFill>
+                          <a:latin typeface="Calibri" pitchFamily="34" charset="0"/>
+                          <a:ea typeface="Calibri" pitchFamily="34" charset="-122"/>
+                          <a:cs typeface="Calibri" pitchFamily="34" charset="-120"/>
+                        </a:rPr>
+                        <a:t>Language</a:t>
+                      </a:r>
+                      <a:endParaRPr lang="en-US" sz="1400" dirty="0">
+                        <a:latin typeface="Calibri" charset="0"/>
+                        <a:ea typeface="Calibri" charset="0"/>
+                        <a:cs typeface="Calibri" charset="0"/>
+                      </a:endParaRPr>
+                    </a:p>
+                  </a:txBody>
+                  <a:tcPr marL="91440" marR="91440" marT="45720" marB="45720" anchor="ctr">
+                    <a:lnL w="9525" cap="flat" cmpd="sng" algn="ctr">
+                      <a:solidFill>
+                        <a:srgbClr val="E1E4E8"/>
+                      </a:solidFill>
+                      <a:prstDash val="solid"/>
+                      <a:round/>
+                      <a:headEnd type="none" w="med" len="med"/>
+                      <a:tailEnd type="none" w="med" len="med"/>
+                    </a:lnL>
+                    <a:lnR w="9525" cap="flat" cmpd="sng" algn="ctr">
+                      <a:solidFill>
+                        <a:srgbClr val="E1E4E8"/>
+                      </a:solidFill>
+                      <a:prstDash val="solid"/>
+                      <a:round/>
+                      <a:headEnd type="none" w="med" len="med"/>
+                      <a:tailEnd type="none" w="med" len="med"/>
+                    </a:lnR>
+                    <a:lnT w="9525" cap="flat" cmpd="sng" algn="ctr">
+                      <a:solidFill>
+                        <a:srgbClr val="E1E4E8"/>
+                      </a:solidFill>
+                      <a:prstDash val="solid"/>
+                      <a:round/>
+                      <a:headEnd type="none" w="med" len="med"/>
+                      <a:tailEnd type="none" w="med" len="med"/>
+                    </a:lnT>
+                    <a:lnB w="9525" cap="flat" cmpd="sng" algn="ctr">
+                      <a:solidFill>
+                        <a:srgbClr val="E1E4E8"/>
+                      </a:solidFill>
+                      <a:prstDash val="solid"/>
+                      <a:round/>
+                      <a:headEnd type="none" w="med" len="med"/>
+                      <a:tailEnd type="none" w="med" len="med"/>
+                    </a:lnB>
+                    <a:solidFill>
+                      <a:srgbClr val="1F2429"/>
+                    </a:solidFill>
+                  </a:tcPr>
+                </a:tc>
+                <a:tc>
+                  <a:txBody>
+                    <a:bodyPr/>
+                    <a:lstStyle/>
+                    <a:p>
+                      <a:pPr indent="0" marL="0">
+                        <a:buNone/>
+                      </a:pPr>
+                      <a:r>
+                        <a:rPr lang="en-US" sz="1400" b="1" dirty="0">
+                          <a:solidFill>
+                            <a:srgbClr val="FFFFFF"/>
+                          </a:solidFill>
+                          <a:latin typeface="Calibri" pitchFamily="34" charset="0"/>
+                          <a:ea typeface="Calibri" pitchFamily="34" charset="-122"/>
+                          <a:cs typeface="Calibri" pitchFamily="34" charset="-120"/>
+                        </a:rPr>
+                        <a:t>Example statement</a:t>
+                      </a:r>
+                      <a:endParaRPr lang="en-US" sz="1400" dirty="0">
+                        <a:latin typeface="Calibri" charset="0"/>
+                        <a:ea typeface="Calibri" charset="0"/>
+                        <a:cs typeface="Calibri" charset="0"/>
+                      </a:endParaRPr>
+                    </a:p>
+                  </a:txBody>
+                  <a:tcPr marL="91440" marR="91440" marT="45720" marB="45720" anchor="ctr">
+                    <a:lnL w="9525" cap="flat" cmpd="sng" algn="ctr">
+                      <a:solidFill>
+                        <a:srgbClr val="E1E4E8"/>
+                      </a:solidFill>
+                      <a:prstDash val="solid"/>
+                      <a:round/>
+                      <a:headEnd type="none" w="med" len="med"/>
+                      <a:tailEnd type="none" w="med" len="med"/>
+                    </a:lnL>
+                    <a:lnR w="9525" cap="flat" cmpd="sng" algn="ctr">
+                      <a:solidFill>
+                        <a:srgbClr val="E1E4E8"/>
+                      </a:solidFill>
+                      <a:prstDash val="solid"/>
+                      <a:round/>
+                      <a:headEnd type="none" w="med" len="med"/>
+                      <a:tailEnd type="none" w="med" len="med"/>
+                    </a:lnR>
+                    <a:lnT w="9525" cap="flat" cmpd="sng" algn="ctr">
+                      <a:solidFill>
+                        <a:srgbClr val="E1E4E8"/>
+                      </a:solidFill>
+                      <a:prstDash val="solid"/>
+                      <a:round/>
+                      <a:headEnd type="none" w="med" len="med"/>
+                      <a:tailEnd type="none" w="med" len="med"/>
+                    </a:lnT>
+                    <a:lnB w="9525" cap="flat" cmpd="sng" algn="ctr">
+                      <a:solidFill>
+                        <a:srgbClr val="E1E4E8"/>
+                      </a:solidFill>
+                      <a:prstDash val="solid"/>
+                      <a:round/>
+                      <a:headEnd type="none" w="med" len="med"/>
+                      <a:tailEnd type="none" w="med" len="med"/>
+                    </a:lnB>
+                    <a:solidFill>
+                      <a:srgbClr val="1F2429"/>
+                    </a:solidFill>
+                  </a:tcPr>
+                </a:tc>
+              </a:tr>
+              <a:tr h="574766">
+                <a:tc>
+                  <a:txBody>
+                    <a:bodyPr/>
+                    <a:lstStyle/>
+                    <a:p>
+                      <a:pPr indent="0" marL="0">
+                        <a:buNone/>
+                      </a:pPr>
+                      <a:r>
+                        <a:rPr lang="en-US" sz="1400" dirty="0">
+                          <a:solidFill>
+                            <a:srgbClr val="1F2429"/>
+                          </a:solidFill>
+                          <a:latin typeface="Calibri" pitchFamily="34" charset="0"/>
+                          <a:ea typeface="Calibri" pitchFamily="34" charset="-122"/>
+                          <a:cs typeface="Calibri" pitchFamily="34" charset="-120"/>
+                        </a:rPr>
+                        <a:t>Create the Book table</a:t>
+                      </a:r>
+                      <a:endParaRPr lang="en-US" sz="1400" dirty="0">
+                        <a:latin typeface="Calibri" charset="0"/>
+                        <a:ea typeface="Calibri" charset="0"/>
+                        <a:cs typeface="Calibri" charset="0"/>
+                      </a:endParaRPr>
+                    </a:p>
+                  </a:txBody>
+                  <a:tcPr marL="91440" marR="91440" marT="45720" marB="45720" anchor="ctr">
+                    <a:lnL w="9525" cap="flat" cmpd="sng" algn="ctr">
+                      <a:solidFill>
+                        <a:srgbClr val="E1E4E8"/>
+                      </a:solidFill>
+                      <a:prstDash val="solid"/>
+                      <a:round/>
+                      <a:headEnd type="none" w="med" len="med"/>
+                      <a:tailEnd type="none" w="med" len="med"/>
+                    </a:lnL>
+                    <a:lnR w="9525" cap="flat" cmpd="sng" algn="ctr">
+                      <a:solidFill>
+                        <a:srgbClr val="E1E4E8"/>
+                      </a:solidFill>
+                      <a:prstDash val="solid"/>
+                      <a:round/>
+                      <a:headEnd type="none" w="med" len="med"/>
+                      <a:tailEnd type="none" w="med" len="med"/>
+                    </a:lnR>
+                    <a:lnT w="9525" cap="flat" cmpd="sng" algn="ctr">
+                      <a:solidFill>
+                        <a:srgbClr val="E1E4E8"/>
+                      </a:solidFill>
+                      <a:prstDash val="solid"/>
+                      <a:round/>
+                      <a:headEnd type="none" w="med" len="med"/>
+                      <a:tailEnd type="none" w="med" len="med"/>
+                    </a:lnT>
+                    <a:lnB w="9525" cap="flat" cmpd="sng" algn="ctr">
+                      <a:solidFill>
+                        <a:srgbClr val="E1E4E8"/>
+                      </a:solidFill>
+                      <a:prstDash val="solid"/>
+                      <a:round/>
+                      <a:headEnd type="none" w="med" len="med"/>
+                      <a:tailEnd type="none" w="med" len="med"/>
+                    </a:lnB>
+                  </a:tcPr>
+                </a:tc>
+                <a:tc>
+                  <a:txBody>
+                    <a:bodyPr/>
+                    <a:lstStyle/>
+                    <a:p>
+                      <a:pPr indent="0" marL="0">
+                        <a:buNone/>
+                      </a:pPr>
+                      <a:r>
+                        <a:rPr lang="en-US" sz="1400" dirty="0">
+                          <a:solidFill>
+                            <a:srgbClr val="1F2429"/>
+                          </a:solidFill>
+                          <a:latin typeface="Calibri" pitchFamily="34" charset="0"/>
+                          <a:ea typeface="Calibri" pitchFamily="34" charset="-122"/>
+                          <a:cs typeface="Calibri" pitchFamily="34" charset="-120"/>
+                        </a:rPr>
+                        <a:t>DDL</a:t>
+                      </a:r>
+                      <a:endParaRPr lang="en-US" sz="1400" dirty="0">
+                        <a:latin typeface="Calibri" charset="0"/>
+                        <a:ea typeface="Calibri" charset="0"/>
+                        <a:cs typeface="Calibri" charset="0"/>
+                      </a:endParaRPr>
+                    </a:p>
+                  </a:txBody>
+                  <a:tcPr marL="91440" marR="91440" marT="45720" marB="45720" anchor="ctr">
+                    <a:lnL w="9525" cap="flat" cmpd="sng" algn="ctr">
+                      <a:solidFill>
+                        <a:srgbClr val="E1E4E8"/>
+                      </a:solidFill>
+                      <a:prstDash val="solid"/>
+                      <a:round/>
+                      <a:headEnd type="none" w="med" len="med"/>
+                      <a:tailEnd type="none" w="med" len="med"/>
+                    </a:lnL>
+                    <a:lnR w="9525" cap="flat" cmpd="sng" algn="ctr">
+                      <a:solidFill>
+                        <a:srgbClr val="E1E4E8"/>
+                      </a:solidFill>
+                      <a:prstDash val="solid"/>
+                      <a:round/>
+                      <a:headEnd type="none" w="med" len="med"/>
+                      <a:tailEnd type="none" w="med" len="med"/>
+                    </a:lnR>
+                    <a:lnT w="9525" cap="flat" cmpd="sng" algn="ctr">
+                      <a:solidFill>
+                        <a:srgbClr val="E1E4E8"/>
+                      </a:solidFill>
+                      <a:prstDash val="solid"/>
+                      <a:round/>
+                      <a:headEnd type="none" w="med" len="med"/>
+                      <a:tailEnd type="none" w="med" len="med"/>
+                    </a:lnT>
+                    <a:lnB w="9525" cap="flat" cmpd="sng" algn="ctr">
+                      <a:solidFill>
+                        <a:srgbClr val="E1E4E8"/>
+                      </a:solidFill>
+                      <a:prstDash val="solid"/>
+                      <a:round/>
+                      <a:headEnd type="none" w="med" len="med"/>
+                      <a:tailEnd type="none" w="med" len="med"/>
+                    </a:lnB>
+                  </a:tcPr>
+                </a:tc>
+                <a:tc>
+                  <a:txBody>
+                    <a:bodyPr/>
+                    <a:lstStyle/>
+                    <a:p>
+                      <a:pPr indent="0" marL="0">
+                        <a:buNone/>
+                      </a:pPr>
+                      <a:r>
+                        <a:rPr lang="en-US" sz="1400" dirty="0">
+                          <a:solidFill>
+                            <a:srgbClr val="1F2429"/>
+                          </a:solidFill>
+                          <a:latin typeface="Calibri" pitchFamily="34" charset="0"/>
+                          <a:ea typeface="Calibri" pitchFamily="34" charset="-122"/>
+                          <a:cs typeface="Calibri" pitchFamily="34" charset="-120"/>
+                        </a:rPr>
+                        <a:t>CREATE TABLE Book (...)</a:t>
+                      </a:r>
+                      <a:endParaRPr lang="en-US" sz="1400" dirty="0">
+                        <a:latin typeface="Calibri" charset="0"/>
+                        <a:ea typeface="Calibri" charset="0"/>
+                        <a:cs typeface="Calibri" charset="0"/>
+                      </a:endParaRPr>
+                    </a:p>
+                  </a:txBody>
+                  <a:tcPr marL="91440" marR="91440" marT="45720" marB="45720" anchor="ctr">
+                    <a:lnL w="9525" cap="flat" cmpd="sng" algn="ctr">
+                      <a:solidFill>
+                        <a:srgbClr val="E1E4E8"/>
+                      </a:solidFill>
+                      <a:prstDash val="solid"/>
+                      <a:round/>
+                      <a:headEnd type="none" w="med" len="med"/>
+                      <a:tailEnd type="none" w="med" len="med"/>
+                    </a:lnL>
+                    <a:lnR w="9525" cap="flat" cmpd="sng" algn="ctr">
+                      <a:solidFill>
+                        <a:srgbClr val="E1E4E8"/>
+                      </a:solidFill>
+                      <a:prstDash val="solid"/>
+                      <a:round/>
+                      <a:headEnd type="none" w="med" len="med"/>
+                      <a:tailEnd type="none" w="med" len="med"/>
+                    </a:lnR>
+                    <a:lnT w="9525" cap="flat" cmpd="sng" algn="ctr">
+                      <a:solidFill>
+                        <a:srgbClr val="E1E4E8"/>
+                      </a:solidFill>
+                      <a:prstDash val="solid"/>
+                      <a:round/>
+                      <a:headEnd type="none" w="med" len="med"/>
+                      <a:tailEnd type="none" w="med" len="med"/>
+                    </a:lnT>
+                    <a:lnB w="9525" cap="flat" cmpd="sng" algn="ctr">
+                      <a:solidFill>
+                        <a:srgbClr val="E1E4E8"/>
+                      </a:solidFill>
+                      <a:prstDash val="solid"/>
+                      <a:round/>
+                      <a:headEnd type="none" w="med" len="med"/>
+                      <a:tailEnd type="none" w="med" len="med"/>
+                    </a:lnB>
+                  </a:tcPr>
+                </a:tc>
+              </a:tr>
+              <a:tr h="574766">
+                <a:tc>
+                  <a:txBody>
+                    <a:bodyPr/>
+                    <a:lstStyle/>
+                    <a:p>
+                      <a:pPr indent="0" marL="0">
+                        <a:buNone/>
+                      </a:pPr>
+                      <a:r>
+                        <a:rPr lang="en-US" sz="1400" dirty="0">
+                          <a:solidFill>
+                            <a:srgbClr val="1F2429"/>
+                          </a:solidFill>
+                          <a:latin typeface="Calibri" pitchFamily="34" charset="0"/>
+                          <a:ea typeface="Calibri" pitchFamily="34" charset="-122"/>
+                          <a:cs typeface="Calibri" pitchFamily="34" charset="-120"/>
+                        </a:rPr>
+                        <a:t>Add a publication year</a:t>
+                      </a:r>
+                      <a:endParaRPr lang="en-US" sz="1400" dirty="0">
+                        <a:latin typeface="Calibri" charset="0"/>
+                        <a:ea typeface="Calibri" charset="0"/>
+                        <a:cs typeface="Calibri" charset="0"/>
+                      </a:endParaRPr>
+                    </a:p>
+                  </a:txBody>
+                  <a:tcPr marL="91440" marR="91440" marT="45720" marB="45720" anchor="ctr">
+                    <a:lnL w="9525" cap="flat" cmpd="sng" algn="ctr">
+                      <a:solidFill>
+                        <a:srgbClr val="E1E4E8"/>
+                      </a:solidFill>
+                      <a:prstDash val="solid"/>
+                      <a:round/>
+                      <a:headEnd type="none" w="med" len="med"/>
+                      <a:tailEnd type="none" w="med" len="med"/>
+                    </a:lnL>
+                    <a:lnR w="9525" cap="flat" cmpd="sng" algn="ctr">
+                      <a:solidFill>
+                        <a:srgbClr val="E1E4E8"/>
+                      </a:solidFill>
+                      <a:prstDash val="solid"/>
+                      <a:round/>
+                      <a:headEnd type="none" w="med" len="med"/>
+                      <a:tailEnd type="none" w="med" len="med"/>
+                    </a:lnR>
+                    <a:lnT w="9525" cap="flat" cmpd="sng" algn="ctr">
+                      <a:solidFill>
+                        <a:srgbClr val="E1E4E8"/>
+                      </a:solidFill>
+                      <a:prstDash val="solid"/>
+                      <a:round/>
+                      <a:headEnd type="none" w="med" len="med"/>
+                      <a:tailEnd type="none" w="med" len="med"/>
+                    </a:lnT>
+                    <a:lnB w="9525" cap="flat" cmpd="sng" algn="ctr">
+                      <a:solidFill>
+                        <a:srgbClr val="E1E4E8"/>
+                      </a:solidFill>
+                      <a:prstDash val="solid"/>
+                      <a:round/>
+                      <a:headEnd type="none" w="med" len="med"/>
+                      <a:tailEnd type="none" w="med" len="med"/>
+                    </a:lnB>
+                  </a:tcPr>
+                </a:tc>
+                <a:tc>
+                  <a:txBody>
+                    <a:bodyPr/>
+                    <a:lstStyle/>
+                    <a:p>
+                      <a:pPr indent="0" marL="0">
+                        <a:buNone/>
+                      </a:pPr>
+                      <a:r>
+                        <a:rPr lang="en-US" sz="1400" dirty="0">
+                          <a:solidFill>
+                            <a:srgbClr val="1F2429"/>
+                          </a:solidFill>
+                          <a:latin typeface="Calibri" pitchFamily="34" charset="0"/>
+                          <a:ea typeface="Calibri" pitchFamily="34" charset="-122"/>
+                          <a:cs typeface="Calibri" pitchFamily="34" charset="-120"/>
+                        </a:rPr>
+                        <a:t>DDL</a:t>
+                      </a:r>
+                      <a:endParaRPr lang="en-US" sz="1400" dirty="0">
+                        <a:latin typeface="Calibri" charset="0"/>
+                        <a:ea typeface="Calibri" charset="0"/>
+                        <a:cs typeface="Calibri" charset="0"/>
+                      </a:endParaRPr>
+                    </a:p>
+                  </a:txBody>
+                  <a:tcPr marL="91440" marR="91440" marT="45720" marB="45720" anchor="ctr">
+                    <a:lnL w="9525" cap="flat" cmpd="sng" algn="ctr">
+                      <a:solidFill>
+                        <a:srgbClr val="E1E4E8"/>
+                      </a:solidFill>
+                      <a:prstDash val="solid"/>
+                      <a:round/>
+                      <a:headEnd type="none" w="med" len="med"/>
+                      <a:tailEnd type="none" w="med" len="med"/>
+                    </a:lnL>
+                    <a:lnR w="9525" cap="flat" cmpd="sng" algn="ctr">
+                      <a:solidFill>
+                        <a:srgbClr val="E1E4E8"/>
+                      </a:solidFill>
+                      <a:prstDash val="solid"/>
+                      <a:round/>
+                      <a:headEnd type="none" w="med" len="med"/>
+                      <a:tailEnd type="none" w="med" len="med"/>
+                    </a:lnR>
+                    <a:lnT w="9525" cap="flat" cmpd="sng" algn="ctr">
+                      <a:solidFill>
+                        <a:srgbClr val="E1E4E8"/>
+                      </a:solidFill>
+                      <a:prstDash val="solid"/>
+                      <a:round/>
+                      <a:headEnd type="none" w="med" len="med"/>
+                      <a:tailEnd type="none" w="med" len="med"/>
+                    </a:lnT>
+                    <a:lnB w="9525" cap="flat" cmpd="sng" algn="ctr">
+                      <a:solidFill>
+                        <a:srgbClr val="E1E4E8"/>
+                      </a:solidFill>
+                      <a:prstDash val="solid"/>
+                      <a:round/>
+                      <a:headEnd type="none" w="med" len="med"/>
+                      <a:tailEnd type="none" w="med" len="med"/>
+                    </a:lnB>
+                  </a:tcPr>
+                </a:tc>
+                <a:tc>
+                  <a:txBody>
+                    <a:bodyPr/>
+                    <a:lstStyle/>
+                    <a:p>
+                      <a:pPr indent="0" marL="0">
+                        <a:buNone/>
+                      </a:pPr>
+                      <a:r>
+                        <a:rPr lang="en-US" sz="1400" dirty="0">
+                          <a:solidFill>
+                            <a:srgbClr val="1F2429"/>
+                          </a:solidFill>
+                          <a:latin typeface="Calibri" pitchFamily="34" charset="0"/>
+                          <a:ea typeface="Calibri" pitchFamily="34" charset="-122"/>
+                          <a:cs typeface="Calibri" pitchFamily="34" charset="-120"/>
+                        </a:rPr>
+                        <a:t>ALTER TABLE Book ADD publicationYear</a:t>
+                      </a:r>
+                      <a:endParaRPr lang="en-US" sz="1400" dirty="0">
+                        <a:latin typeface="Calibri" charset="0"/>
+                        <a:ea typeface="Calibri" charset="0"/>
+                        <a:cs typeface="Calibri" charset="0"/>
+                      </a:endParaRPr>
+                    </a:p>
+                  </a:txBody>
+                  <a:tcPr marL="91440" marR="91440" marT="45720" marB="45720" anchor="ctr">
+                    <a:lnL w="9525" cap="flat" cmpd="sng" algn="ctr">
+                      <a:solidFill>
+                        <a:srgbClr val="E1E4E8"/>
+                      </a:solidFill>
+                      <a:prstDash val="solid"/>
+                      <a:round/>
+                      <a:headEnd type="none" w="med" len="med"/>
+                      <a:tailEnd type="none" w="med" len="med"/>
+                    </a:lnL>
+                    <a:lnR w="9525" cap="flat" cmpd="sng" algn="ctr">
+                      <a:solidFill>
+                        <a:srgbClr val="E1E4E8"/>
+                      </a:solidFill>
+                      <a:prstDash val="solid"/>
+                      <a:round/>
+                      <a:headEnd type="none" w="med" len="med"/>
+                      <a:tailEnd type="none" w="med" len="med"/>
+                    </a:lnR>
+                    <a:lnT w="9525" cap="flat" cmpd="sng" algn="ctr">
+                      <a:solidFill>
+                        <a:srgbClr val="E1E4E8"/>
+                      </a:solidFill>
+                      <a:prstDash val="solid"/>
+                      <a:round/>
+                      <a:headEnd type="none" w="med" len="med"/>
+                      <a:tailEnd type="none" w="med" len="med"/>
+                    </a:lnT>
+                    <a:lnB w="9525" cap="flat" cmpd="sng" algn="ctr">
+                      <a:solidFill>
+                        <a:srgbClr val="E1E4E8"/>
+                      </a:solidFill>
+                      <a:prstDash val="solid"/>
+                      <a:round/>
+                      <a:headEnd type="none" w="med" len="med"/>
+                      <a:tailEnd type="none" w="med" len="med"/>
+                    </a:lnB>
+                  </a:tcPr>
+                </a:tc>
+              </a:tr>
+              <a:tr h="574766">
+                <a:tc>
+                  <a:txBody>
+                    <a:bodyPr/>
+                    <a:lstStyle/>
+                    <a:p>
+                      <a:pPr indent="0" marL="0">
+                        <a:buNone/>
+                      </a:pPr>
+                      <a:r>
+                        <a:rPr lang="en-US" sz="1400" dirty="0">
+                          <a:solidFill>
+                            <a:srgbClr val="1F2429"/>
+                          </a:solidFill>
+                          <a:latin typeface="Calibri" pitchFamily="34" charset="0"/>
+                          <a:ea typeface="Calibri" pitchFamily="34" charset="-122"/>
+                          <a:cs typeface="Calibri" pitchFamily="34" charset="-120"/>
+                        </a:rPr>
+                        <a:t>Find available Martin books</a:t>
+                      </a:r>
+                      <a:endParaRPr lang="en-US" sz="1400" dirty="0">
+                        <a:latin typeface="Calibri" charset="0"/>
+                        <a:ea typeface="Calibri" charset="0"/>
+                        <a:cs typeface="Calibri" charset="0"/>
+                      </a:endParaRPr>
+                    </a:p>
+                  </a:txBody>
+                  <a:tcPr marL="91440" marR="91440" marT="45720" marB="45720" anchor="ctr">
+                    <a:lnL w="9525" cap="flat" cmpd="sng" algn="ctr">
+                      <a:solidFill>
+                        <a:srgbClr val="E1E4E8"/>
+                      </a:solidFill>
+                      <a:prstDash val="solid"/>
+                      <a:round/>
+                      <a:headEnd type="none" w="med" len="med"/>
+                      <a:tailEnd type="none" w="med" len="med"/>
+                    </a:lnL>
+                    <a:lnR w="9525" cap="flat" cmpd="sng" algn="ctr">
+                      <a:solidFill>
+                        <a:srgbClr val="E1E4E8"/>
+                      </a:solidFill>
+                      <a:prstDash val="solid"/>
+                      <a:round/>
+                      <a:headEnd type="none" w="med" len="med"/>
+                      <a:tailEnd type="none" w="med" len="med"/>
+                    </a:lnR>
+                    <a:lnT w="9525" cap="flat" cmpd="sng" algn="ctr">
+                      <a:solidFill>
+                        <a:srgbClr val="E1E4E8"/>
+                      </a:solidFill>
+                      <a:prstDash val="solid"/>
+                      <a:round/>
+                      <a:headEnd type="none" w="med" len="med"/>
+                      <a:tailEnd type="none" w="med" len="med"/>
+                    </a:lnT>
+                    <a:lnB w="9525" cap="flat" cmpd="sng" algn="ctr">
+                      <a:solidFill>
+                        <a:srgbClr val="E1E4E8"/>
+                      </a:solidFill>
+                      <a:prstDash val="solid"/>
+                      <a:round/>
+                      <a:headEnd type="none" w="med" len="med"/>
+                      <a:tailEnd type="none" w="med" len="med"/>
+                    </a:lnB>
+                  </a:tcPr>
+                </a:tc>
+                <a:tc>
+                  <a:txBody>
+                    <a:bodyPr/>
+                    <a:lstStyle/>
+                    <a:p>
+                      <a:pPr indent="0" marL="0">
+                        <a:buNone/>
+                      </a:pPr>
+                      <a:r>
+                        <a:rPr lang="en-US" sz="1400" dirty="0">
+                          <a:solidFill>
+                            <a:srgbClr val="1F2429"/>
+                          </a:solidFill>
+                          <a:latin typeface="Calibri" pitchFamily="34" charset="0"/>
+                          <a:ea typeface="Calibri" pitchFamily="34" charset="-122"/>
+                          <a:cs typeface="Calibri" pitchFamily="34" charset="-120"/>
+                        </a:rPr>
+                        <a:t>DML (retrieval)</a:t>
+                      </a:r>
+                      <a:endParaRPr lang="en-US" sz="1400" dirty="0">
+                        <a:latin typeface="Calibri" charset="0"/>
+                        <a:ea typeface="Calibri" charset="0"/>
+                        <a:cs typeface="Calibri" charset="0"/>
+                      </a:endParaRPr>
+                    </a:p>
+                  </a:txBody>
+                  <a:tcPr marL="91440" marR="91440" marT="45720" marB="45720" anchor="ctr">
+                    <a:lnL w="9525" cap="flat" cmpd="sng" algn="ctr">
+                      <a:solidFill>
+                        <a:srgbClr val="E1E4E8"/>
+                      </a:solidFill>
+                      <a:prstDash val="solid"/>
+                      <a:round/>
+                      <a:headEnd type="none" w="med" len="med"/>
+                      <a:tailEnd type="none" w="med" len="med"/>
+                    </a:lnL>
+                    <a:lnR w="9525" cap="flat" cmpd="sng" algn="ctr">
+                      <a:solidFill>
+                        <a:srgbClr val="E1E4E8"/>
+                      </a:solidFill>
+                      <a:prstDash val="solid"/>
+                      <a:round/>
+                      <a:headEnd type="none" w="med" len="med"/>
+                      <a:tailEnd type="none" w="med" len="med"/>
+                    </a:lnR>
+                    <a:lnT w="9525" cap="flat" cmpd="sng" algn="ctr">
+                      <a:solidFill>
+                        <a:srgbClr val="E1E4E8"/>
+                      </a:solidFill>
+                      <a:prstDash val="solid"/>
+                      <a:round/>
+                      <a:headEnd type="none" w="med" len="med"/>
+                      <a:tailEnd type="none" w="med" len="med"/>
+                    </a:lnT>
+                    <a:lnB w="9525" cap="flat" cmpd="sng" algn="ctr">
+                      <a:solidFill>
+                        <a:srgbClr val="E1E4E8"/>
+                      </a:solidFill>
+                      <a:prstDash val="solid"/>
+                      <a:round/>
+                      <a:headEnd type="none" w="med" len="med"/>
+                      <a:tailEnd type="none" w="med" len="med"/>
+                    </a:lnB>
+                  </a:tcPr>
+                </a:tc>
+                <a:tc>
+                  <a:txBody>
+                    <a:bodyPr/>
+                    <a:lstStyle/>
+                    <a:p>
+                      <a:pPr indent="0" marL="0">
+                        <a:buNone/>
+                      </a:pPr>
+                      <a:r>
+                        <a:rPr lang="en-US" sz="1400" dirty="0">
+                          <a:solidFill>
+                            <a:srgbClr val="1F2429"/>
+                          </a:solidFill>
+                          <a:latin typeface="Calibri" pitchFamily="34" charset="0"/>
+                          <a:ea typeface="Calibri" pitchFamily="34" charset="-122"/>
+                          <a:cs typeface="Calibri" pitchFamily="34" charset="-120"/>
+                        </a:rPr>
+                        <a:t>SELECT title FROM Book WHERE ...</a:t>
+                      </a:r>
+                      <a:endParaRPr lang="en-US" sz="1400" dirty="0">
+                        <a:latin typeface="Calibri" charset="0"/>
+                        <a:ea typeface="Calibri" charset="0"/>
+                        <a:cs typeface="Calibri" charset="0"/>
+                      </a:endParaRPr>
+                    </a:p>
+                  </a:txBody>
+                  <a:tcPr marL="91440" marR="91440" marT="45720" marB="45720" anchor="ctr">
+                    <a:lnL w="9525" cap="flat" cmpd="sng" algn="ctr">
+                      <a:solidFill>
+                        <a:srgbClr val="E1E4E8"/>
+                      </a:solidFill>
+                      <a:prstDash val="solid"/>
+                      <a:round/>
+                      <a:headEnd type="none" w="med" len="med"/>
+                      <a:tailEnd type="none" w="med" len="med"/>
+                    </a:lnL>
+                    <a:lnR w="9525" cap="flat" cmpd="sng" algn="ctr">
+                      <a:solidFill>
+                        <a:srgbClr val="E1E4E8"/>
+                      </a:solidFill>
+                      <a:prstDash val="solid"/>
+                      <a:round/>
+                      <a:headEnd type="none" w="med" len="med"/>
+                      <a:tailEnd type="none" w="med" len="med"/>
+                    </a:lnR>
+                    <a:lnT w="9525" cap="flat" cmpd="sng" algn="ctr">
+                      <a:solidFill>
+                        <a:srgbClr val="E1E4E8"/>
+                      </a:solidFill>
+                      <a:prstDash val="solid"/>
+                      <a:round/>
+                      <a:headEnd type="none" w="med" len="med"/>
+                      <a:tailEnd type="none" w="med" len="med"/>
+                    </a:lnT>
+                    <a:lnB w="9525" cap="flat" cmpd="sng" algn="ctr">
+                      <a:solidFill>
+                        <a:srgbClr val="E1E4E8"/>
+                      </a:solidFill>
+                      <a:prstDash val="solid"/>
+                      <a:round/>
+                      <a:headEnd type="none" w="med" len="med"/>
+                      <a:tailEnd type="none" w="med" len="med"/>
+                    </a:lnB>
+                  </a:tcPr>
+                </a:tc>
+              </a:tr>
+              <a:tr h="574766">
+                <a:tc>
+                  <a:txBody>
+                    <a:bodyPr/>
+                    <a:lstStyle/>
+                    <a:p>
+                      <a:pPr indent="0" marL="0">
+                        <a:buNone/>
+                      </a:pPr>
+                      <a:r>
+                        <a:rPr lang="en-US" sz="1400" dirty="0">
+                          <a:solidFill>
+                            <a:srgbClr val="1F2429"/>
+                          </a:solidFill>
+                          <a:latin typeface="Calibri" pitchFamily="34" charset="0"/>
+                          <a:ea typeface="Calibri" pitchFamily="34" charset="-122"/>
+                          <a:cs typeface="Calibri" pitchFamily="34" charset="-120"/>
+                        </a:rPr>
+                        <a:t>Record a returned book</a:t>
+                      </a:r>
+                      <a:endParaRPr lang="en-US" sz="1400" dirty="0">
+                        <a:latin typeface="Calibri" charset="0"/>
+                        <a:ea typeface="Calibri" charset="0"/>
+                        <a:cs typeface="Calibri" charset="0"/>
+                      </a:endParaRPr>
+                    </a:p>
+                  </a:txBody>
+                  <a:tcPr marL="91440" marR="91440" marT="45720" marB="45720" anchor="ctr">
+                    <a:lnL w="9525" cap="flat" cmpd="sng" algn="ctr">
+                      <a:solidFill>
+                        <a:srgbClr val="E1E4E8"/>
+                      </a:solidFill>
+                      <a:prstDash val="solid"/>
+                      <a:round/>
+                      <a:headEnd type="none" w="med" len="med"/>
+                      <a:tailEnd type="none" w="med" len="med"/>
+                    </a:lnL>
+                    <a:lnR w="9525" cap="flat" cmpd="sng" algn="ctr">
+                      <a:solidFill>
+                        <a:srgbClr val="E1E4E8"/>
+                      </a:solidFill>
+                      <a:prstDash val="solid"/>
+                      <a:round/>
+                      <a:headEnd type="none" w="med" len="med"/>
+                      <a:tailEnd type="none" w="med" len="med"/>
+                    </a:lnR>
+                    <a:lnT w="9525" cap="flat" cmpd="sng" algn="ctr">
+                      <a:solidFill>
+                        <a:srgbClr val="E1E4E8"/>
+                      </a:solidFill>
+                      <a:prstDash val="solid"/>
+                      <a:round/>
+                      <a:headEnd type="none" w="med" len="med"/>
+                      <a:tailEnd type="none" w="med" len="med"/>
+                    </a:lnT>
+                    <a:lnB w="9525" cap="flat" cmpd="sng" algn="ctr">
+                      <a:solidFill>
+                        <a:srgbClr val="E1E4E8"/>
+                      </a:solidFill>
+                      <a:prstDash val="solid"/>
+                      <a:round/>
+                      <a:headEnd type="none" w="med" len="med"/>
+                      <a:tailEnd type="none" w="med" len="med"/>
+                    </a:lnB>
+                  </a:tcPr>
+                </a:tc>
+                <a:tc>
+                  <a:txBody>
+                    <a:bodyPr/>
+                    <a:lstStyle/>
+                    <a:p>
+                      <a:pPr indent="0" marL="0">
+                        <a:buNone/>
+                      </a:pPr>
+                      <a:r>
+                        <a:rPr lang="en-US" sz="1400" dirty="0">
+                          <a:solidFill>
+                            <a:srgbClr val="1F2429"/>
+                          </a:solidFill>
+                          <a:latin typeface="Calibri" pitchFamily="34" charset="0"/>
+                          <a:ea typeface="Calibri" pitchFamily="34" charset="-122"/>
+                          <a:cs typeface="Calibri" pitchFamily="34" charset="-120"/>
+                        </a:rPr>
+                        <a:t>DML (update)</a:t>
+                      </a:r>
+                      <a:endParaRPr lang="en-US" sz="1400" dirty="0">
+                        <a:latin typeface="Calibri" charset="0"/>
+                        <a:ea typeface="Calibri" charset="0"/>
+                        <a:cs typeface="Calibri" charset="0"/>
+                      </a:endParaRPr>
+                    </a:p>
+                  </a:txBody>
+                  <a:tcPr marL="91440" marR="91440" marT="45720" marB="45720" anchor="ctr">
+                    <a:lnL w="9525" cap="flat" cmpd="sng" algn="ctr">
+                      <a:solidFill>
+                        <a:srgbClr val="E1E4E8"/>
+                      </a:solidFill>
+                      <a:prstDash val="solid"/>
+                      <a:round/>
+                      <a:headEnd type="none" w="med" len="med"/>
+                      <a:tailEnd type="none" w="med" len="med"/>
+                    </a:lnL>
+                    <a:lnR w="9525" cap="flat" cmpd="sng" algn="ctr">
+                      <a:solidFill>
+                        <a:srgbClr val="E1E4E8"/>
+                      </a:solidFill>
+                      <a:prstDash val="solid"/>
+                      <a:round/>
+                      <a:headEnd type="none" w="med" len="med"/>
+                      <a:tailEnd type="none" w="med" len="med"/>
+                    </a:lnR>
+                    <a:lnT w="9525" cap="flat" cmpd="sng" algn="ctr">
+                      <a:solidFill>
+                        <a:srgbClr val="E1E4E8"/>
+                      </a:solidFill>
+                      <a:prstDash val="solid"/>
+                      <a:round/>
+                      <a:headEnd type="none" w="med" len="med"/>
+                      <a:tailEnd type="none" w="med" len="med"/>
+                    </a:lnT>
+                    <a:lnB w="9525" cap="flat" cmpd="sng" algn="ctr">
+                      <a:solidFill>
+                        <a:srgbClr val="E1E4E8"/>
+                      </a:solidFill>
+                      <a:prstDash val="solid"/>
+                      <a:round/>
+                      <a:headEnd type="none" w="med" len="med"/>
+                      <a:tailEnd type="none" w="med" len="med"/>
+                    </a:lnB>
+                  </a:tcPr>
+                </a:tc>
+                <a:tc>
+                  <a:txBody>
+                    <a:bodyPr/>
+                    <a:lstStyle/>
+                    <a:p>
+                      <a:pPr indent="0" marL="0">
+                        <a:buNone/>
+                      </a:pPr>
+                      <a:r>
+                        <a:rPr lang="en-US" sz="1400" dirty="0">
+                          <a:solidFill>
+                            <a:srgbClr val="1F2429"/>
+                          </a:solidFill>
+                          <a:latin typeface="Calibri" pitchFamily="34" charset="0"/>
+                          <a:ea typeface="Calibri" pitchFamily="34" charset="-122"/>
+                          <a:cs typeface="Calibri" pitchFamily="34" charset="-120"/>
+                        </a:rPr>
+                        <a:t>UPDATE Book SET available = true ...</a:t>
+                      </a:r>
+                      <a:endParaRPr lang="en-US" sz="1400" dirty="0">
+                        <a:latin typeface="Calibri" charset="0"/>
+                        <a:ea typeface="Calibri" charset="0"/>
+                        <a:cs typeface="Calibri" charset="0"/>
+                      </a:endParaRPr>
+                    </a:p>
+                  </a:txBody>
+                  <a:tcPr marL="91440" marR="91440" marT="45720" marB="45720" anchor="ctr">
+                    <a:lnL w="9525" cap="flat" cmpd="sng" algn="ctr">
+                      <a:solidFill>
+                        <a:srgbClr val="E1E4E8"/>
+                      </a:solidFill>
+                      <a:prstDash val="solid"/>
+                      <a:round/>
+                      <a:headEnd type="none" w="med" len="med"/>
+                      <a:tailEnd type="none" w="med" len="med"/>
+                    </a:lnL>
+                    <a:lnR w="9525" cap="flat" cmpd="sng" algn="ctr">
+                      <a:solidFill>
+                        <a:srgbClr val="E1E4E8"/>
+                      </a:solidFill>
+                      <a:prstDash val="solid"/>
+                      <a:round/>
+                      <a:headEnd type="none" w="med" len="med"/>
+                      <a:tailEnd type="none" w="med" len="med"/>
+                    </a:lnR>
+                    <a:lnT w="9525" cap="flat" cmpd="sng" algn="ctr">
+                      <a:solidFill>
+                        <a:srgbClr val="E1E4E8"/>
+                      </a:solidFill>
+                      <a:prstDash val="solid"/>
+                      <a:round/>
+                      <a:headEnd type="none" w="med" len="med"/>
+                      <a:tailEnd type="none" w="med" len="med"/>
+                    </a:lnT>
+                    <a:lnB w="9525" cap="flat" cmpd="sng" algn="ctr">
+                      <a:solidFill>
+                        <a:srgbClr val="E1E4E8"/>
+                      </a:solidFill>
+                      <a:prstDash val="solid"/>
+                      <a:round/>
+                      <a:headEnd type="none" w="med" len="med"/>
+                      <a:tailEnd type="none" w="med" len="med"/>
+                    </a:lnB>
+                  </a:tcPr>
+                </a:tc>
+              </a:tr>
+              <a:tr h="574766">
+                <a:tc>
+                  <a:txBody>
+                    <a:bodyPr/>
+                    <a:lstStyle/>
+                    <a:p>
+                      <a:pPr indent="0" marL="0">
+                        <a:buNone/>
+                      </a:pPr>
+                      <a:r>
+                        <a:rPr lang="en-US" sz="1400" dirty="0">
+                          <a:solidFill>
+                            <a:srgbClr val="1F2429"/>
+                          </a:solidFill>
+                          <a:latin typeface="Calibri" pitchFamily="34" charset="0"/>
+                          <a:ea typeface="Calibri" pitchFamily="34" charset="-122"/>
+                          <a:cs typeface="Calibri" pitchFamily="34" charset="-120"/>
+                        </a:rPr>
+                        <a:t>Let a clerk update availability</a:t>
+                      </a:r>
+                      <a:endParaRPr lang="en-US" sz="1400" dirty="0">
+                        <a:latin typeface="Calibri" charset="0"/>
+                        <a:ea typeface="Calibri" charset="0"/>
+                        <a:cs typeface="Calibri" charset="0"/>
+                      </a:endParaRPr>
+                    </a:p>
+                  </a:txBody>
+                  <a:tcPr marL="91440" marR="91440" marT="45720" marB="45720" anchor="ctr">
+                    <a:lnL w="9525" cap="flat" cmpd="sng" algn="ctr">
+                      <a:solidFill>
+                        <a:srgbClr val="E1E4E8"/>
+                      </a:solidFill>
+                      <a:prstDash val="solid"/>
+                      <a:round/>
+                      <a:headEnd type="none" w="med" len="med"/>
+                      <a:tailEnd type="none" w="med" len="med"/>
+                    </a:lnL>
+                    <a:lnR w="9525" cap="flat" cmpd="sng" algn="ctr">
+                      <a:solidFill>
+                        <a:srgbClr val="E1E4E8"/>
+                      </a:solidFill>
+                      <a:prstDash val="solid"/>
+                      <a:round/>
+                      <a:headEnd type="none" w="med" len="med"/>
+                      <a:tailEnd type="none" w="med" len="med"/>
+                    </a:lnR>
+                    <a:lnT w="9525" cap="flat" cmpd="sng" algn="ctr">
+                      <a:solidFill>
+                        <a:srgbClr val="E1E4E8"/>
+                      </a:solidFill>
+                      <a:prstDash val="solid"/>
+                      <a:round/>
+                      <a:headEnd type="none" w="med" len="med"/>
+                      <a:tailEnd type="none" w="med" len="med"/>
+                    </a:lnT>
+                    <a:lnB w="9525" cap="flat" cmpd="sng" algn="ctr">
+                      <a:solidFill>
+                        <a:srgbClr val="E1E4E8"/>
+                      </a:solidFill>
+                      <a:prstDash val="solid"/>
+                      <a:round/>
+                      <a:headEnd type="none" w="med" len="med"/>
+                      <a:tailEnd type="none" w="med" len="med"/>
+                    </a:lnB>
+                  </a:tcPr>
+                </a:tc>
+                <a:tc>
+                  <a:txBody>
+                    <a:bodyPr/>
+                    <a:lstStyle/>
+                    <a:p>
+                      <a:pPr indent="0" marL="0">
+                        <a:buNone/>
+                      </a:pPr>
+                      <a:r>
+                        <a:rPr lang="en-US" sz="1400" dirty="0">
+                          <a:solidFill>
+                            <a:srgbClr val="1F2429"/>
+                          </a:solidFill>
+                          <a:latin typeface="Calibri" pitchFamily="34" charset="0"/>
+                          <a:ea typeface="Calibri" pitchFamily="34" charset="-122"/>
+                          <a:cs typeface="Calibri" pitchFamily="34" charset="-120"/>
+                        </a:rPr>
+                        <a:t>DCL</a:t>
+                      </a:r>
+                      <a:endParaRPr lang="en-US" sz="1400" dirty="0">
+                        <a:latin typeface="Calibri" charset="0"/>
+                        <a:ea typeface="Calibri" charset="0"/>
+                        <a:cs typeface="Calibri" charset="0"/>
+                      </a:endParaRPr>
+                    </a:p>
+                  </a:txBody>
+                  <a:tcPr marL="91440" marR="91440" marT="45720" marB="45720" anchor="ctr">
+                    <a:lnL w="9525" cap="flat" cmpd="sng" algn="ctr">
+                      <a:solidFill>
+                        <a:srgbClr val="E1E4E8"/>
+                      </a:solidFill>
+                      <a:prstDash val="solid"/>
+                      <a:round/>
+                      <a:headEnd type="none" w="med" len="med"/>
+                      <a:tailEnd type="none" w="med" len="med"/>
+                    </a:lnL>
+                    <a:lnR w="9525" cap="flat" cmpd="sng" algn="ctr">
+                      <a:solidFill>
+                        <a:srgbClr val="E1E4E8"/>
+                      </a:solidFill>
+                      <a:prstDash val="solid"/>
+                      <a:round/>
+                      <a:headEnd type="none" w="med" len="med"/>
+                      <a:tailEnd type="none" w="med" len="med"/>
+                    </a:lnR>
+                    <a:lnT w="9525" cap="flat" cmpd="sng" algn="ctr">
+                      <a:solidFill>
+                        <a:srgbClr val="E1E4E8"/>
+                      </a:solidFill>
+                      <a:prstDash val="solid"/>
+                      <a:round/>
+                      <a:headEnd type="none" w="med" len="med"/>
+                      <a:tailEnd type="none" w="med" len="med"/>
+                    </a:lnT>
+                    <a:lnB w="9525" cap="flat" cmpd="sng" algn="ctr">
+                      <a:solidFill>
+                        <a:srgbClr val="E1E4E8"/>
+                      </a:solidFill>
+                      <a:prstDash val="solid"/>
+                      <a:round/>
+                      <a:headEnd type="none" w="med" len="med"/>
+                      <a:tailEnd type="none" w="med" len="med"/>
+                    </a:lnB>
+                  </a:tcPr>
+                </a:tc>
+                <a:tc>
+                  <a:txBody>
+                    <a:bodyPr/>
+                    <a:lstStyle/>
+                    <a:p>
+                      <a:pPr indent="0" marL="0">
+                        <a:buNone/>
+                      </a:pPr>
+                      <a:r>
+                        <a:rPr lang="en-US" sz="1400" dirty="0">
+                          <a:solidFill>
+                            <a:srgbClr val="1F2429"/>
+                          </a:solidFill>
+                          <a:latin typeface="Calibri" pitchFamily="34" charset="0"/>
+                          <a:ea typeface="Calibri" pitchFamily="34" charset="-122"/>
+                          <a:cs typeface="Calibri" pitchFamily="34" charset="-120"/>
+                        </a:rPr>
+                        <a:t>GRANT SELECT, UPDATE ON Book TO ...</a:t>
+                      </a:r>
+                      <a:endParaRPr lang="en-US" sz="1400" dirty="0">
+                        <a:latin typeface="Calibri" charset="0"/>
+                        <a:ea typeface="Calibri" charset="0"/>
+                        <a:cs typeface="Calibri" charset="0"/>
+                      </a:endParaRPr>
+                    </a:p>
+                  </a:txBody>
+                  <a:tcPr marL="91440" marR="91440" marT="45720" marB="45720" anchor="ctr">
+                    <a:lnL w="9525" cap="flat" cmpd="sng" algn="ctr">
+                      <a:solidFill>
+                        <a:srgbClr val="E1E4E8"/>
+                      </a:solidFill>
+                      <a:prstDash val="solid"/>
+                      <a:round/>
+                      <a:headEnd type="none" w="med" len="med"/>
+                      <a:tailEnd type="none" w="med" len="med"/>
+                    </a:lnL>
+                    <a:lnR w="9525" cap="flat" cmpd="sng" algn="ctr">
+                      <a:solidFill>
+                        <a:srgbClr val="E1E4E8"/>
+                      </a:solidFill>
+                      <a:prstDash val="solid"/>
+                      <a:round/>
+                      <a:headEnd type="none" w="med" len="med"/>
+                      <a:tailEnd type="none" w="med" len="med"/>
+                    </a:lnR>
+                    <a:lnT w="9525" cap="flat" cmpd="sng" algn="ctr">
+                      <a:solidFill>
+                        <a:srgbClr val="E1E4E8"/>
+                      </a:solidFill>
+                      <a:prstDash val="solid"/>
+                      <a:round/>
+                      <a:headEnd type="none" w="med" len="med"/>
+                      <a:tailEnd type="none" w="med" len="med"/>
+                    </a:lnT>
+                    <a:lnB w="9525" cap="flat" cmpd="sng" algn="ctr">
+                      <a:solidFill>
+                        <a:srgbClr val="E1E4E8"/>
+                      </a:solidFill>
+                      <a:prstDash val="solid"/>
+                      <a:round/>
+                      <a:headEnd type="none" w="med" len="med"/>
+                      <a:tailEnd type="none" w="med" len="med"/>
+                    </a:lnB>
+                  </a:tcPr>
+                </a:tc>
+              </a:tr>
+              <a:tr h="574766">
+                <a:tc>
+                  <a:txBody>
+                    <a:bodyPr/>
+                    <a:lstStyle/>
+                    <a:p>
+                      <a:pPr indent="0" marL="0">
+                        <a:buNone/>
+                      </a:pPr>
+                      <a:r>
+                        <a:rPr lang="en-US" sz="1400" dirty="0">
+                          <a:solidFill>
+                            <a:srgbClr val="1F2429"/>
+                          </a:solidFill>
+                          <a:latin typeface="Calibri" pitchFamily="34" charset="0"/>
+                          <a:ea typeface="Calibri" pitchFamily="34" charset="-122"/>
+                          <a:cs typeface="Calibri" pitchFamily="34" charset="-120"/>
+                        </a:rPr>
+                        <a:t>Retire the old catalog table</a:t>
+                      </a:r>
+                      <a:endParaRPr lang="en-US" sz="1400" dirty="0">
+                        <a:latin typeface="Calibri" charset="0"/>
+                        <a:ea typeface="Calibri" charset="0"/>
+                        <a:cs typeface="Calibri" charset="0"/>
+                      </a:endParaRPr>
+                    </a:p>
+                  </a:txBody>
+                  <a:tcPr marL="91440" marR="91440" marT="45720" marB="45720" anchor="ctr">
+                    <a:lnL w="9525" cap="flat" cmpd="sng" algn="ctr">
+                      <a:solidFill>
+                        <a:srgbClr val="E1E4E8"/>
+                      </a:solidFill>
+                      <a:prstDash val="solid"/>
+                      <a:round/>
+                      <a:headEnd type="none" w="med" len="med"/>
+                      <a:tailEnd type="none" w="med" len="med"/>
+                    </a:lnL>
+                    <a:lnR w="9525" cap="flat" cmpd="sng" algn="ctr">
+                      <a:solidFill>
+                        <a:srgbClr val="E1E4E8"/>
+                      </a:solidFill>
+                      <a:prstDash val="solid"/>
+                      <a:round/>
+                      <a:headEnd type="none" w="med" len="med"/>
+                      <a:tailEnd type="none" w="med" len="med"/>
+                    </a:lnR>
+                    <a:lnT w="9525" cap="flat" cmpd="sng" algn="ctr">
+                      <a:solidFill>
+                        <a:srgbClr val="E1E4E8"/>
+                      </a:solidFill>
+                      <a:prstDash val="solid"/>
+                      <a:round/>
+                      <a:headEnd type="none" w="med" len="med"/>
+                      <a:tailEnd type="none" w="med" len="med"/>
+                    </a:lnT>
+                    <a:lnB w="9525" cap="flat" cmpd="sng" algn="ctr">
+                      <a:solidFill>
+                        <a:srgbClr val="E1E4E8"/>
+                      </a:solidFill>
+                      <a:prstDash val="solid"/>
+                      <a:round/>
+                      <a:headEnd type="none" w="med" len="med"/>
+                      <a:tailEnd type="none" w="med" len="med"/>
+                    </a:lnB>
+                  </a:tcPr>
+                </a:tc>
+                <a:tc>
+                  <a:txBody>
+                    <a:bodyPr/>
+                    <a:lstStyle/>
+                    <a:p>
+                      <a:pPr indent="0" marL="0">
+                        <a:buNone/>
+                      </a:pPr>
+                      <a:r>
+                        <a:rPr lang="en-US" sz="1400" dirty="0">
+                          <a:solidFill>
+                            <a:srgbClr val="1F2429"/>
+                          </a:solidFill>
+                          <a:latin typeface="Calibri" pitchFamily="34" charset="0"/>
+                          <a:ea typeface="Calibri" pitchFamily="34" charset="-122"/>
+                          <a:cs typeface="Calibri" pitchFamily="34" charset="-120"/>
+                        </a:rPr>
+                        <a:t>DDL</a:t>
+                      </a:r>
+                      <a:endParaRPr lang="en-US" sz="1400" dirty="0">
+                        <a:latin typeface="Calibri" charset="0"/>
+                        <a:ea typeface="Calibri" charset="0"/>
+                        <a:cs typeface="Calibri" charset="0"/>
+                      </a:endParaRPr>
+                    </a:p>
+                  </a:txBody>
+                  <a:tcPr marL="91440" marR="91440" marT="45720" marB="45720" anchor="ctr">
+                    <a:lnL w="9525" cap="flat" cmpd="sng" algn="ctr">
+                      <a:solidFill>
+                        <a:srgbClr val="E1E4E8"/>
+                      </a:solidFill>
+                      <a:prstDash val="solid"/>
+                      <a:round/>
+                      <a:headEnd type="none" w="med" len="med"/>
+                      <a:tailEnd type="none" w="med" len="med"/>
+                    </a:lnL>
+                    <a:lnR w="9525" cap="flat" cmpd="sng" algn="ctr">
+                      <a:solidFill>
+                        <a:srgbClr val="E1E4E8"/>
+                      </a:solidFill>
+                      <a:prstDash val="solid"/>
+                      <a:round/>
+                      <a:headEnd type="none" w="med" len="med"/>
+                      <a:tailEnd type="none" w="med" len="med"/>
+                    </a:lnR>
+                    <a:lnT w="9525" cap="flat" cmpd="sng" algn="ctr">
+                      <a:solidFill>
+                        <a:srgbClr val="E1E4E8"/>
+                      </a:solidFill>
+                      <a:prstDash val="solid"/>
+                      <a:round/>
+                      <a:headEnd type="none" w="med" len="med"/>
+                      <a:tailEnd type="none" w="med" len="med"/>
+                    </a:lnT>
+                    <a:lnB w="9525" cap="flat" cmpd="sng" algn="ctr">
+                      <a:solidFill>
+                        <a:srgbClr val="E1E4E8"/>
+                      </a:solidFill>
+                      <a:prstDash val="solid"/>
+                      <a:round/>
+                      <a:headEnd type="none" w="med" len="med"/>
+                      <a:tailEnd type="none" w="med" len="med"/>
+                    </a:lnB>
+                  </a:tcPr>
+                </a:tc>
+                <a:tc>
+                  <a:txBody>
+                    <a:bodyPr/>
+                    <a:lstStyle/>
+                    <a:p>
+                      <a:pPr indent="0" marL="0">
+                        <a:buNone/>
+                      </a:pPr>
+                      <a:r>
+                        <a:rPr lang="en-US" sz="1400" dirty="0">
+                          <a:solidFill>
+                            <a:srgbClr val="1F2429"/>
+                          </a:solidFill>
+                          <a:latin typeface="Calibri" pitchFamily="34" charset="0"/>
+                          <a:ea typeface="Calibri" pitchFamily="34" charset="-122"/>
+                          <a:cs typeface="Calibri" pitchFamily="34" charset="-120"/>
+                        </a:rPr>
+                        <a:t>DROP TABLE OldBook</a:t>
+                      </a:r>
+                      <a:endParaRPr lang="en-US" sz="1400" dirty="0">
+                        <a:latin typeface="Calibri" charset="0"/>
+                        <a:ea typeface="Calibri" charset="0"/>
+                        <a:cs typeface="Calibri" charset="0"/>
+                      </a:endParaRPr>
+                    </a:p>
+                  </a:txBody>
+                  <a:tcPr marL="91440" marR="91440" marT="45720" marB="45720" anchor="ctr">
+                    <a:lnL w="9525" cap="flat" cmpd="sng" algn="ctr">
+                      <a:solidFill>
+                        <a:srgbClr val="E1E4E8"/>
+                      </a:solidFill>
+                      <a:prstDash val="solid"/>
+                      <a:round/>
+                      <a:headEnd type="none" w="med" len="med"/>
+                      <a:tailEnd type="none" w="med" len="med"/>
+                    </a:lnL>
+                    <a:lnR w="9525" cap="flat" cmpd="sng" algn="ctr">
+                      <a:solidFill>
+                        <a:srgbClr val="E1E4E8"/>
+                      </a:solidFill>
+                      <a:prstDash val="solid"/>
+                      <a:round/>
+                      <a:headEnd type="none" w="med" len="med"/>
+                      <a:tailEnd type="none" w="med" len="med"/>
+                    </a:lnR>
+                    <a:lnT w="9525" cap="flat" cmpd="sng" algn="ctr">
+                      <a:solidFill>
+                        <a:srgbClr val="E1E4E8"/>
+                      </a:solidFill>
+                      <a:prstDash val="solid"/>
+                      <a:round/>
+                      <a:headEnd type="none" w="med" len="med"/>
+                      <a:tailEnd type="none" w="med" len="med"/>
+                    </a:lnT>
+                    <a:lnB w="9525" cap="flat" cmpd="sng" algn="ctr">
+                      <a:solidFill>
+                        <a:srgbClr val="E1E4E8"/>
+                      </a:solidFill>
+                      <a:prstDash val="solid"/>
+                      <a:round/>
+                      <a:headEnd type="none" w="med" len="med"/>
+                      <a:tailEnd type="none" w="med" len="med"/>
+                    </a:lnB>
+                  </a:tcPr>
+                </a:tc>
+              </a:tr>
+            </a:tbl>
+          </a:graphicData>
+        </a:graphic>
+      </p:graphicFrame>
+    </p:spTree>
+  </p:cSld>
+  <p:clrMapOvr>
+    <a:masterClrMapping/>
+  </p:clrMapOvr>
+</p:sld>
+</file>
+
+<file path=ppt/slides/slide17.xml><?xml version="1.0" encoding="utf-8"?>
+<p:sld xmlns:a="http://schemas.openxmlformats.org/drawingml/2006/main" xmlns:r="http://schemas.openxmlformats.org/officeDocument/2006/relationships" xmlns:p="http://schemas.openxmlformats.org/presentationml/2006/main">
+  <p:cSld name="Slide 2">
+    <p:bg>
+      <p:bgPr>
+        <a:solidFill>
+          <a:srgbClr val="F7F8F9"/>
+        </a:solidFill>
+      </p:bgPr>
+    </p:bg>
+    <p:spTree>
+      <p:nvGrpSpPr>
+        <p:cNvPr id="1" name=""/>
+        <p:cNvGrpSpPr/>
+        <p:nvPr/>
+      </p:nvGrpSpPr>
+      <p:grpSpPr>
+        <a:xfrm>
+          <a:off x="0" y="0"/>
+          <a:ext cx="0" cy="0"/>
+          <a:chOff x="0" y="0"/>
+          <a:chExt cx="0" cy="0"/>
+        </a:xfrm>
+      </p:grpSpPr>
+      <p:sp>
+        <p:nvSpPr>
+          <p:cNvPr id="2" name="Text 0"/>
+          <p:cNvSpPr txBox="1"/>
+          <p:nvPr/>
+        </p:nvSpPr>
+        <p:spPr>
+          <a:xfrm>
+            <a:off x="548640" y="365760"/>
+            <a:ext cx="11064240" cy="731520"/>
+          </a:xfrm>
+          <a:prstGeom prst="rect">
+            <a:avLst/>
+          </a:prstGeom>
+          <a:noFill/>
+          <a:ln/>
+        </p:spPr>
+        <p:txBody>
+          <a:bodyPr wrap="square" lIns="0" tIns="0" rIns="0" bIns="0" rtlCol="0" anchor="ctr"/>
+          <a:lstStyle/>
+          <a:p>
+            <a:pPr indent="0" marL="0">
+              <a:buNone/>
+            </a:pPr>
+            <a:r>
+              <a:rPr lang="en-US" sz="2800" b="1" dirty="0">
+                <a:solidFill>
+                  <a:srgbClr val="1F2429"/>
+                </a:solidFill>
+                <a:latin typeface="Calibri" pitchFamily="34" charset="0"/>
+                <a:ea typeface="Calibri" pitchFamily="34" charset="-122"/>
+                <a:cs typeface="Calibri" pitchFamily="34" charset="-120"/>
+              </a:rPr>
+              <a:t>Utilities in One Library Day</a:t>
+            </a:r>
+            <a:endParaRPr lang="en-US" sz="2800" dirty="0"/>
+          </a:p>
+        </p:txBody>
+      </p:sp>
+      <p:sp>
+        <p:nvSpPr>
+          <p:cNvPr id="3" name="Text 1"/>
+          <p:cNvSpPr txBox="1"/>
+          <p:nvPr/>
+        </p:nvSpPr>
+        <p:spPr>
+          <a:xfrm>
+            <a:off x="9951415" y="6455664"/>
+            <a:ext cx="2011680" cy="292608"/>
+          </a:xfrm>
+          <a:prstGeom prst="rect">
+            <a:avLst/>
+          </a:prstGeom>
+          <a:noFill/>
+          <a:ln/>
+        </p:spPr>
+        <p:txBody>
+          <a:bodyPr wrap="square" lIns="0" tIns="0" rIns="0" bIns="0" rtlCol="0" anchor="ctr"/>
+          <a:lstStyle/>
+          <a:p>
+            <a:pPr algn="r" indent="0" marL="0">
+              <a:buNone/>
+            </a:pPr>
+            <a:r>
+              <a:rPr lang="en-US" sz="1200" u="sng" dirty="0">
+                <a:solidFill>
+                  <a:srgbClr val="8A939B"/>
+                </a:solidFill>
+                <a:latin typeface="Calibri" pitchFamily="34" charset="0"/>
+                <a:ea typeface="Calibri" pitchFamily="34" charset="-122"/>
+                <a:cs typeface="Calibri" pitchFamily="34" charset="-120"/>
+                <a:hlinkClick r:id="rId1" invalidUrl="" action="" tgtFrame="" tooltip="" history="1" highlightClick="0" endSnd="0">
+                  <a:extLst>
+                    <a:ext uri="{A12FA001-AC4F-418D-AE19-62706E023703}">
+                      <ahyp:hlinkClr xmlns:ahyp="http://schemas.microsoft.com/office/drawing/2018/hyperlinkcolor" val="tx"/>
+                    </a:ext>
+                  </a:extLst>
+                </a:hlinkClick>
+              </a:rPr>
+              <a:t>cuinotes.com</a:t>
+            </a:r>
+            <a:pPr algn="r" indent="0" marL="0">
+              <a:buNone/>
+            </a:pPr>
+            <a:r>
+              <a:rPr lang="en-US" sz="1200" dirty="0">
+                <a:solidFill>
+                  <a:srgbClr val="8A939B"/>
+                </a:solidFill>
+                <a:latin typeface="Calibri" pitchFamily="34" charset="0"/>
+                <a:ea typeface="Calibri" pitchFamily="34" charset="-122"/>
+                <a:cs typeface="Calibri" pitchFamily="34" charset="-120"/>
+              </a:rPr>
+              <a:t>  ·  15</a:t>
+            </a:r>
+            <a:endParaRPr lang="en-US" sz="1200" dirty="0"/>
+          </a:p>
+        </p:txBody>
+      </p:sp>
+      <p:sp>
+        <p:nvSpPr>
+          <p:cNvPr id="4" name="Text 2"/>
+          <p:cNvSpPr txBox="1"/>
+          <p:nvPr/>
+        </p:nvSpPr>
+        <p:spPr>
+          <a:xfrm>
+            <a:off x="640080" y="1371600"/>
+            <a:ext cx="10332720" cy="4846320"/>
+          </a:xfrm>
+          <a:prstGeom prst="rect">
+            <a:avLst/>
+          </a:prstGeom>
+          <a:noFill/>
+          <a:ln/>
+        </p:spPr>
+        <p:txBody>
+          <a:bodyPr wrap="square" lIns="0" tIns="0" rIns="0" bIns="0" rtlCol="0" anchor="t"/>
+          <a:lstStyle/>
+          <a:p>
+            <a:pPr marL="342900" indent="-342900">
+              <a:spcAft>
+                <a:spcPts val="1800"/>
+              </a:spcAft>
+              <a:buSzPct val="100000"/>
+              <a:buChar char="•"/>
+            </a:pPr>
+            <a:r>
+              <a:rPr lang="en-US" sz="1800" dirty="0">
+                <a:solidFill>
+                  <a:srgbClr val="1F2429"/>
+                </a:solidFill>
+                <a:latin typeface="Calibri" pitchFamily="34" charset="0"/>
+                <a:ea typeface="Calibri" pitchFamily="34" charset="-122"/>
+                <a:cs typeface="Calibri" pitchFamily="34" charset="-120"/>
+              </a:rPr>
+              <a:t>Morning — a loading job imports 10,000 records from the old catalog system</a:t>
+            </a:r>
+            <a:endParaRPr lang="en-US" sz="1800" dirty="0"/>
+          </a:p>
+          <a:p>
+            <a:pPr marL="342900" indent="-342900">
+              <a:spcAft>
+                <a:spcPts val="1800"/>
+              </a:spcAft>
+              <a:buSzPct val="100000"/>
+              <a:buChar char="•"/>
+            </a:pPr>
+            <a:r>
+              <a:rPr lang="en-US" sz="1800" dirty="0">
+                <a:solidFill>
+                  <a:srgbClr val="1F2429"/>
+                </a:solidFill>
+                <a:latin typeface="Calibri" pitchFamily="34" charset="0"/>
+                <a:ea typeface="Calibri" pitchFamily="34" charset="-122"/>
+                <a:cs typeface="Calibri" pitchFamily="34" charset="-120"/>
+              </a:rPr>
+              <a:t>Midday — performance monitoring flags that “search by author” has slowed as the catalog grew</a:t>
+            </a:r>
+            <a:endParaRPr lang="en-US" sz="1800" dirty="0"/>
+          </a:p>
+          <a:p>
+            <a:pPr marL="342900" indent="-342900">
+              <a:spcAft>
+                <a:spcPts val="1800"/>
+              </a:spcAft>
+              <a:buSzPct val="100000"/>
+              <a:buChar char="•"/>
+            </a:pPr>
+            <a:r>
+              <a:rPr lang="en-US" sz="1800" dirty="0">
+                <a:solidFill>
+                  <a:srgbClr val="1F2429"/>
+                </a:solidFill>
+                <a:latin typeface="Calibri" pitchFamily="34" charset="0"/>
+                <a:ea typeface="Calibri" pitchFamily="34" charset="-122"/>
+                <a:cs typeface="Calibri" pitchFamily="34" charset="-120"/>
+              </a:rPr>
+              <a:t>Afternoon — a reorganization rebuilds the fragmented index on Book.isbn to restore speed</a:t>
+            </a:r>
+            <a:endParaRPr lang="en-US" sz="1800" dirty="0"/>
+          </a:p>
+          <a:p>
+            <a:pPr marL="342900" indent="-342900">
+              <a:spcAft>
+                <a:spcPts val="1800"/>
+              </a:spcAft>
+              <a:buSzPct val="100000"/>
+              <a:buChar char="•"/>
+            </a:pPr>
+            <a:r>
+              <a:rPr lang="en-US" sz="1800" dirty="0">
+                <a:solidFill>
+                  <a:srgbClr val="1F2429"/>
+                </a:solidFill>
+                <a:latin typeface="Calibri" pitchFamily="34" charset="0"/>
+                <a:ea typeface="Calibri" pitchFamily="34" charset="-122"/>
+                <a:cs typeface="Calibri" pitchFamily="34" charset="-120"/>
+              </a:rPr>
+              <a:t>Evening — a statistics run records that 40% of loans are computer-science books, so the optimizer plans better</a:t>
+            </a:r>
+            <a:endParaRPr lang="en-US" sz="1800" dirty="0"/>
+          </a:p>
+          <a:p>
+            <a:pPr marL="342900" indent="-342900">
+              <a:spcAft>
+                <a:spcPts val="1800"/>
+              </a:spcAft>
+              <a:buSzPct val="100000"/>
+              <a:buChar char="•"/>
+            </a:pPr>
+            <a:r>
+              <a:rPr lang="en-US" sz="1800" dirty="0">
+                <a:solidFill>
+                  <a:srgbClr val="1F2429"/>
+                </a:solidFill>
+                <a:latin typeface="Calibri" pitchFamily="34" charset="0"/>
+                <a:ea typeface="Calibri" pitchFamily="34" charset="-122"/>
+                <a:cs typeface="Calibri" pitchFamily="34" charset="-120"/>
+              </a:rPr>
+              <a:t>Night — a backup captures the whole library database, and an export produces the overdue-loan report</a:t>
+            </a:r>
+            <a:endParaRPr lang="en-US" sz="1800" dirty="0"/>
+          </a:p>
+          <a:p>
+            <a:pPr marL="342900" indent="-342900">
+              <a:spcAft>
+                <a:spcPts val="1800"/>
+              </a:spcAft>
+              <a:buSzPct val="100000"/>
+              <a:buChar char="•"/>
+            </a:pPr>
+            <a:r>
+              <a:rPr lang="en-US" sz="1800" dirty="0">
+                <a:solidFill>
+                  <a:srgbClr val="1F2429"/>
+                </a:solidFill>
+                <a:latin typeface="Calibri" pitchFamily="34" charset="0"/>
+                <a:ea typeface="Calibri" pitchFamily="34" charset="-122"/>
+                <a:cs typeface="Calibri" pitchFamily="34" charset="-120"/>
+              </a:rPr>
+              <a:t>None of these tools runs itself: someone scheduled each one, which is the next slide's point</a:t>
+            </a:r>
+            <a:endParaRPr lang="en-US" sz="1800" dirty="0"/>
+          </a:p>
+        </p:txBody>
+      </p:sp>
+    </p:spTree>
+  </p:cSld>
+  <p:clrMapOvr>
+    <a:masterClrMapping/>
+  </p:clrMapOvr>
+</p:sld>
+</file>
+
+<file path=ppt/slides/slide18.xml><?xml version="1.0" encoding="utf-8"?>
+<p:sld xmlns:a="http://schemas.openxmlformats.org/drawingml/2006/main" xmlns:r="http://schemas.openxmlformats.org/officeDocument/2006/relationships" xmlns:p="http://schemas.openxmlformats.org/presentationml/2006/main">
+  <p:cSld name="Slide 2">
+    <p:bg>
+      <p:bgPr>
+        <a:solidFill>
+          <a:srgbClr val="F7F8F9"/>
+        </a:solidFill>
+      </p:bgPr>
+    </p:bg>
+    <p:spTree>
+      <p:nvGrpSpPr>
+        <p:cNvPr id="1" name=""/>
+        <p:cNvGrpSpPr/>
+        <p:nvPr/>
+      </p:nvGrpSpPr>
+      <p:grpSpPr>
+        <a:xfrm>
+          <a:off x="0" y="0"/>
+          <a:ext cx="0" cy="0"/>
+          <a:chOff x="0" y="0"/>
+          <a:chExt cx="0" cy="0"/>
+        </a:xfrm>
+      </p:grpSpPr>
+      <p:sp>
+        <p:nvSpPr>
+          <p:cNvPr id="2" name="Text 0"/>
+          <p:cNvSpPr txBox="1"/>
+          <p:nvPr/>
+        </p:nvSpPr>
+        <p:spPr>
+          <a:xfrm>
+            <a:off x="548640" y="365760"/>
+            <a:ext cx="11064240" cy="731520"/>
+          </a:xfrm>
+          <a:prstGeom prst="rect">
+            <a:avLst/>
+          </a:prstGeom>
+          <a:noFill/>
+          <a:ln/>
+        </p:spPr>
+        <p:txBody>
+          <a:bodyPr wrap="square" lIns="0" tIns="0" rIns="0" bIns="0" rtlCol="0" anchor="ctr"/>
+          <a:lstStyle/>
+          <a:p>
+            <a:pPr indent="0" marL="0">
+              <a:buNone/>
+            </a:pPr>
+            <a:r>
+              <a:rPr lang="en-US" sz="2800" b="1" dirty="0">
+                <a:solidFill>
+                  <a:srgbClr val="1F2429"/>
+                </a:solidFill>
+                <a:latin typeface="Calibri" pitchFamily="34" charset="0"/>
+                <a:ea typeface="Calibri" pitchFamily="34" charset="-122"/>
+                <a:cs typeface="Calibri" pitchFamily="34" charset="-120"/>
+              </a:rPr>
+              <a:t>Administration Is a Routine, Not an Event</a:t>
+            </a:r>
+            <a:endParaRPr lang="en-US" sz="2800" dirty="0"/>
+          </a:p>
+        </p:txBody>
+      </p:sp>
+      <p:sp>
+        <p:nvSpPr>
+          <p:cNvPr id="3" name="Text 1"/>
+          <p:cNvSpPr txBox="1"/>
+          <p:nvPr/>
+        </p:nvSpPr>
+        <p:spPr>
+          <a:xfrm>
+            <a:off x="9951415" y="6455664"/>
+            <a:ext cx="2011680" cy="292608"/>
+          </a:xfrm>
+          <a:prstGeom prst="rect">
+            <a:avLst/>
+          </a:prstGeom>
+          <a:noFill/>
+          <a:ln/>
+        </p:spPr>
+        <p:txBody>
+          <a:bodyPr wrap="square" lIns="0" tIns="0" rIns="0" bIns="0" rtlCol="0" anchor="ctr"/>
+          <a:lstStyle/>
+          <a:p>
+            <a:pPr algn="r" indent="0" marL="0">
+              <a:buNone/>
+            </a:pPr>
+            <a:r>
+              <a:rPr lang="en-US" sz="1200" u="sng" dirty="0">
+                <a:solidFill>
+                  <a:srgbClr val="8A939B"/>
+                </a:solidFill>
+                <a:latin typeface="Calibri" pitchFamily="34" charset="0"/>
+                <a:ea typeface="Calibri" pitchFamily="34" charset="-122"/>
+                <a:cs typeface="Calibri" pitchFamily="34" charset="-120"/>
+                <a:hlinkClick r:id="rId1" invalidUrl="" action="" tgtFrame="" tooltip="" history="1" highlightClick="0" endSnd="0">
+                  <a:extLst>
+                    <a:ext uri="{A12FA001-AC4F-418D-AE19-62706E023703}">
+                      <ahyp:hlinkClr xmlns:ahyp="http://schemas.microsoft.com/office/drawing/2018/hyperlinkcolor" val="tx"/>
+                    </a:ext>
+                  </a:extLst>
+                </a:hlinkClick>
+              </a:rPr>
+              <a:t>cuinotes.com</a:t>
+            </a:r>
+            <a:pPr algn="r" indent="0" marL="0">
+              <a:buNone/>
+            </a:pPr>
+            <a:r>
+              <a:rPr lang="en-US" sz="1200" dirty="0">
+                <a:solidFill>
+                  <a:srgbClr val="8A939B"/>
+                </a:solidFill>
+                <a:latin typeface="Calibri" pitchFamily="34" charset="0"/>
+                <a:ea typeface="Calibri" pitchFamily="34" charset="-122"/>
+                <a:cs typeface="Calibri" pitchFamily="34" charset="-120"/>
+              </a:rPr>
+              <a:t>  ·  17</a:t>
+            </a:r>
+            <a:endParaRPr lang="en-US" sz="1200" dirty="0"/>
+          </a:p>
+        </p:txBody>
+      </p:sp>
+      <p:sp>
+        <p:nvSpPr>
+          <p:cNvPr id="4" name="Text 2"/>
+          <p:cNvSpPr txBox="1"/>
+          <p:nvPr/>
+        </p:nvSpPr>
+        <p:spPr>
+          <a:xfrm>
+            <a:off x="640080" y="1371600"/>
+            <a:ext cx="10332720" cy="4846320"/>
+          </a:xfrm>
+          <a:prstGeom prst="rect">
+            <a:avLst/>
+          </a:prstGeom>
+          <a:noFill/>
+          <a:ln/>
+        </p:spPr>
+        <p:txBody>
+          <a:bodyPr wrap="square" lIns="0" tIns="0" rIns="0" bIns="0" rtlCol="0" anchor="t"/>
+          <a:lstStyle/>
+          <a:p>
+            <a:pPr marL="342900" indent="-342900">
+              <a:spcAft>
+                <a:spcPts val="1800"/>
+              </a:spcAft>
+              <a:buSzPct val="100000"/>
+              <a:buChar char="•"/>
+            </a:pPr>
+            <a:r>
+              <a:rPr lang="en-US" sz="1800" dirty="0">
+                <a:solidFill>
+                  <a:srgbClr val="1F2429"/>
+                </a:solidFill>
+                <a:latin typeface="Calibri" pitchFamily="34" charset="0"/>
+                <a:ea typeface="Calibri" pitchFamily="34" charset="-122"/>
+                <a:cs typeface="Calibri" pitchFamily="34" charset="-120"/>
+              </a:rPr>
+              <a:t>Administration runs continuously — not just at go-live or when something breaks</a:t>
+            </a:r>
+            <a:endParaRPr lang="en-US" sz="1800" dirty="0"/>
+          </a:p>
+          <a:p>
+            <a:pPr marL="342900" indent="-342900">
+              <a:spcAft>
+                <a:spcPts val="1800"/>
+              </a:spcAft>
+              <a:buSzPct val="100000"/>
+              <a:buChar char="•"/>
+            </a:pPr>
+            <a:r>
+              <a:rPr lang="en-US" sz="1800" dirty="0">
+                <a:solidFill>
+                  <a:srgbClr val="1F2429"/>
+                </a:solidFill>
+                <a:latin typeface="Calibri" pitchFamily="34" charset="0"/>
+                <a:ea typeface="Calibri" pitchFamily="34" charset="-122"/>
+                <a:cs typeface="Calibri" pitchFamily="34" charset="-120"/>
+              </a:rPr>
+              <a:t>Weekly: review integrity constraints against the library's current rules</a:t>
+            </a:r>
+            <a:endParaRPr lang="en-US" sz="1800" dirty="0"/>
+          </a:p>
+          <a:p>
+            <a:pPr marL="342900" indent="-342900">
+              <a:spcAft>
+                <a:spcPts val="1800"/>
+              </a:spcAft>
+              <a:buSzPct val="100000"/>
+              <a:buChar char="•"/>
+            </a:pPr>
+            <a:r>
+              <a:rPr lang="en-US" sz="1800" dirty="0">
+                <a:solidFill>
+                  <a:srgbClr val="1F2429"/>
+                </a:solidFill>
+                <a:latin typeface="Calibri" pitchFamily="34" charset="0"/>
+                <a:ea typeface="Calibri" pitchFamily="34" charset="-122"/>
+                <a:cs typeface="Calibri" pitchFamily="34" charset="-120"/>
+              </a:rPr>
+              <a:t>Monthly: rehearse recovery from last night's backup, so the first real test is not during a real failure</a:t>
+            </a:r>
+            <a:endParaRPr lang="en-US" sz="1800" dirty="0"/>
+          </a:p>
+          <a:p>
+            <a:pPr marL="342900" indent="-342900">
+              <a:spcAft>
+                <a:spcPts val="1800"/>
+              </a:spcAft>
+              <a:buSzPct val="100000"/>
+              <a:buChar char="•"/>
+            </a:pPr>
+            <a:r>
+              <a:rPr lang="en-US" sz="1800" dirty="0">
+                <a:solidFill>
+                  <a:srgbClr val="1F2429"/>
+                </a:solidFill>
+                <a:latin typeface="Calibri" pitchFamily="34" charset="0"/>
+                <a:ea typeface="Calibri" pitchFamily="34" charset="-122"/>
+                <a:cs typeface="Calibri" pitchFamily="34" charset="-120"/>
+              </a:rPr>
+              <a:t>Ongoing: revoke privileges as staff join, change roles, or leave — stale access is a security hole</a:t>
+            </a:r>
+            <a:endParaRPr lang="en-US" sz="1800" dirty="0"/>
+          </a:p>
+          <a:p>
+            <a:pPr marL="342900" indent="-342900">
+              <a:spcAft>
+                <a:spcPts val="1800"/>
+              </a:spcAft>
+              <a:buSzPct val="100000"/>
+              <a:buChar char="•"/>
+            </a:pPr>
+            <a:r>
+              <a:rPr lang="en-US" sz="1800" dirty="0">
+                <a:solidFill>
+                  <a:srgbClr val="1F2429"/>
+                </a:solidFill>
+                <a:latin typeface="Calibri" pitchFamily="34" charset="0"/>
+                <a:ea typeface="Calibri" pitchFamily="34" charset="-122"/>
+                <a:cs typeface="Calibri" pitchFamily="34" charset="-120"/>
+              </a:rPr>
+              <a:t>Ongoing: tune indexes and configuration in response to monitoring results</a:t>
+            </a:r>
+            <a:endParaRPr lang="en-US" sz="1800" dirty="0"/>
+          </a:p>
+          <a:p>
+            <a:pPr marL="342900" indent="-342900">
+              <a:spcAft>
+                <a:spcPts val="1800"/>
+              </a:spcAft>
+              <a:buSzPct val="100000"/>
+              <a:buChar char="•"/>
+            </a:pPr>
+            <a:r>
+              <a:rPr lang="en-US" sz="1800" dirty="0">
+                <a:solidFill>
+                  <a:srgbClr val="1F2429"/>
+                </a:solidFill>
+                <a:latin typeface="Calibri" pitchFamily="34" charset="0"/>
+                <a:ea typeface="Calibri" pitchFamily="34" charset="-122"/>
+                <a:cs typeface="Calibri" pitchFamily="34" charset="-120"/>
+              </a:rPr>
+              <a:t>Always: turn new requests from librarians and developers into schema changes the DDL can deliver</a:t>
+            </a:r>
+            <a:endParaRPr lang="en-US" sz="1800" dirty="0"/>
+          </a:p>
+        </p:txBody>
+      </p:sp>
+    </p:spTree>
+  </p:cSld>
+  <p:clrMapOvr>
+    <a:masterClrMapping/>
+  </p:clrMapOvr>
+</p:sld>
+</file>
+
+<file path=ppt/slides/slide19.xml><?xml version="1.0" encoding="utf-8"?>
+<p:sld xmlns:a="http://schemas.openxmlformats.org/drawingml/2006/main" xmlns:r="http://schemas.openxmlformats.org/officeDocument/2006/relationships" xmlns:p="http://schemas.openxmlformats.org/presentationml/2006/main">
+  <p:cSld name="Slide 2">
+    <p:bg>
+      <p:bgPr>
+        <a:solidFill>
+          <a:srgbClr val="F7F8F9"/>
+        </a:solidFill>
+      </p:bgPr>
+    </p:bg>
+    <p:spTree>
+      <p:nvGrpSpPr>
+        <p:cNvPr id="1" name=""/>
+        <p:cNvGrpSpPr/>
+        <p:nvPr/>
+      </p:nvGrpSpPr>
+      <p:grpSpPr>
+        <a:xfrm>
+          <a:off x="0" y="0"/>
+          <a:ext cx="0" cy="0"/>
+          <a:chOff x="0" y="0"/>
+          <a:chExt cx="0" cy="0"/>
+        </a:xfrm>
+      </p:grpSpPr>
+      <p:sp>
+        <p:nvSpPr>
+          <p:cNvPr id="2" name="Text 0"/>
+          <p:cNvSpPr txBox="1"/>
+          <p:nvPr/>
+        </p:nvSpPr>
+        <p:spPr>
+          <a:xfrm>
+            <a:off x="548640" y="365760"/>
+            <a:ext cx="11064240" cy="731520"/>
+          </a:xfrm>
+          <a:prstGeom prst="rect">
+            <a:avLst/>
+          </a:prstGeom>
+          <a:noFill/>
+          <a:ln/>
+        </p:spPr>
+        <p:txBody>
+          <a:bodyPr wrap="square" lIns="0" tIns="0" rIns="0" bIns="0" rtlCol="0" anchor="ctr"/>
+          <a:lstStyle/>
+          <a:p>
+            <a:pPr indent="0" marL="0">
+              <a:buNone/>
+            </a:pPr>
+            <a:r>
+              <a:rPr lang="en-US" sz="2800" b="1" dirty="0">
+                <a:solidFill>
+                  <a:srgbClr val="1F2429"/>
+                </a:solidFill>
+                <a:latin typeface="Calibri" pitchFamily="34" charset="0"/>
+                <a:ea typeface="Calibri" pitchFamily="34" charset="-122"/>
+                <a:cs typeface="Calibri" pitchFamily="34" charset="-120"/>
+              </a:rPr>
+              <a:t>From Languages to Administration: Recap</a:t>
+            </a:r>
+            <a:endParaRPr lang="en-US" sz="2800" dirty="0"/>
+          </a:p>
+        </p:txBody>
+      </p:sp>
+      <p:sp>
+        <p:nvSpPr>
+          <p:cNvPr id="3" name="Text 1"/>
+          <p:cNvSpPr txBox="1"/>
+          <p:nvPr/>
+        </p:nvSpPr>
+        <p:spPr>
+          <a:xfrm>
+            <a:off x="9951415" y="6455664"/>
+            <a:ext cx="2011680" cy="292608"/>
+          </a:xfrm>
+          <a:prstGeom prst="rect">
+            <a:avLst/>
+          </a:prstGeom>
+          <a:noFill/>
+          <a:ln/>
+        </p:spPr>
+        <p:txBody>
+          <a:bodyPr wrap="square" lIns="0" tIns="0" rIns="0" bIns="0" rtlCol="0" anchor="ctr"/>
+          <a:lstStyle/>
+          <a:p>
+            <a:pPr algn="r" indent="0" marL="0">
+              <a:buNone/>
+            </a:pPr>
+            <a:r>
+              <a:rPr lang="en-US" sz="1200" u="sng" dirty="0">
+                <a:solidFill>
+                  <a:srgbClr val="8A939B"/>
+                </a:solidFill>
+                <a:latin typeface="Calibri" pitchFamily="34" charset="0"/>
+                <a:ea typeface="Calibri" pitchFamily="34" charset="-122"/>
+                <a:cs typeface="Calibri" pitchFamily="34" charset="-120"/>
+                <a:hlinkClick r:id="rId1" invalidUrl="" action="" tgtFrame="" tooltip="" history="1" highlightClick="0" endSnd="0">
+                  <a:extLst>
+                    <a:ext uri="{A12FA001-AC4F-418D-AE19-62706E023703}">
+                      <ahyp:hlinkClr xmlns:ahyp="http://schemas.microsoft.com/office/drawing/2018/hyperlinkcolor" val="tx"/>
+                    </a:ext>
+                  </a:extLst>
+                </a:hlinkClick>
+              </a:rPr>
+              <a:t>cuinotes.com</a:t>
+            </a:r>
+            <a:pPr algn="r" indent="0" marL="0">
+              <a:buNone/>
+            </a:pPr>
+            <a:r>
+              <a:rPr lang="en-US" sz="1200" dirty="0">
+                <a:solidFill>
+                  <a:srgbClr val="8A939B"/>
+                </a:solidFill>
+                <a:latin typeface="Calibri" pitchFamily="34" charset="0"/>
+                <a:ea typeface="Calibri" pitchFamily="34" charset="-122"/>
+                <a:cs typeface="Calibri" pitchFamily="34" charset="-120"/>
+              </a:rPr>
+              <a:t>  ·  18</a:t>
+            </a:r>
+            <a:endParaRPr lang="en-US" sz="1200" dirty="0"/>
+          </a:p>
+        </p:txBody>
+      </p:sp>
+      <p:sp>
+        <p:nvSpPr>
+          <p:cNvPr id="4" name="Text 2"/>
+          <p:cNvSpPr txBox="1"/>
+          <p:nvPr/>
+        </p:nvSpPr>
+        <p:spPr>
+          <a:xfrm>
+            <a:off x="640080" y="1371600"/>
+            <a:ext cx="10332720" cy="4846320"/>
+          </a:xfrm>
+          <a:prstGeom prst="rect">
+            <a:avLst/>
+          </a:prstGeom>
+          <a:noFill/>
+          <a:ln/>
+        </p:spPr>
+        <p:txBody>
+          <a:bodyPr wrap="square" lIns="0" tIns="0" rIns="0" bIns="0" rtlCol="0" anchor="t"/>
+          <a:lstStyle/>
+          <a:p>
+            <a:pPr marL="342900" indent="-342900">
+              <a:spcAft>
+                <a:spcPts val="1800"/>
+              </a:spcAft>
+              <a:buSzPct val="100000"/>
+              <a:buChar char="•"/>
+            </a:pPr>
+            <a:r>
+              <a:rPr lang="en-US" sz="1800" dirty="0">
+                <a:solidFill>
+                  <a:srgbClr val="1F2429"/>
+                </a:solidFill>
+                <a:latin typeface="Calibri" pitchFamily="34" charset="0"/>
+                <a:ea typeface="Calibri" pitchFamily="34" charset="-122"/>
+                <a:cs typeface="Calibri" pitchFamily="34" charset="-120"/>
+              </a:rPr>
+              <a:t>We separated database languages by purpose: DDL defines, DML works with data, DCL controls access</a:t>
+            </a:r>
+            <a:endParaRPr lang="en-US" sz="1800" dirty="0"/>
+          </a:p>
+          <a:p>
+            <a:pPr marL="342900" indent="-342900">
+              <a:spcAft>
+                <a:spcPts val="1800"/>
+              </a:spcAft>
+              <a:buSzPct val="100000"/>
+              <a:buChar char="•"/>
+            </a:pPr>
+            <a:r>
+              <a:rPr lang="en-US" sz="1800" dirty="0">
+                <a:solidFill>
+                  <a:srgbClr val="1F2429"/>
+                </a:solidFill>
+                <a:latin typeface="Calibri" pitchFamily="34" charset="0"/>
+                <a:ea typeface="Calibri" pitchFamily="34" charset="-122"/>
+                <a:cs typeface="Calibri" pitchFamily="34" charset="-120"/>
+              </a:rPr>
+              <a:t>DDL changes the catalog; DML changes rows; DCL changes who may do either</a:t>
+            </a:r>
+            <a:endParaRPr lang="en-US" sz="1800" dirty="0"/>
+          </a:p>
+          <a:p>
+            <a:pPr marL="342900" indent="-342900">
+              <a:spcAft>
+                <a:spcPts val="1800"/>
+              </a:spcAft>
+              <a:buSzPct val="100000"/>
+              <a:buChar char="•"/>
+            </a:pPr>
+            <a:r>
+              <a:rPr lang="en-US" sz="1800" dirty="0">
+                <a:solidFill>
+                  <a:srgbClr val="1F2429"/>
+                </a:solidFill>
+                <a:latin typeface="Calibri" pitchFamily="34" charset="0"/>
+                <a:ea typeface="Calibri" pitchFamily="34" charset="-122"/>
+                <a:cs typeface="Calibri" pitchFamily="34" charset="-120"/>
+              </a:rPr>
+              <a:t>DML can be procedural (say how) or declarative (say what) — modern SQL is declarative</a:t>
+            </a:r>
+            <a:endParaRPr lang="en-US" sz="1800" dirty="0"/>
+          </a:p>
+          <a:p>
+            <a:pPr marL="342900" indent="-342900">
+              <a:spcAft>
+                <a:spcPts val="1800"/>
+              </a:spcAft>
+              <a:buSzPct val="100000"/>
+              <a:buChar char="•"/>
+            </a:pPr>
+            <a:r>
+              <a:rPr lang="en-US" sz="1800" dirty="0">
+                <a:solidFill>
+                  <a:srgbClr val="1F2429"/>
+                </a:solidFill>
+                <a:latin typeface="Calibri" pitchFamily="34" charset="0"/>
+                <a:ea typeface="Calibri" pitchFamily="34" charset="-122"/>
+                <a:cs typeface="Calibri" pitchFamily="34" charset="-120"/>
+              </a:rPr>
+              <a:t>Utilities are the tools; administration is the DBA's ongoing responsibility that uses them</a:t>
+            </a:r>
+            <a:endParaRPr lang="en-US" sz="1800" dirty="0"/>
+          </a:p>
+          <a:p>
+            <a:pPr marL="342900" indent="-342900">
+              <a:spcAft>
+                <a:spcPts val="1800"/>
+              </a:spcAft>
+              <a:buSzPct val="100000"/>
+              <a:buChar char="•"/>
+            </a:pPr>
+            <a:r>
+              <a:rPr lang="en-US" sz="1800" dirty="0">
+                <a:solidFill>
+                  <a:srgbClr val="1F2429"/>
+                </a:solidFill>
+                <a:latin typeface="Calibri" pitchFamily="34" charset="0"/>
+                <a:ea typeface="Calibri" pitchFamily="34" charset="-122"/>
+                <a:cs typeface="Calibri" pitchFamily="34" charset="-120"/>
+              </a:rPr>
+              <a:t>Together these make Lecture 2's functions real: storage, transactions, security, recovery, and more</a:t>
+            </a:r>
+            <a:endParaRPr lang="en-US" sz="1800" dirty="0"/>
           </a:p>
         </p:txBody>
       </p:sp>
@@ -1899,7 +5905,7 @@
               <a:buNone/>
             </a:pPr>
             <a:r>
-              <a:rPr lang="en-US" sz="1000" u="sng" dirty="0">
+              <a:rPr lang="en-US" sz="1200" u="sng" dirty="0">
                 <a:solidFill>
                   <a:srgbClr val="8A939B"/>
                 </a:solidFill>
@@ -1920,7 +5926,7 @@
               <a:buNone/>
             </a:pPr>
             <a:r>
-              <a:rPr lang="en-US" sz="1000" dirty="0">
+              <a:rPr lang="en-US" sz="1200" dirty="0">
                 <a:solidFill>
                   <a:srgbClr val="8A939B"/>
                 </a:solidFill>
@@ -1930,7 +5936,7 @@
               </a:rPr>
               <a:t>  ·  2</a:t>
             </a:r>
-            <a:endParaRPr lang="en-US" sz="1000" dirty="0"/>
+            <a:endParaRPr lang="en-US" sz="1200" dirty="0"/>
           </a:p>
         </p:txBody>
       </p:sp>
@@ -1963,7 +5969,7 @@
               <a:buChar char="•"/>
             </a:pPr>
             <a:r>
-              <a:rPr lang="en-US" sz="1600" dirty="0">
+              <a:rPr lang="en-US" sz="1800" dirty="0">
                 <a:solidFill>
                   <a:srgbClr val="1F2429"/>
                 </a:solidFill>
@@ -1973,7 +5979,7 @@
               </a:rPr>
               <a:t>Why database languages are split into three sub-languages by purpose</a:t>
             </a:r>
-            <a:endParaRPr lang="en-US" sz="1600" dirty="0"/>
+            <a:endParaRPr lang="en-US" sz="1800" dirty="0"/>
           </a:p>
           <a:p>
             <a:pPr marL="342900" indent="-342900">
@@ -1984,7 +5990,7 @@
               <a:buChar char="•"/>
             </a:pPr>
             <a:r>
-              <a:rPr lang="en-US" sz="1600" dirty="0">
+              <a:rPr lang="en-US" sz="1800" dirty="0">
                 <a:solidFill>
                   <a:srgbClr val="1F2429"/>
                 </a:solidFill>
@@ -1994,7 +6000,7 @@
               </a:rPr>
               <a:t>Data Definition Language (DDL): defining structure</a:t>
             </a:r>
-            <a:endParaRPr lang="en-US" sz="1600" dirty="0"/>
+            <a:endParaRPr lang="en-US" sz="1800" dirty="0"/>
           </a:p>
           <a:p>
             <a:pPr marL="342900" indent="-342900">
@@ -2005,7 +6011,7 @@
               <a:buChar char="•"/>
             </a:pPr>
             <a:r>
-              <a:rPr lang="en-US" sz="1600" dirty="0">
+              <a:rPr lang="en-US" sz="1800" dirty="0">
                 <a:solidFill>
                   <a:srgbClr val="1F2429"/>
                 </a:solidFill>
@@ -2015,7 +6021,7 @@
               </a:rPr>
               <a:t>Data Manipulation Language (DML): working with data, procedural vs. declarative</a:t>
             </a:r>
-            <a:endParaRPr lang="en-US" sz="1600" dirty="0"/>
+            <a:endParaRPr lang="en-US" sz="1800" dirty="0"/>
           </a:p>
           <a:p>
             <a:pPr marL="342900" indent="-342900">
@@ -2026,7 +6032,7 @@
               <a:buChar char="•"/>
             </a:pPr>
             <a:r>
-              <a:rPr lang="en-US" sz="1600" dirty="0">
+              <a:rPr lang="en-US" sz="1800" dirty="0">
                 <a:solidFill>
                   <a:srgbClr val="1F2429"/>
                 </a:solidFill>
@@ -2036,7 +6042,7 @@
               </a:rPr>
               <a:t>Data Control Language (DCL): security and access control</a:t>
             </a:r>
-            <a:endParaRPr lang="en-US" sz="1600" dirty="0"/>
+            <a:endParaRPr lang="en-US" sz="1800" dirty="0"/>
           </a:p>
           <a:p>
             <a:pPr marL="342900" indent="-342900">
@@ -2047,7 +6053,7 @@
               <a:buChar char="•"/>
             </a:pPr>
             <a:r>
-              <a:rPr lang="en-US" sz="1600" dirty="0">
+              <a:rPr lang="en-US" sz="1800" dirty="0">
                 <a:solidFill>
                   <a:srgbClr val="1F2429"/>
                 </a:solidFill>
@@ -2057,7 +6063,7 @@
               </a:rPr>
               <a:t>The complete list of core DBMS functions, expanded from Lecture 2</a:t>
             </a:r>
-            <a:endParaRPr lang="en-US" sz="1600" dirty="0"/>
+            <a:endParaRPr lang="en-US" sz="1800" dirty="0"/>
           </a:p>
           <a:p>
             <a:pPr marL="342900" indent="-342900">
@@ -2068,7 +6074,7 @@
               <a:buChar char="•"/>
             </a:pPr>
             <a:r>
-              <a:rPr lang="en-US" sz="1600" dirty="0">
+              <a:rPr lang="en-US" sz="1800" dirty="0">
                 <a:solidFill>
                   <a:srgbClr val="1F2429"/>
                 </a:solidFill>
@@ -2078,7 +6084,244 @@
               </a:rPr>
               <a:t>Database utilities and the day-to-day tasks of database administration</a:t>
             </a:r>
-            <a:endParaRPr lang="en-US" sz="1600" dirty="0"/>
+            <a:endParaRPr lang="en-US" sz="1800" dirty="0"/>
+          </a:p>
+        </p:txBody>
+      </p:sp>
+    </p:spTree>
+  </p:cSld>
+  <p:clrMapOvr>
+    <a:masterClrMapping/>
+  </p:clrMapOvr>
+</p:sld>
+</file>
+
+<file path=ppt/slides/slide20.xml><?xml version="1.0" encoding="utf-8"?>
+<p:sld xmlns:a="http://schemas.openxmlformats.org/drawingml/2006/main" xmlns:r="http://schemas.openxmlformats.org/officeDocument/2006/relationships" xmlns:p="http://schemas.openxmlformats.org/presentationml/2006/main">
+  <p:cSld name="Slide 2">
+    <p:bg>
+      <p:bgPr>
+        <a:solidFill>
+          <a:srgbClr val="F7F8F9"/>
+        </a:solidFill>
+      </p:bgPr>
+    </p:bg>
+    <p:spTree>
+      <p:nvGrpSpPr>
+        <p:cNvPr id="1" name=""/>
+        <p:cNvGrpSpPr/>
+        <p:nvPr/>
+      </p:nvGrpSpPr>
+      <p:grpSpPr>
+        <a:xfrm>
+          <a:off x="0" y="0"/>
+          <a:ext cx="0" cy="0"/>
+          <a:chOff x="0" y="0"/>
+          <a:chExt cx="0" cy="0"/>
+        </a:xfrm>
+      </p:grpSpPr>
+      <p:sp>
+        <p:nvSpPr>
+          <p:cNvPr id="2" name="Text 0"/>
+          <p:cNvSpPr txBox="1"/>
+          <p:nvPr/>
+        </p:nvSpPr>
+        <p:spPr>
+          <a:xfrm>
+            <a:off x="548640" y="365760"/>
+            <a:ext cx="11064240" cy="731520"/>
+          </a:xfrm>
+          <a:prstGeom prst="rect">
+            <a:avLst/>
+          </a:prstGeom>
+          <a:noFill/>
+          <a:ln/>
+        </p:spPr>
+        <p:txBody>
+          <a:bodyPr wrap="square" lIns="0" tIns="0" rIns="0" bIns="0" rtlCol="0" anchor="ctr"/>
+          <a:lstStyle/>
+          <a:p>
+            <a:pPr indent="0" marL="0">
+              <a:buNone/>
+            </a:pPr>
+            <a:r>
+              <a:rPr lang="en-US" sz="2800" b="1" dirty="0">
+                <a:solidFill>
+                  <a:srgbClr val="1F2429"/>
+                </a:solidFill>
+                <a:latin typeface="Calibri" pitchFamily="34" charset="0"/>
+                <a:ea typeface="Calibri" pitchFamily="34" charset="-122"/>
+                <a:cs typeface="Calibri" pitchFamily="34" charset="-120"/>
+              </a:rPr>
+              <a:t>Looking Ahead: Lecture 4</a:t>
+            </a:r>
+            <a:endParaRPr lang="en-US" sz="2800" dirty="0"/>
+          </a:p>
+        </p:txBody>
+      </p:sp>
+      <p:sp>
+        <p:nvSpPr>
+          <p:cNvPr id="3" name="Text 1"/>
+          <p:cNvSpPr txBox="1"/>
+          <p:nvPr/>
+        </p:nvSpPr>
+        <p:spPr>
+          <a:xfrm>
+            <a:off x="9951415" y="6455664"/>
+            <a:ext cx="2011680" cy="292608"/>
+          </a:xfrm>
+          <a:prstGeom prst="rect">
+            <a:avLst/>
+          </a:prstGeom>
+          <a:noFill/>
+          <a:ln/>
+        </p:spPr>
+        <p:txBody>
+          <a:bodyPr wrap="square" lIns="0" tIns="0" rIns="0" bIns="0" rtlCol="0" anchor="ctr"/>
+          <a:lstStyle/>
+          <a:p>
+            <a:pPr algn="r" indent="0" marL="0">
+              <a:buNone/>
+            </a:pPr>
+            <a:r>
+              <a:rPr lang="en-US" sz="1200" u="sng" dirty="0">
+                <a:solidFill>
+                  <a:srgbClr val="8A939B"/>
+                </a:solidFill>
+                <a:latin typeface="Calibri" pitchFamily="34" charset="0"/>
+                <a:ea typeface="Calibri" pitchFamily="34" charset="-122"/>
+                <a:cs typeface="Calibri" pitchFamily="34" charset="-120"/>
+                <a:hlinkClick r:id="rId1" invalidUrl="" action="" tgtFrame="" tooltip="" history="1" highlightClick="0" endSnd="0">
+                  <a:extLst>
+                    <a:ext uri="{A12FA001-AC4F-418D-AE19-62706E023703}">
+                      <ahyp:hlinkClr xmlns:ahyp="http://schemas.microsoft.com/office/drawing/2018/hyperlinkcolor" val="tx"/>
+                    </a:ext>
+                  </a:extLst>
+                </a:hlinkClick>
+              </a:rPr>
+              <a:t>cuinotes.com</a:t>
+            </a:r>
+            <a:pPr algn="r" indent="0" marL="0">
+              <a:buNone/>
+            </a:pPr>
+            <a:r>
+              <a:rPr lang="en-US" sz="1200" dirty="0">
+                <a:solidFill>
+                  <a:srgbClr val="8A939B"/>
+                </a:solidFill>
+                <a:latin typeface="Calibri" pitchFamily="34" charset="0"/>
+                <a:ea typeface="Calibri" pitchFamily="34" charset="-122"/>
+                <a:cs typeface="Calibri" pitchFamily="34" charset="-120"/>
+              </a:rPr>
+              <a:t>  ·  20</a:t>
+            </a:r>
+            <a:endParaRPr lang="en-US" sz="1200" dirty="0"/>
+          </a:p>
+        </p:txBody>
+      </p:sp>
+      <p:sp>
+        <p:nvSpPr>
+          <p:cNvPr id="4" name="Text 2"/>
+          <p:cNvSpPr txBox="1"/>
+          <p:nvPr/>
+        </p:nvSpPr>
+        <p:spPr>
+          <a:xfrm>
+            <a:off x="640080" y="1371600"/>
+            <a:ext cx="10332720" cy="4846320"/>
+          </a:xfrm>
+          <a:prstGeom prst="rect">
+            <a:avLst/>
+          </a:prstGeom>
+          <a:noFill/>
+          <a:ln/>
+        </p:spPr>
+        <p:txBody>
+          <a:bodyPr wrap="square" lIns="0" tIns="0" rIns="0" bIns="0" rtlCol="0" anchor="t"/>
+          <a:lstStyle/>
+          <a:p>
+            <a:pPr marL="342900" indent="-342900">
+              <a:spcAft>
+                <a:spcPts val="1800"/>
+              </a:spcAft>
+              <a:buSzPct val="100000"/>
+              <a:buChar char="•"/>
+            </a:pPr>
+            <a:r>
+              <a:rPr lang="en-US" sz="1800" dirty="0">
+                <a:solidFill>
+                  <a:srgbClr val="1F2429"/>
+                </a:solidFill>
+                <a:latin typeface="Calibri" pitchFamily="34" charset="0"/>
+                <a:ea typeface="Calibri" pitchFamily="34" charset="-122"/>
+                <a:cs typeface="Calibri" pitchFamily="34" charset="-120"/>
+              </a:rPr>
+              <a:t>Lecture 4 shifts from what you can say to a DBMS to how a DBMS is architected internally</a:t>
+            </a:r>
+            <a:endParaRPr lang="en-US" sz="1800" dirty="0"/>
+          </a:p>
+          <a:p>
+            <a:pPr marL="342900" indent="-342900">
+              <a:spcAft>
+                <a:spcPts val="1800"/>
+              </a:spcAft>
+              <a:buSzPct val="100000"/>
+              <a:buChar char="•"/>
+            </a:pPr>
+            <a:r>
+              <a:rPr lang="en-US" sz="1800" dirty="0">
+                <a:solidFill>
+                  <a:srgbClr val="1F2429"/>
+                </a:solidFill>
+                <a:latin typeface="Calibri" pitchFamily="34" charset="0"/>
+                <a:ea typeface="Calibri" pitchFamily="34" charset="-122"/>
+                <a:cs typeface="Calibri" pitchFamily="34" charset="-120"/>
+              </a:rPr>
+              <a:t>You'll meet the client-server structure that connects applications to the DBMS</a:t>
+            </a:r>
+            <a:endParaRPr lang="en-US" sz="1800" dirty="0"/>
+          </a:p>
+          <a:p>
+            <a:pPr marL="342900" indent="-342900">
+              <a:spcAft>
+                <a:spcPts val="1800"/>
+              </a:spcAft>
+              <a:buSzPct val="100000"/>
+              <a:buChar char="•"/>
+            </a:pPr>
+            <a:r>
+              <a:rPr lang="en-US" sz="1800" dirty="0">
+                <a:solidFill>
+                  <a:srgbClr val="1F2429"/>
+                </a:solidFill>
+                <a:latin typeface="Calibri" pitchFamily="34" charset="0"/>
+                <a:ea typeface="Calibri" pitchFamily="34" charset="-122"/>
+                <a:cs typeface="Calibri" pitchFamily="34" charset="-120"/>
+              </a:rPr>
+              <a:t>You'll see the three-schema architecture: external, conceptual, and internal levels</a:t>
+            </a:r>
+            <a:endParaRPr lang="en-US" sz="1800" dirty="0"/>
+          </a:p>
+          <a:p>
+            <a:pPr marL="342900" indent="-342900">
+              <a:spcAft>
+                <a:spcPts val="1800"/>
+              </a:spcAft>
+              <a:buSzPct val="100000"/>
+              <a:buChar char="•"/>
+            </a:pPr>
+            <a:r>
+              <a:rPr lang="en-US" sz="1800" dirty="0">
+                <a:solidFill>
+                  <a:srgbClr val="1F2429"/>
+                </a:solidFill>
+                <a:latin typeface="Calibri" pitchFamily="34" charset="0"/>
+                <a:ea typeface="Calibri" pitchFamily="34" charset="-122"/>
+                <a:cs typeface="Calibri" pitchFamily="34" charset="-120"/>
+              </a:rPr>
+              <a:t>That architecture is what makes data independence possible — the mechanism behind Lecture 2's promise</a:t>
+            </a:r>
+            <a:endParaRPr lang="en-US" sz="1800" dirty="0"/>
           </a:p>
         </p:txBody>
       </p:sp>
@@ -2178,7 +6421,7 @@
               <a:buNone/>
             </a:pPr>
             <a:r>
-              <a:rPr lang="en-US" sz="1000" u="sng" dirty="0">
+              <a:rPr lang="en-US" sz="1200" u="sng" dirty="0">
                 <a:solidFill>
                   <a:srgbClr val="8A939B"/>
                 </a:solidFill>
@@ -2199,7 +6442,7 @@
               <a:buNone/>
             </a:pPr>
             <a:r>
-              <a:rPr lang="en-US" sz="1000" dirty="0">
+              <a:rPr lang="en-US" sz="1200" dirty="0">
                 <a:solidFill>
                   <a:srgbClr val="8A939B"/>
                 </a:solidFill>
@@ -2209,7 +6452,7 @@
               </a:rPr>
               <a:t>  ·  3</a:t>
             </a:r>
-            <a:endParaRPr lang="en-US" sz="1000" dirty="0"/>
+            <a:endParaRPr lang="en-US" sz="1200" dirty="0"/>
           </a:p>
         </p:txBody>
       </p:sp>
@@ -2238,7 +6481,7 @@
               <a:buNone/>
             </a:pPr>
             <a:r>
-              <a:rPr lang="en-US" sz="1450" dirty="0">
+              <a:rPr lang="en-US" sz="1800" dirty="0">
                 <a:solidFill>
                   <a:srgbClr val="1F2429"/>
                 </a:solidFill>
@@ -2248,7 +6491,7 @@
               </a:rPr>
               <a:t>Talking to a DBMS involves three genuinely different kinds of statements: what the data looks like, working with the data itself, and who is allowed to do either.</a:t>
             </a:r>
-            <a:endParaRPr lang="en-US" sz="1450" dirty="0"/>
+            <a:endParaRPr lang="en-US" sz="1800" dirty="0"/>
           </a:p>
         </p:txBody>
       </p:sp>
@@ -2277,7 +6520,7 @@
               <a:buNone/>
             </a:pPr>
             <a:r>
-              <a:rPr lang="en-US" sz="1200" b="1" dirty="0">
+              <a:rPr lang="en-US" sz="1800" b="1" dirty="0">
                 <a:solidFill>
                   <a:srgbClr val="8A939B"/>
                 </a:solidFill>
@@ -2287,7 +6530,7 @@
               </a:rPr>
               <a:t>The three sub-languages of a database language</a:t>
             </a:r>
-            <a:endParaRPr lang="en-US" sz="1200" dirty="0"/>
+            <a:endParaRPr lang="en-US" sz="1800" dirty="0"/>
           </a:p>
         </p:txBody>
       </p:sp>
@@ -2338,7 +6581,7 @@
               <a:buNone/>
             </a:pPr>
             <a:r>
-              <a:rPr lang="en-US" sz="1300" b="1" dirty="0">
+              <a:rPr lang="en-US" sz="1600" b="1" dirty="0">
                 <a:solidFill>
                   <a:srgbClr val="FFFFFF"/>
                 </a:solidFill>
@@ -2348,7 +6591,7 @@
               </a:rPr>
               <a:t>DDL</a:t>
             </a:r>
-            <a:endParaRPr lang="en-US" sz="1300" dirty="0"/>
+            <a:endParaRPr lang="en-US" sz="1400" dirty="0"/>
           </a:p>
         </p:txBody>
       </p:sp>
@@ -2377,7 +6620,7 @@
               <a:buNone/>
             </a:pPr>
             <a:r>
-              <a:rPr lang="en-US" sz="1000" dirty="0">
+              <a:rPr lang="en-US" sz="1400" dirty="0">
                 <a:solidFill>
                   <a:srgbClr val="FFFFFF"/>
                 </a:solidFill>
@@ -2387,7 +6630,7 @@
               </a:rPr>
               <a:t>Defines structure — tables, columns, constraints</a:t>
             </a:r>
-            <a:endParaRPr lang="en-US" sz="1000" dirty="0"/>
+            <a:endParaRPr lang="en-US" sz="1400" dirty="0"/>
           </a:p>
         </p:txBody>
       </p:sp>
@@ -2458,7 +6701,7 @@
               <a:buNone/>
             </a:pPr>
             <a:r>
-              <a:rPr lang="en-US" sz="1300" b="1" dirty="0">
+              <a:rPr lang="en-US" sz="1600" b="1" dirty="0">
                 <a:solidFill>
                   <a:srgbClr val="FFFFFF"/>
                 </a:solidFill>
@@ -2468,7 +6711,7 @@
               </a:rPr>
               <a:t>DML</a:t>
             </a:r>
-            <a:endParaRPr lang="en-US" sz="1300" dirty="0"/>
+            <a:endParaRPr lang="en-US" sz="1400" dirty="0"/>
           </a:p>
         </p:txBody>
       </p:sp>
@@ -2497,7 +6740,7 @@
               <a:buNone/>
             </a:pPr>
             <a:r>
-              <a:rPr lang="en-US" sz="1000" dirty="0">
+              <a:rPr lang="en-US" sz="1400" dirty="0">
                 <a:solidFill>
                   <a:srgbClr val="FFFFFF"/>
                 </a:solidFill>
@@ -2507,7 +6750,7 @@
               </a:rPr>
               <a:t>Reads and modifies the data living inside that structure</a:t>
             </a:r>
-            <a:endParaRPr lang="en-US" sz="1000" dirty="0"/>
+            <a:endParaRPr lang="en-US" sz="1400" dirty="0"/>
           </a:p>
         </p:txBody>
       </p:sp>
@@ -2578,7 +6821,7 @@
               <a:buNone/>
             </a:pPr>
             <a:r>
-              <a:rPr lang="en-US" sz="1300" b="1" dirty="0">
+              <a:rPr lang="en-US" sz="1600" b="1" dirty="0">
                 <a:solidFill>
                   <a:srgbClr val="FFFFFF"/>
                 </a:solidFill>
@@ -2588,7 +6831,7 @@
               </a:rPr>
               <a:t>DCL</a:t>
             </a:r>
-            <a:endParaRPr lang="en-US" sz="1300" dirty="0"/>
+            <a:endParaRPr lang="en-US" sz="1400" dirty="0"/>
           </a:p>
         </p:txBody>
       </p:sp>
@@ -2617,7 +6860,7 @@
               <a:buNone/>
             </a:pPr>
             <a:r>
-              <a:rPr lang="en-US" sz="1000" dirty="0">
+              <a:rPr lang="en-US" sz="1400" dirty="0">
                 <a:solidFill>
                   <a:srgbClr val="FFFFFF"/>
                 </a:solidFill>
@@ -2627,7 +6870,7 @@
               </a:rPr>
               <a:t>Controls who is allowed to use the DDL and DML above</a:t>
             </a:r>
-            <a:endParaRPr lang="en-US" sz="1000" dirty="0"/>
+            <a:endParaRPr lang="en-US" sz="1400" dirty="0"/>
           </a:p>
         </p:txBody>
       </p:sp>
@@ -2683,7 +6926,7 @@
               <a:buNone/>
             </a:pPr>
             <a:r>
-              <a:rPr lang="en-US" sz="1250" b="1" dirty="0">
+              <a:rPr lang="en-US" sz="1800" b="1" dirty="0">
                 <a:solidFill>
                   <a:srgbClr val="1F2429"/>
                 </a:solidFill>
@@ -2697,7 +6940,7 @@
               <a:buNone/>
             </a:pPr>
             <a:r>
-              <a:rPr lang="en-US" sz="1250" dirty="0">
+              <a:rPr lang="en-US" sz="1800" dirty="0">
                 <a:solidFill>
                   <a:srgbClr val="1F2429"/>
                 </a:solidFill>
@@ -2707,7 +6950,7 @@
               </a:rPr>
               <a:t>In a modern relational DBMS, DDL, DML, and DCL are usually all part of the same language — SQL — rather than three separate languages learned one at a time. The split here is by purpose, so each part can be reasoned about on its own; SQL itself is covered later in this course, once the relational model is established.</a:t>
             </a:r>
-            <a:endParaRPr lang="en-US" sz="1250" dirty="0"/>
+            <a:endParaRPr lang="en-US" sz="1800" dirty="0"/>
           </a:p>
         </p:txBody>
       </p:sp>
@@ -2807,7 +7050,7 @@
               <a:buNone/>
             </a:pPr>
             <a:r>
-              <a:rPr lang="en-US" sz="1000" u="sng" dirty="0">
+              <a:rPr lang="en-US" sz="1200" u="sng" dirty="0">
                 <a:solidFill>
                   <a:srgbClr val="8A939B"/>
                 </a:solidFill>
@@ -2828,7 +7071,7 @@
               <a:buNone/>
             </a:pPr>
             <a:r>
-              <a:rPr lang="en-US" sz="1000" dirty="0">
+              <a:rPr lang="en-US" sz="1200" dirty="0">
                 <a:solidFill>
                   <a:srgbClr val="8A939B"/>
                 </a:solidFill>
@@ -2838,7 +7081,7 @@
               </a:rPr>
               <a:t>  ·  4</a:t>
             </a:r>
-            <a:endParaRPr lang="en-US" sz="1000" dirty="0"/>
+            <a:endParaRPr lang="en-US" sz="1200" dirty="0"/>
           </a:p>
         </p:txBody>
       </p:sp>
@@ -2867,7 +7110,7 @@
               <a:buNone/>
             </a:pPr>
             <a:r>
-              <a:rPr lang="en-US" sz="1400" b="1" dirty="0">
+              <a:rPr lang="en-US" sz="1800" b="1" dirty="0">
                 <a:solidFill>
                   <a:srgbClr val="2FE6C4"/>
                 </a:solidFill>
@@ -2881,7 +7124,7 @@
               <a:buNone/>
             </a:pPr>
             <a:r>
-              <a:rPr lang="en-US" sz="1400" dirty="0">
+              <a:rPr lang="en-US" sz="1800" dirty="0">
                 <a:solidFill>
                   <a:srgbClr val="1F2429"/>
                 </a:solidFill>
@@ -2891,7 +7134,7 @@
               </a:rPr>
               <a:t> defines, alters, and removes the database's structure — its schema — rather than the data inside it. For a library system, DDL creates the Book and Member relations, and later adds a column Book didn't originally have.</a:t>
             </a:r>
-            <a:endParaRPr lang="en-US" sz="1400" dirty="0"/>
+            <a:endParaRPr lang="en-US" sz="1800" dirty="0"/>
           </a:p>
         </p:txBody>
       </p:sp>
@@ -2920,7 +7163,7 @@
               <a:buNone/>
             </a:pPr>
             <a:r>
-              <a:rPr lang="en-US" sz="1250" b="1" dirty="0">
+              <a:rPr lang="en-US" sz="1800" b="1" dirty="0">
                 <a:solidFill>
                   <a:srgbClr val="1F2429"/>
                 </a:solidFill>
@@ -2930,7 +7173,7 @@
               </a:rPr>
               <a:t>Book (isbn, title, author, available)</a:t>
             </a:r>
-            <a:endParaRPr lang="en-US" sz="1250" dirty="0"/>
+            <a:endParaRPr lang="en-US" sz="1800" dirty="0"/>
           </a:p>
         </p:txBody>
       </p:sp>
@@ -2972,7 +7215,7 @@
                         <a:buNone/>
                       </a:pPr>
                       <a:r>
-                        <a:rPr lang="en-US" sz="1200" b="1" dirty="0">
+                        <a:rPr lang="en-US" sz="1400" b="1" dirty="0">
                           <a:solidFill>
                             <a:srgbClr val="FFFFFF"/>
                           </a:solidFill>
@@ -2982,7 +7225,7 @@
                         </a:rPr>
                         <a:t>isbn</a:t>
                       </a:r>
-                      <a:endParaRPr lang="en-US" sz="1200" dirty="0">
+                      <a:endParaRPr lang="en-US" sz="1400" dirty="0">
                         <a:latin typeface="Calibri" charset="0"/>
                         <a:ea typeface="Calibri" charset="0"/>
                         <a:cs typeface="Calibri" charset="0"/>
@@ -3040,7 +7283,7 @@
                         <a:buNone/>
                       </a:pPr>
                       <a:r>
-                        <a:rPr lang="en-US" sz="1200" b="1" dirty="0">
+                        <a:rPr lang="en-US" sz="1400" b="1" dirty="0">
                           <a:solidFill>
                             <a:srgbClr val="FFFFFF"/>
                           </a:solidFill>
@@ -3050,7 +7293,7 @@
                         </a:rPr>
                         <a:t>title</a:t>
                       </a:r>
-                      <a:endParaRPr lang="en-US" sz="1200" dirty="0">
+                      <a:endParaRPr lang="en-US" sz="1400" dirty="0">
                         <a:latin typeface="Calibri" charset="0"/>
                         <a:ea typeface="Calibri" charset="0"/>
                         <a:cs typeface="Calibri" charset="0"/>
@@ -3108,7 +7351,7 @@
                         <a:buNone/>
                       </a:pPr>
                       <a:r>
-                        <a:rPr lang="en-US" sz="1200" b="1" dirty="0">
+                        <a:rPr lang="en-US" sz="1400" b="1" dirty="0">
                           <a:solidFill>
                             <a:srgbClr val="FFFFFF"/>
                           </a:solidFill>
@@ -3118,7 +7361,7 @@
                         </a:rPr>
                         <a:t>author</a:t>
                       </a:r>
-                      <a:endParaRPr lang="en-US" sz="1200" dirty="0">
+                      <a:endParaRPr lang="en-US" sz="1400" dirty="0">
                         <a:latin typeface="Calibri" charset="0"/>
                         <a:ea typeface="Calibri" charset="0"/>
                         <a:cs typeface="Calibri" charset="0"/>
@@ -3176,7 +7419,7 @@
                         <a:buNone/>
                       </a:pPr>
                       <a:r>
-                        <a:rPr lang="en-US" sz="1200" b="1" dirty="0">
+                        <a:rPr lang="en-US" sz="1400" b="1" dirty="0">
                           <a:solidFill>
                             <a:srgbClr val="FFFFFF"/>
                           </a:solidFill>
@@ -3186,7 +7429,7 @@
                         </a:rPr>
                         <a:t>available</a:t>
                       </a:r>
-                      <a:endParaRPr lang="en-US" sz="1200" dirty="0">
+                      <a:endParaRPr lang="en-US" sz="1400" dirty="0">
                         <a:latin typeface="Calibri" charset="0"/>
                         <a:ea typeface="Calibri" charset="0"/>
                         <a:cs typeface="Calibri" charset="0"/>
@@ -3246,7 +7489,7 @@
                         <a:buNone/>
                       </a:pPr>
                       <a:r>
-                        <a:rPr lang="en-US" sz="1150" dirty="0">
+                        <a:rPr lang="en-US" sz="1400" dirty="0">
                           <a:solidFill>
                             <a:srgbClr val="1F2429"/>
                           </a:solidFill>
@@ -3256,7 +7499,7 @@
                         </a:rPr>
                         <a:t>978-0132350884</a:t>
                       </a:r>
-                      <a:endParaRPr lang="en-US" sz="1150" dirty="0">
+                      <a:endParaRPr lang="en-US" sz="1400" dirty="0">
                         <a:latin typeface="Courier New" charset="0"/>
                         <a:ea typeface="Courier New" charset="0"/>
                         <a:cs typeface="Courier New" charset="0"/>
@@ -3311,7 +7554,7 @@
                         <a:buNone/>
                       </a:pPr>
                       <a:r>
-                        <a:rPr lang="en-US" sz="1150" dirty="0">
+                        <a:rPr lang="en-US" sz="1400" dirty="0">
                           <a:solidFill>
                             <a:srgbClr val="1F2429"/>
                           </a:solidFill>
@@ -3321,7 +7564,7 @@
                         </a:rPr>
                         <a:t>Clean Code</a:t>
                       </a:r>
-                      <a:endParaRPr lang="en-US" sz="1150" dirty="0">
+                      <a:endParaRPr lang="en-US" sz="1400" dirty="0">
                         <a:latin typeface="Courier New" charset="0"/>
                         <a:ea typeface="Courier New" charset="0"/>
                         <a:cs typeface="Courier New" charset="0"/>
@@ -3376,7 +7619,7 @@
                         <a:buNone/>
                       </a:pPr>
                       <a:r>
-                        <a:rPr lang="en-US" sz="1150" dirty="0">
+                        <a:rPr lang="en-US" sz="1400" dirty="0">
                           <a:solidFill>
                             <a:srgbClr val="1F2429"/>
                           </a:solidFill>
@@ -3386,7 +7629,7 @@
                         </a:rPr>
                         <a:t>Robert C. Martin</a:t>
                       </a:r>
-                      <a:endParaRPr lang="en-US" sz="1150" dirty="0">
+                      <a:endParaRPr lang="en-US" sz="1400" dirty="0">
                         <a:latin typeface="Courier New" charset="0"/>
                         <a:ea typeface="Courier New" charset="0"/>
                         <a:cs typeface="Courier New" charset="0"/>
@@ -3441,7 +7684,7 @@
                         <a:buNone/>
                       </a:pPr>
                       <a:r>
-                        <a:rPr lang="en-US" sz="1150" dirty="0">
+                        <a:rPr lang="en-US" sz="1400" dirty="0">
                           <a:solidFill>
                             <a:srgbClr val="1F2429"/>
                           </a:solidFill>
@@ -3451,7 +7694,7 @@
                         </a:rPr>
                         <a:t>true</a:t>
                       </a:r>
-                      <a:endParaRPr lang="en-US" sz="1150" dirty="0">
+                      <a:endParaRPr lang="en-US" sz="1400" dirty="0">
                         <a:latin typeface="Courier New" charset="0"/>
                         <a:ea typeface="Courier New" charset="0"/>
                         <a:cs typeface="Courier New" charset="0"/>
@@ -3508,7 +7751,7 @@
                         <a:buNone/>
                       </a:pPr>
                       <a:r>
-                        <a:rPr lang="en-US" sz="1150" dirty="0">
+                        <a:rPr lang="en-US" sz="1400" dirty="0">
                           <a:solidFill>
                             <a:srgbClr val="1F2429"/>
                           </a:solidFill>
@@ -3518,7 +7761,7 @@
                         </a:rPr>
                         <a:t>978-0201633610</a:t>
                       </a:r>
-                      <a:endParaRPr lang="en-US" sz="1150" dirty="0">
+                      <a:endParaRPr lang="en-US" sz="1400" dirty="0">
                         <a:latin typeface="Courier New" charset="0"/>
                         <a:ea typeface="Courier New" charset="0"/>
                         <a:cs typeface="Courier New" charset="0"/>
@@ -3573,7 +7816,7 @@
                         <a:buNone/>
                       </a:pPr>
                       <a:r>
-                        <a:rPr lang="en-US" sz="1150" dirty="0">
+                        <a:rPr lang="en-US" sz="1400" dirty="0">
                           <a:solidFill>
                             <a:srgbClr val="1F2429"/>
                           </a:solidFill>
@@ -3583,7 +7826,7 @@
                         </a:rPr>
                         <a:t>Design Patterns</a:t>
                       </a:r>
-                      <a:endParaRPr lang="en-US" sz="1150" dirty="0">
+                      <a:endParaRPr lang="en-US" sz="1400" dirty="0">
                         <a:latin typeface="Courier New" charset="0"/>
                         <a:ea typeface="Courier New" charset="0"/>
                         <a:cs typeface="Courier New" charset="0"/>
@@ -3638,7 +7881,7 @@
                         <a:buNone/>
                       </a:pPr>
                       <a:r>
-                        <a:rPr lang="en-US" sz="1150" dirty="0">
+                        <a:rPr lang="en-US" sz="1400" dirty="0">
                           <a:solidFill>
                             <a:srgbClr val="1F2429"/>
                           </a:solidFill>
@@ -3648,7 +7891,7 @@
                         </a:rPr>
                         <a:t>Gamma, Helm, Johnson, Vlissides</a:t>
                       </a:r>
-                      <a:endParaRPr lang="en-US" sz="1150" dirty="0">
+                      <a:endParaRPr lang="en-US" sz="1400" dirty="0">
                         <a:latin typeface="Courier New" charset="0"/>
                         <a:ea typeface="Courier New" charset="0"/>
                         <a:cs typeface="Courier New" charset="0"/>
@@ -3703,7 +7946,7 @@
                         <a:buNone/>
                       </a:pPr>
                       <a:r>
-                        <a:rPr lang="en-US" sz="1150" dirty="0">
+                        <a:rPr lang="en-US" sz="1400" dirty="0">
                           <a:solidFill>
                             <a:srgbClr val="1F2429"/>
                           </a:solidFill>
@@ -3713,7 +7956,7 @@
                         </a:rPr>
                         <a:t>false</a:t>
                       </a:r>
-                      <a:endParaRPr lang="en-US" sz="1150" dirty="0">
+                      <a:endParaRPr lang="en-US" sz="1400" dirty="0">
                         <a:latin typeface="Courier New" charset="0"/>
                         <a:ea typeface="Courier New" charset="0"/>
                         <a:cs typeface="Courier New" charset="0"/>
@@ -3848,7 +8091,7 @@
               <a:buNone/>
             </a:pPr>
             <a:r>
-              <a:rPr lang="en-US" sz="1500" b="1" dirty="0">
+              <a:rPr lang="en-US" sz="1600" b="1" dirty="0">
                 <a:solidFill>
                   <a:srgbClr val="1F2429"/>
                 </a:solidFill>
@@ -3887,7 +8130,7 @@
               <a:buNone/>
             </a:pPr>
             <a:r>
-              <a:rPr lang="en-US" sz="1150" dirty="0">
+              <a:rPr lang="en-US" sz="1400" dirty="0">
                 <a:solidFill>
                   <a:srgbClr val="8A939B"/>
                 </a:solidFill>
@@ -3897,7 +8140,7 @@
               </a:rPr>
               <a:t>A new table, view, index, or entire database</a:t>
             </a:r>
-            <a:endParaRPr lang="en-US" sz="1150" dirty="0"/>
+            <a:endParaRPr lang="en-US" sz="1400" dirty="0"/>
           </a:p>
         </p:txBody>
       </p:sp>
@@ -3985,7 +8228,7 @@
               <a:buNone/>
             </a:pPr>
             <a:r>
-              <a:rPr lang="en-US" sz="1500" b="1" dirty="0">
+              <a:rPr lang="en-US" sz="1600" b="1" dirty="0">
                 <a:solidFill>
                   <a:srgbClr val="1F2429"/>
                 </a:solidFill>
@@ -4024,7 +8267,7 @@
               <a:buNone/>
             </a:pPr>
             <a:r>
-              <a:rPr lang="en-US" sz="1150" dirty="0">
+              <a:rPr lang="en-US" sz="1400" dirty="0">
                 <a:solidFill>
                   <a:srgbClr val="8A939B"/>
                 </a:solidFill>
@@ -4034,7 +8277,7 @@
               </a:rPr>
               <a:t>Add, remove, or modify a column; add a constraint</a:t>
             </a:r>
-            <a:endParaRPr lang="en-US" sz="1150" dirty="0"/>
+            <a:endParaRPr lang="en-US" sz="1400" dirty="0"/>
           </a:p>
         </p:txBody>
       </p:sp>
@@ -4122,7 +8365,7 @@
               <a:buNone/>
             </a:pPr>
             <a:r>
-              <a:rPr lang="en-US" sz="1500" b="1" dirty="0">
+              <a:rPr lang="en-US" sz="1600" b="1" dirty="0">
                 <a:solidFill>
                   <a:srgbClr val="1F2429"/>
                 </a:solidFill>
@@ -4161,7 +8404,7 @@
               <a:buNone/>
             </a:pPr>
             <a:r>
-              <a:rPr lang="en-US" sz="1150" dirty="0">
+              <a:rPr lang="en-US" sz="1400" dirty="0">
                 <a:solidFill>
                   <a:srgbClr val="8A939B"/>
                 </a:solidFill>
@@ -4171,7 +8414,7 @@
               </a:rPr>
               <a:t>Remove a table, view, or index — and typically its data</a:t>
             </a:r>
-            <a:endParaRPr lang="en-US" sz="1150" dirty="0"/>
+            <a:endParaRPr lang="en-US" sz="1400" dirty="0"/>
           </a:p>
         </p:txBody>
       </p:sp>
@@ -4227,7 +8470,7 @@
               <a:buNone/>
             </a:pPr>
             <a:r>
-              <a:rPr lang="en-US" sz="1200" dirty="0">
+              <a:rPr lang="en-US" sz="1800" dirty="0">
                 <a:solidFill>
                   <a:srgbClr val="1F2429"/>
                 </a:solidFill>
@@ -4237,7 +8480,7 @@
               </a:rPr>
               <a:t>Every DDL statement, when executed, updates the system catalog — which is precisely why DDL changes are felt everywhere at once: every part of the DBMS that consults the catalog immediately sees the new structure.</a:t>
             </a:r>
-            <a:endParaRPr lang="en-US" sz="1200" dirty="0"/>
+            <a:endParaRPr lang="en-US" sz="1800" dirty="0"/>
           </a:p>
         </p:txBody>
       </p:sp>
@@ -4337,7 +8580,7 @@
               <a:buNone/>
             </a:pPr>
             <a:r>
-              <a:rPr lang="en-US" sz="1000" u="sng" dirty="0">
+              <a:rPr lang="en-US" sz="1200" u="sng" dirty="0">
                 <a:solidFill>
                   <a:srgbClr val="8A939B"/>
                 </a:solidFill>
@@ -4358,7 +8601,7 @@
               <a:buNone/>
             </a:pPr>
             <a:r>
-              <a:rPr lang="en-US" sz="1000" dirty="0">
+              <a:rPr lang="en-US" sz="1200" dirty="0">
                 <a:solidFill>
                   <a:srgbClr val="8A939B"/>
                 </a:solidFill>
@@ -4366,9 +8609,9 @@
                 <a:ea typeface="Calibri" pitchFamily="34" charset="-122"/>
                 <a:cs typeface="Calibri" pitchFamily="34" charset="-120"/>
               </a:rPr>
-              <a:t>  ·  5</a:t>
-            </a:r>
-            <a:endParaRPr lang="en-US" sz="1000" dirty="0"/>
+              <a:t>  ·  7</a:t>
+            </a:r>
+            <a:endParaRPr lang="en-US" sz="1200" dirty="0"/>
           </a:p>
         </p:txBody>
       </p:sp>
@@ -4397,7 +8640,7 @@
               <a:buNone/>
             </a:pPr>
             <a:r>
-              <a:rPr lang="en-US" sz="1450" dirty="0">
+              <a:rPr lang="en-US" sz="1800" dirty="0">
                 <a:solidFill>
                   <a:srgbClr val="1F2429"/>
                 </a:solidFill>
@@ -4407,7 +8650,7 @@
               </a:rPr>
               <a:t>Where DDL shapes the container, DML works with what's inside it: retrieving existing data and inserting, updating, or deleting rows.</a:t>
             </a:r>
-            <a:endParaRPr lang="en-US" sz="1450" dirty="0"/>
+            <a:endParaRPr lang="en-US" sz="1800" dirty="0"/>
           </a:p>
         </p:txBody>
       </p:sp>
@@ -4458,7 +8701,7 @@
               <a:buNone/>
             </a:pPr>
             <a:r>
-              <a:rPr lang="en-US" sz="1350" b="1" dirty="0">
+              <a:rPr lang="en-US" sz="1800" b="1" dirty="0">
                 <a:solidFill>
                   <a:srgbClr val="FFFFFF"/>
                 </a:solidFill>
@@ -4468,7 +8711,7 @@
               </a:rPr>
               <a:t>Retrieval</a:t>
             </a:r>
-            <a:endParaRPr lang="en-US" sz="1350" dirty="0"/>
+            <a:endParaRPr lang="en-US" sz="1800" dirty="0"/>
           </a:p>
         </p:txBody>
       </p:sp>
@@ -4497,7 +8740,7 @@
               <a:buNone/>
             </a:pPr>
             <a:r>
-              <a:rPr lang="en-US" sz="1050" dirty="0">
+              <a:rPr lang="en-US" sz="1800" dirty="0">
                 <a:solidFill>
                   <a:srgbClr val="FFFFFF"/>
                 </a:solidFill>
@@ -4505,9 +8748,9 @@
                 <a:ea typeface="Calibri" pitchFamily="34" charset="-122"/>
                 <a:cs typeface="Calibri" pitchFamily="34" charset="-120"/>
               </a:rPr>
-              <a:t>Asking questions of existing data (“which books by Robert C. Martin are currently available?”) without changing anything</a:t>
-            </a:r>
-            <a:endParaRPr lang="en-US" sz="1050" dirty="0"/>
+              <a:t>Asking questions of existing data without changing anything</a:t>
+            </a:r>
+            <a:endParaRPr lang="en-US" sz="1800" dirty="0"/>
           </a:p>
         </p:txBody>
       </p:sp>
@@ -4558,7 +8801,7 @@
               <a:buNone/>
             </a:pPr>
             <a:r>
-              <a:rPr lang="en-US" sz="1350" b="1" dirty="0">
+              <a:rPr lang="en-US" sz="1800" b="1" dirty="0">
                 <a:solidFill>
                   <a:srgbClr val="FFFFFF"/>
                 </a:solidFill>
@@ -4568,7 +8811,7 @@
               </a:rPr>
               <a:t>Update</a:t>
             </a:r>
-            <a:endParaRPr lang="en-US" sz="1350" dirty="0"/>
+            <a:endParaRPr lang="en-US" sz="1800" dirty="0"/>
           </a:p>
         </p:txBody>
       </p:sp>
@@ -4597,7 +8840,7 @@
               <a:buNone/>
             </a:pPr>
             <a:r>
-              <a:rPr lang="en-US" sz="1050" dirty="0">
+              <a:rPr lang="en-US" sz="1800" dirty="0">
                 <a:solidFill>
                   <a:srgbClr val="FFFFFF"/>
                 </a:solidFill>
@@ -4607,7 +8850,7 @@
               </a:rPr>
               <a:t>Inserting new data, modifying existing data, or deleting data</a:t>
             </a:r>
-            <a:endParaRPr lang="en-US" sz="1050" dirty="0"/>
+            <a:endParaRPr lang="en-US" sz="1800" dirty="0"/>
           </a:p>
         </p:txBody>
       </p:sp>
@@ -4636,7 +8879,7 @@
               <a:buNone/>
             </a:pPr>
             <a:r>
-              <a:rPr lang="en-US" sz="1200" b="1" dirty="0">
+              <a:rPr lang="en-US" sz="1800" b="1" dirty="0">
                 <a:solidFill>
                   <a:srgbClr val="8A939B"/>
                 </a:solidFill>
@@ -4646,7 +8889,7 @@
               </a:rPr>
               <a:t>Procedural vs. declarative DML — a distinction worth remembering early</a:t>
             </a:r>
-            <a:endParaRPr lang="en-US" sz="1200" dirty="0"/>
+            <a:endParaRPr lang="en-US" sz="1800" dirty="0"/>
           </a:p>
         </p:txBody>
       </p:sp>
@@ -4697,7 +8940,7 @@
               <a:buNone/>
             </a:pPr>
             <a:r>
-              <a:rPr lang="en-US" sz="1350" b="1" dirty="0">
+              <a:rPr lang="en-US" sz="1800" b="1" dirty="0">
                 <a:solidFill>
                   <a:srgbClr val="FFFFFF"/>
                 </a:solidFill>
@@ -4707,7 +8950,7 @@
               </a:rPr>
               <a:t>Procedural DML</a:t>
             </a:r>
-            <a:endParaRPr lang="en-US" sz="1350" dirty="0"/>
+            <a:endParaRPr lang="en-US" sz="1800" dirty="0"/>
           </a:p>
         </p:txBody>
       </p:sp>
@@ -4736,7 +8979,7 @@
               <a:buNone/>
             </a:pPr>
             <a:r>
-              <a:rPr lang="en-US" sz="1050" dirty="0">
+              <a:rPr lang="en-US" sz="1800" dirty="0">
                 <a:solidFill>
                   <a:srgbClr val="FFFFFF"/>
                 </a:solidFill>
@@ -4744,9 +8987,9 @@
                 <a:ea typeface="Calibri" pitchFamily="34" charset="-122"/>
                 <a:cs typeface="Calibri" pitchFamily="34" charset="-120"/>
               </a:rPr>
-              <a:t>Specify what data is needed AND how to get it, step by step — what relational algebra does (covered later)</a:t>
-            </a:r>
-            <a:endParaRPr lang="en-US" sz="1050" dirty="0"/>
+              <a:t>Say what data is needed AND how to get it, step by step (relational algebra)</a:t>
+            </a:r>
+            <a:endParaRPr lang="en-US" sz="1800" dirty="0"/>
           </a:p>
         </p:txBody>
       </p:sp>
@@ -4797,7 +9040,7 @@
               <a:buNone/>
             </a:pPr>
             <a:r>
-              <a:rPr lang="en-US" sz="1350" b="1" dirty="0">
+              <a:rPr lang="en-US" sz="1800" b="1" dirty="0">
                 <a:solidFill>
                   <a:srgbClr val="FFFFFF"/>
                 </a:solidFill>
@@ -4807,7 +9050,7 @@
               </a:rPr>
               <a:t>Declarative DML</a:t>
             </a:r>
-            <a:endParaRPr lang="en-US" sz="1350" dirty="0"/>
+            <a:endParaRPr lang="en-US" sz="1800" dirty="0"/>
           </a:p>
         </p:txBody>
       </p:sp>
@@ -4836,7 +9079,7 @@
               <a:buNone/>
             </a:pPr>
             <a:r>
-              <a:rPr lang="en-US" sz="1050" dirty="0">
+              <a:rPr lang="en-US" sz="1800" dirty="0">
                 <a:solidFill>
                   <a:srgbClr val="FFFFFF"/>
                 </a:solidFill>
@@ -4846,7 +9089,7 @@
               </a:rPr>
               <a:t>Specify only what data is needed; the optimizer decides how — what SQL and relational calculus do</a:t>
             </a:r>
-            <a:endParaRPr lang="en-US" sz="1050" dirty="0"/>
+            <a:endParaRPr lang="en-US" sz="1800" dirty="0"/>
           </a:p>
         </p:txBody>
       </p:sp>
@@ -4875,7 +9118,7 @@
               <a:buNone/>
             </a:pPr>
             <a:r>
-              <a:rPr lang="en-US" sz="1200" dirty="0">
+              <a:rPr lang="en-US" sz="1800" dirty="0">
                 <a:solidFill>
                   <a:srgbClr val="8A939B"/>
                 </a:solidFill>
@@ -4885,7 +9128,7 @@
               </a:rPr>
               <a:t>A single logical action — “a member returns Clean Code” — typically involves more than one DML statement working together: marking the book available, and removing the corresponding loan record. Lecture 29's transaction concept guarantees such groups either all succeed or none do.</a:t>
             </a:r>
-            <a:endParaRPr lang="en-US" sz="1200" dirty="0"/>
+            <a:endParaRPr lang="en-US" sz="1800" dirty="0"/>
           </a:p>
         </p:txBody>
       </p:sp>
@@ -4985,7 +9228,7 @@
               <a:buNone/>
             </a:pPr>
             <a:r>
-              <a:rPr lang="en-US" sz="1000" u="sng" dirty="0">
+              <a:rPr lang="en-US" sz="1200" u="sng" dirty="0">
                 <a:solidFill>
                   <a:srgbClr val="8A939B"/>
                 </a:solidFill>
@@ -5006,7 +9249,7 @@
               <a:buNone/>
             </a:pPr>
             <a:r>
-              <a:rPr lang="en-US" sz="1000" dirty="0">
+              <a:rPr lang="en-US" sz="1200" dirty="0">
                 <a:solidFill>
                   <a:srgbClr val="8A939B"/>
                 </a:solidFill>
@@ -5014,9 +9257,9 @@
                 <a:ea typeface="Calibri" pitchFamily="34" charset="-122"/>
                 <a:cs typeface="Calibri" pitchFamily="34" charset="-120"/>
               </a:rPr>
-              <a:t>  ·  6</a:t>
-            </a:r>
-            <a:endParaRPr lang="en-US" sz="1000" dirty="0"/>
+              <a:t>  ·  11</a:t>
+            </a:r>
+            <a:endParaRPr lang="en-US" sz="1200" dirty="0"/>
           </a:p>
         </p:txBody>
       </p:sp>
@@ -5045,7 +9288,7 @@
               <a:buNone/>
             </a:pPr>
             <a:r>
-              <a:rPr lang="en-US" sz="1450" b="1" dirty="0">
+              <a:rPr lang="en-US" sz="1800" b="1" dirty="0">
                 <a:solidFill>
                   <a:srgbClr val="E8A33D"/>
                 </a:solidFill>
@@ -5059,7 +9302,7 @@
               <a:buNone/>
             </a:pPr>
             <a:r>
-              <a:rPr lang="en-US" sz="1450" dirty="0">
+              <a:rPr lang="en-US" sz="1800" dirty="0">
                 <a:solidFill>
                   <a:srgbClr val="1F2429"/>
                 </a:solidFill>
@@ -5069,7 +9312,7 @@
               </a:rPr>
               <a:t> governs permissions: who may run which DDL and DML statements against which parts of the database. Without it, every user with any access would have unrestricted access to all of it.</a:t>
             </a:r>
-            <a:endParaRPr lang="en-US" sz="1450" dirty="0"/>
+            <a:endParaRPr lang="en-US" sz="1800" dirty="0"/>
           </a:p>
         </p:txBody>
       </p:sp>
@@ -5102,7 +9345,7 @@
               <a:buChar char="•"/>
             </a:pPr>
             <a:r>
-              <a:rPr lang="en-US" sz="1350" dirty="0">
+              <a:rPr lang="en-US" sz="1800" dirty="0">
                 <a:solidFill>
                   <a:srgbClr val="1F2429"/>
                 </a:solidFill>
@@ -5112,7 +9355,7 @@
               </a:rPr>
               <a:t>Grant — give a specific privilege (read, insert, update, delete, or the right to grant further privileges) to a named user or role</a:t>
             </a:r>
-            <a:endParaRPr lang="en-US" sz="1350" dirty="0"/>
+            <a:endParaRPr lang="en-US" sz="1800" dirty="0"/>
           </a:p>
           <a:p>
             <a:pPr marL="342900" indent="-342900">
@@ -5123,7 +9366,7 @@
               <a:buChar char="•"/>
             </a:pPr>
             <a:r>
-              <a:rPr lang="en-US" sz="1350" dirty="0">
+              <a:rPr lang="en-US" sz="1800" dirty="0">
                 <a:solidFill>
                   <a:srgbClr val="1F2429"/>
                 </a:solidFill>
@@ -5133,7 +9376,7 @@
               </a:rPr>
               <a:t>Revoke — take back a previously granted privilege</a:t>
             </a:r>
-            <a:endParaRPr lang="en-US" sz="1350" dirty="0"/>
+            <a:endParaRPr lang="en-US" sz="1800" dirty="0"/>
           </a:p>
         </p:txBody>
       </p:sp>
@@ -5162,7 +9405,7 @@
               <a:buNone/>
             </a:pPr>
             <a:r>
-              <a:rPr lang="en-US" sz="1200" b="1" dirty="0">
+              <a:rPr lang="en-US" sz="1800" b="1" dirty="0">
                 <a:solidFill>
                   <a:srgbClr val="8A939B"/>
                 </a:solidFill>
@@ -5172,7 +9415,7 @@
               </a:rPr>
               <a:t>DCL in the library system — who can do what to Book</a:t>
             </a:r>
-            <a:endParaRPr lang="en-US" sz="1200" dirty="0"/>
+            <a:endParaRPr lang="en-US" sz="1800" dirty="0"/>
           </a:p>
         </p:txBody>
       </p:sp>
@@ -5223,7 +9466,7 @@
               <a:buNone/>
             </a:pPr>
             <a:r>
-              <a:rPr lang="en-US" sz="1350" b="1" dirty="0">
+              <a:rPr lang="en-US" sz="1600" b="1" dirty="0">
                 <a:solidFill>
                   <a:srgbClr val="FFFFFF"/>
                 </a:solidFill>
@@ -5233,7 +9476,7 @@
               </a:rPr>
               <a:t>Front-desk clerk</a:t>
             </a:r>
-            <a:endParaRPr lang="en-US" sz="1350" dirty="0"/>
+            <a:endParaRPr lang="en-US" sz="1400" dirty="0"/>
           </a:p>
         </p:txBody>
       </p:sp>
@@ -5262,7 +9505,7 @@
               <a:buNone/>
             </a:pPr>
             <a:r>
-              <a:rPr lang="en-US" sz="1050" dirty="0">
+              <a:rPr lang="en-US" sz="1400" dirty="0">
                 <a:solidFill>
                   <a:srgbClr val="FFFFFF"/>
                 </a:solidFill>
@@ -5272,7 +9515,7 @@
               </a:rPr>
               <a:t>Granted: SELECT, UPDATE (availability only)</a:t>
             </a:r>
-            <a:endParaRPr lang="en-US" sz="1050" dirty="0"/>
+            <a:endParaRPr lang="en-US" sz="1400" dirty="0"/>
           </a:p>
         </p:txBody>
       </p:sp>
@@ -5323,7 +9566,7 @@
               <a:buNone/>
             </a:pPr>
             <a:r>
-              <a:rPr lang="en-US" sz="1350" b="1" dirty="0">
+              <a:rPr lang="en-US" sz="1600" b="1" dirty="0">
                 <a:solidFill>
                   <a:srgbClr val="FFFFFF"/>
                 </a:solidFill>
@@ -5333,7 +9576,7 @@
               </a:rPr>
               <a:t>Cataloging librarian</a:t>
             </a:r>
-            <a:endParaRPr lang="en-US" sz="1350" dirty="0"/>
+            <a:endParaRPr lang="en-US" sz="1400" dirty="0"/>
           </a:p>
         </p:txBody>
       </p:sp>
@@ -5362,7 +9605,7 @@
               <a:buNone/>
             </a:pPr>
             <a:r>
-              <a:rPr lang="en-US" sz="1050" dirty="0">
+              <a:rPr lang="en-US" sz="1400" dirty="0">
                 <a:solidFill>
                   <a:srgbClr val="FFFFFF"/>
                 </a:solidFill>
@@ -5372,7 +9615,7 @@
               </a:rPr>
               <a:t>Granted: SELECT, INSERT, UPDATE, DELETE</a:t>
             </a:r>
-            <a:endParaRPr lang="en-US" sz="1050" dirty="0"/>
+            <a:endParaRPr lang="en-US" sz="1400" dirty="0"/>
           </a:p>
         </p:txBody>
       </p:sp>
@@ -5423,7 +9666,7 @@
               <a:buNone/>
             </a:pPr>
             <a:r>
-              <a:rPr lang="en-US" sz="1350" b="1" dirty="0">
+              <a:rPr lang="en-US" sz="1600" b="1" dirty="0">
                 <a:solidFill>
                   <a:srgbClr val="FFFFFF"/>
                 </a:solidFill>
@@ -5433,7 +9676,7 @@
               </a:rPr>
               <a:t>Library patron (self-service)</a:t>
             </a:r>
-            <a:endParaRPr lang="en-US" sz="1350" dirty="0"/>
+            <a:endParaRPr lang="en-US" sz="1400" dirty="0"/>
           </a:p>
         </p:txBody>
       </p:sp>
@@ -5462,7 +9705,7 @@
               <a:buNone/>
             </a:pPr>
             <a:r>
-              <a:rPr lang="en-US" sz="1050" dirty="0">
+              <a:rPr lang="en-US" sz="1400" dirty="0">
                 <a:solidFill>
                   <a:srgbClr val="FFFFFF"/>
                 </a:solidFill>
@@ -5472,7 +9715,7 @@
               </a:rPr>
               <a:t>Granted: SELECT only</a:t>
             </a:r>
-            <a:endParaRPr lang="en-US" sz="1050" dirty="0"/>
+            <a:endParaRPr lang="en-US" sz="1400" dirty="0"/>
           </a:p>
         </p:txBody>
       </p:sp>
@@ -5501,7 +9744,7 @@
               <a:buNone/>
             </a:pPr>
             <a:r>
-              <a:rPr lang="en-US" sz="1250" dirty="0">
+              <a:rPr lang="en-US" sz="1800" dirty="0">
                 <a:solidFill>
                   <a:srgbClr val="8A939B"/>
                 </a:solidFill>
@@ -5511,7 +9754,7 @@
               </a:rPr>
               <a:t>DCL is one concrete mechanism behind the “authorization services” function named in Lecture 2 — the DBA uses it to translate an organization's security policy into rules the DBMS actually enforces on every request.</a:t>
             </a:r>
-            <a:endParaRPr lang="en-US" sz="1250" dirty="0"/>
+            <a:endParaRPr lang="en-US" sz="1800" dirty="0"/>
           </a:p>
         </p:txBody>
       </p:sp>
@@ -5611,7 +9854,7 @@
               <a:buNone/>
             </a:pPr>
             <a:r>
-              <a:rPr lang="en-US" sz="1000" u="sng" dirty="0">
+              <a:rPr lang="en-US" sz="1200" u="sng" dirty="0">
                 <a:solidFill>
                   <a:srgbClr val="8A939B"/>
                 </a:solidFill>
@@ -5632,7 +9875,7 @@
               <a:buNone/>
             </a:pPr>
             <a:r>
-              <a:rPr lang="en-US" sz="1000" dirty="0">
+              <a:rPr lang="en-US" sz="1200" dirty="0">
                 <a:solidFill>
                   <a:srgbClr val="8A939B"/>
                 </a:solidFill>
@@ -5640,9 +9883,9 @@
                 <a:ea typeface="Calibri" pitchFamily="34" charset="-122"/>
                 <a:cs typeface="Calibri" pitchFamily="34" charset="-120"/>
               </a:rPr>
-              <a:t>  ·  7</a:t>
-            </a:r>
-            <a:endParaRPr lang="en-US" sz="1000" dirty="0"/>
+              <a:t>  ·  14</a:t>
+            </a:r>
+            <a:endParaRPr lang="en-US" sz="1200" dirty="0"/>
           </a:p>
         </p:txBody>
       </p:sp>
@@ -5671,7 +9914,7 @@
               <a:buNone/>
             </a:pPr>
             <a:r>
-              <a:rPr lang="en-US" sz="1350" dirty="0">
+              <a:rPr lang="en-US" sz="1800" dirty="0">
                 <a:solidFill>
                   <a:srgbClr val="1F2429"/>
                 </a:solidFill>
@@ -5681,7 +9924,7 @@
               </a:rPr>
               <a:t>Lecture 2's function list rounds out with the operational side. Utilities are supporting programs, usually bundled with the DBMS, that help administer the database without being part of the core query engine:</a:t>
             </a:r>
-            <a:endParaRPr lang="en-US" sz="1350" dirty="0"/>
+            <a:endParaRPr lang="en-US" sz="1800" dirty="0"/>
           </a:p>
         </p:txBody>
       </p:sp>
@@ -5722,7 +9965,7 @@
                         <a:buNone/>
                       </a:pPr>
                       <a:r>
-                        <a:rPr lang="en-US" sz="1200" b="1" dirty="0">
+                        <a:rPr lang="en-US" sz="1400" b="1" dirty="0">
                           <a:solidFill>
                             <a:srgbClr val="FFFFFF"/>
                           </a:solidFill>
@@ -5732,7 +9975,7 @@
                         </a:rPr>
                         <a:t>Utility</a:t>
                       </a:r>
-                      <a:endParaRPr lang="en-US" sz="1200" dirty="0">
+                      <a:endParaRPr lang="en-US" sz="1400" dirty="0">
                         <a:latin typeface="Calibri" charset="0"/>
                         <a:ea typeface="Calibri" charset="0"/>
                         <a:cs typeface="Calibri" charset="0"/>
@@ -5790,7 +10033,7 @@
                         <a:buNone/>
                       </a:pPr>
                       <a:r>
-                        <a:rPr lang="en-US" sz="1200" b="1" dirty="0">
+                        <a:rPr lang="en-US" sz="1400" b="1" dirty="0">
                           <a:solidFill>
                             <a:srgbClr val="FFFFFF"/>
                           </a:solidFill>
@@ -5800,7 +10043,7 @@
                         </a:rPr>
                         <a:t>Purpose</a:t>
                       </a:r>
-                      <a:endParaRPr lang="en-US" sz="1200" dirty="0">
+                      <a:endParaRPr lang="en-US" sz="1400" dirty="0">
                         <a:latin typeface="Calibri" charset="0"/>
                         <a:ea typeface="Calibri" charset="0"/>
                         <a:cs typeface="Calibri" charset="0"/>
@@ -5858,7 +10101,7 @@
                         <a:buNone/>
                       </a:pPr>
                       <a:r>
-                        <a:rPr lang="en-US" sz="1200" b="1" dirty="0">
+                        <a:rPr lang="en-US" sz="1400" b="1" dirty="0">
                           <a:solidFill>
                             <a:srgbClr val="FFFFFF"/>
                           </a:solidFill>
@@ -5868,7 +10111,7 @@
                         </a:rPr>
                         <a:t>Library-system example</a:t>
                       </a:r>
-                      <a:endParaRPr lang="en-US" sz="1200" dirty="0">
+                      <a:endParaRPr lang="en-US" sz="1400" dirty="0">
                         <a:latin typeface="Calibri" charset="0"/>
                         <a:ea typeface="Calibri" charset="0"/>
                         <a:cs typeface="Calibri" charset="0"/>
@@ -5928,7 +10171,7 @@
                         <a:buNone/>
                       </a:pPr>
                       <a:r>
-                        <a:rPr lang="en-US" sz="1100" dirty="0">
+                        <a:rPr lang="en-US" sz="1400" dirty="0">
                           <a:solidFill>
                             <a:srgbClr val="1F2429"/>
                           </a:solidFill>
@@ -5938,7 +10181,7 @@
                         </a:rPr>
                         <a:t>Loading</a:t>
                       </a:r>
-                      <a:endParaRPr lang="en-US" sz="1100" dirty="0">
+                      <a:endParaRPr lang="en-US" sz="1400" dirty="0">
                         <a:latin typeface="Calibri" charset="0"/>
                         <a:ea typeface="Calibri" charset="0"/>
                         <a:cs typeface="Calibri" charset="0"/>
@@ -5993,7 +10236,7 @@
                         <a:buNone/>
                       </a:pPr>
                       <a:r>
-                        <a:rPr lang="en-US" sz="1100" dirty="0">
+                        <a:rPr lang="en-US" sz="1400" dirty="0">
                           <a:solidFill>
                             <a:srgbClr val="1F2429"/>
                           </a:solidFill>
@@ -6003,7 +10246,7 @@
                         </a:rPr>
                         <a:t>Bulk-importing data from an external source</a:t>
                       </a:r>
-                      <a:endParaRPr lang="en-US" sz="1100" dirty="0">
+                      <a:endParaRPr lang="en-US" sz="1400" dirty="0">
                         <a:latin typeface="Calibri" charset="0"/>
                         <a:ea typeface="Calibri" charset="0"/>
                         <a:cs typeface="Calibri" charset="0"/>
@@ -6058,7 +10301,7 @@
                         <a:buNone/>
                       </a:pPr>
                       <a:r>
-                        <a:rPr lang="en-US" sz="1100" dirty="0">
+                        <a:rPr lang="en-US" sz="1400" dirty="0">
                           <a:solidFill>
                             <a:srgbClr val="1F2429"/>
                           </a:solidFill>
@@ -6068,7 +10311,7 @@
                         </a:rPr>
                         <a:t>Importing 10,000 records from the old system</a:t>
                       </a:r>
-                      <a:endParaRPr lang="en-US" sz="1100" dirty="0">
+                      <a:endParaRPr lang="en-US" sz="1400" dirty="0">
                         <a:latin typeface="Calibri" charset="0"/>
                         <a:ea typeface="Calibri" charset="0"/>
                         <a:cs typeface="Calibri" charset="0"/>
@@ -6125,7 +10368,7 @@
                         <a:buNone/>
                       </a:pPr>
                       <a:r>
-                        <a:rPr lang="en-US" sz="1100" dirty="0">
+                        <a:rPr lang="en-US" sz="1400" dirty="0">
                           <a:solidFill>
                             <a:srgbClr val="1F2429"/>
                           </a:solidFill>
@@ -6135,7 +10378,7 @@
                         </a:rPr>
                         <a:t>Unloading / export</a:t>
                       </a:r>
-                      <a:endParaRPr lang="en-US" sz="1100" dirty="0">
+                      <a:endParaRPr lang="en-US" sz="1400" dirty="0">
                         <a:latin typeface="Calibri" charset="0"/>
                         <a:ea typeface="Calibri" charset="0"/>
                         <a:cs typeface="Calibri" charset="0"/>
@@ -6190,7 +10433,7 @@
                         <a:buNone/>
                       </a:pPr>
                       <a:r>
-                        <a:rPr lang="en-US" sz="1100" dirty="0">
+                        <a:rPr lang="en-US" sz="1400" dirty="0">
                           <a:solidFill>
                             <a:srgbClr val="1F2429"/>
                           </a:solidFill>
@@ -6200,7 +10443,7 @@
                         </a:rPr>
                         <a:t>Extracting data out to a file</a:t>
                       </a:r>
-                      <a:endParaRPr lang="en-US" sz="1100" dirty="0">
+                      <a:endParaRPr lang="en-US" sz="1400" dirty="0">
                         <a:latin typeface="Calibri" charset="0"/>
                         <a:ea typeface="Calibri" charset="0"/>
                         <a:cs typeface="Calibri" charset="0"/>
@@ -6255,7 +10498,7 @@
                         <a:buNone/>
                       </a:pPr>
                       <a:r>
-                        <a:rPr lang="en-US" sz="1100" dirty="0">
+                        <a:rPr lang="en-US" sz="1400" dirty="0">
                           <a:solidFill>
                             <a:srgbClr val="1F2429"/>
                           </a:solidFill>
@@ -6265,7 +10508,7 @@
                         </a:rPr>
                         <a:t>Exporting overdue-loan records for a report</a:t>
                       </a:r>
-                      <a:endParaRPr lang="en-US" sz="1100" dirty="0">
+                      <a:endParaRPr lang="en-US" sz="1400" dirty="0">
                         <a:latin typeface="Calibri" charset="0"/>
                         <a:ea typeface="Calibri" charset="0"/>
                         <a:cs typeface="Calibri" charset="0"/>
@@ -6322,7 +10565,7 @@
                         <a:buNone/>
                       </a:pPr>
                       <a:r>
-                        <a:rPr lang="en-US" sz="1100" dirty="0">
+                        <a:rPr lang="en-US" sz="1400" dirty="0">
                           <a:solidFill>
                             <a:srgbClr val="1F2429"/>
                           </a:solidFill>
@@ -6332,7 +10575,7 @@
                         </a:rPr>
                         <a:t>Backup</a:t>
                       </a:r>
-                      <a:endParaRPr lang="en-US" sz="1100" dirty="0">
+                      <a:endParaRPr lang="en-US" sz="1400" dirty="0">
                         <a:latin typeface="Calibri" charset="0"/>
                         <a:ea typeface="Calibri" charset="0"/>
                         <a:cs typeface="Calibri" charset="0"/>
@@ -6387,7 +10630,7 @@
                         <a:buNone/>
                       </a:pPr>
                       <a:r>
-                        <a:rPr lang="en-US" sz="1100" dirty="0">
+                        <a:rPr lang="en-US" sz="1400" dirty="0">
                           <a:solidFill>
                             <a:srgbClr val="1F2429"/>
                           </a:solidFill>
@@ -6397,7 +10640,7 @@
                         </a:rPr>
                         <a:t>Making a recoverable copy of the database</a:t>
                       </a:r>
-                      <a:endParaRPr lang="en-US" sz="1100" dirty="0">
+                      <a:endParaRPr lang="en-US" sz="1400" dirty="0">
                         <a:latin typeface="Calibri" charset="0"/>
                         <a:ea typeface="Calibri" charset="0"/>
                         <a:cs typeface="Calibri" charset="0"/>
@@ -6452,7 +10695,7 @@
                         <a:buNone/>
                       </a:pPr>
                       <a:r>
-                        <a:rPr lang="en-US" sz="1100" dirty="0">
+                        <a:rPr lang="en-US" sz="1400" dirty="0">
                           <a:solidFill>
                             <a:srgbClr val="1F2429"/>
                           </a:solidFill>
@@ -6462,7 +10705,7 @@
                         </a:rPr>
                         <a:t>Nightly backup of the entire library database</a:t>
                       </a:r>
-                      <a:endParaRPr lang="en-US" sz="1100" dirty="0">
+                      <a:endParaRPr lang="en-US" sz="1400" dirty="0">
                         <a:latin typeface="Calibri" charset="0"/>
                         <a:ea typeface="Calibri" charset="0"/>
                         <a:cs typeface="Calibri" charset="0"/>
@@ -6519,7 +10762,7 @@
                         <a:buNone/>
                       </a:pPr>
                       <a:r>
-                        <a:rPr lang="en-US" sz="1100" dirty="0">
+                        <a:rPr lang="en-US" sz="1400" dirty="0">
                           <a:solidFill>
                             <a:srgbClr val="1F2429"/>
                           </a:solidFill>
@@ -6529,7 +10772,7 @@
                         </a:rPr>
                         <a:t>Reorganization</a:t>
                       </a:r>
-                      <a:endParaRPr lang="en-US" sz="1100" dirty="0">
+                      <a:endParaRPr lang="en-US" sz="1400" dirty="0">
                         <a:latin typeface="Calibri" charset="0"/>
                         <a:ea typeface="Calibri" charset="0"/>
                         <a:cs typeface="Calibri" charset="0"/>
@@ -6584,7 +10827,7 @@
                         <a:buNone/>
                       </a:pPr>
                       <a:r>
-                        <a:rPr lang="en-US" sz="1100" dirty="0">
+                        <a:rPr lang="en-US" sz="1400" dirty="0">
                           <a:solidFill>
                             <a:srgbClr val="1F2429"/>
                           </a:solidFill>
@@ -6594,7 +10837,7 @@
                         </a:rPr>
                         <a:t>Restructuring physical storage for performance</a:t>
                       </a:r>
-                      <a:endParaRPr lang="en-US" sz="1100" dirty="0">
+                      <a:endParaRPr lang="en-US" sz="1400" dirty="0">
                         <a:latin typeface="Calibri" charset="0"/>
                         <a:ea typeface="Calibri" charset="0"/>
                         <a:cs typeface="Calibri" charset="0"/>
@@ -6649,7 +10892,7 @@
                         <a:buNone/>
                       </a:pPr>
                       <a:r>
-                        <a:rPr lang="en-US" sz="1100" dirty="0">
+                        <a:rPr lang="en-US" sz="1400" dirty="0">
                           <a:solidFill>
                             <a:srgbClr val="1F2429"/>
                           </a:solidFill>
@@ -6659,7 +10902,7 @@
                         </a:rPr>
                         <a:t>Rebuilding a fragmented index on Book.isbn</a:t>
                       </a:r>
-                      <a:endParaRPr lang="en-US" sz="1100" dirty="0">
+                      <a:endParaRPr lang="en-US" sz="1400" dirty="0">
                         <a:latin typeface="Calibri" charset="0"/>
                         <a:ea typeface="Calibri" charset="0"/>
                         <a:cs typeface="Calibri" charset="0"/>
@@ -6716,7 +10959,7 @@
                         <a:buNone/>
                       </a:pPr>
                       <a:r>
-                        <a:rPr lang="en-US" sz="1100" dirty="0">
+                        <a:rPr lang="en-US" sz="1400" dirty="0">
                           <a:solidFill>
                             <a:srgbClr val="1F2429"/>
                           </a:solidFill>
@@ -6726,7 +10969,7 @@
                         </a:rPr>
                         <a:t>Performance monitoring</a:t>
                       </a:r>
-                      <a:endParaRPr lang="en-US" sz="1100" dirty="0">
+                      <a:endParaRPr lang="en-US" sz="1400" dirty="0">
                         <a:latin typeface="Calibri" charset="0"/>
                         <a:ea typeface="Calibri" charset="0"/>
                         <a:cs typeface="Calibri" charset="0"/>
@@ -6781,7 +11024,7 @@
                         <a:buNone/>
                       </a:pPr>
                       <a:r>
-                        <a:rPr lang="en-US" sz="1100" dirty="0">
+                        <a:rPr lang="en-US" sz="1400" dirty="0">
                           <a:solidFill>
                             <a:srgbClr val="1F2429"/>
                           </a:solidFill>
@@ -6791,7 +11034,7 @@
                         </a:rPr>
                         <a:t>Tracking query speed and resource use</a:t>
                       </a:r>
-                      <a:endParaRPr lang="en-US" sz="1100" dirty="0">
+                      <a:endParaRPr lang="en-US" sz="1400" dirty="0">
                         <a:latin typeface="Calibri" charset="0"/>
                         <a:ea typeface="Calibri" charset="0"/>
                         <a:cs typeface="Calibri" charset="0"/>
@@ -6846,7 +11089,7 @@
                         <a:buNone/>
                       </a:pPr>
                       <a:r>
-                        <a:rPr lang="en-US" sz="1100" dirty="0">
+                        <a:rPr lang="en-US" sz="1400" dirty="0">
                           <a:solidFill>
                             <a:srgbClr val="1F2429"/>
                           </a:solidFill>
@@ -6856,7 +11099,7 @@
                         </a:rPr>
                         <a:t>Noticing “search by author” has gotten slow</a:t>
                       </a:r>
-                      <a:endParaRPr lang="en-US" sz="1100" dirty="0">
+                      <a:endParaRPr lang="en-US" sz="1400" dirty="0">
                         <a:latin typeface="Calibri" charset="0"/>
                         <a:ea typeface="Calibri" charset="0"/>
                         <a:cs typeface="Calibri" charset="0"/>
@@ -6913,7 +11156,7 @@
                         <a:buNone/>
                       </a:pPr>
                       <a:r>
-                        <a:rPr lang="en-US" sz="1100" dirty="0">
+                        <a:rPr lang="en-US" sz="1400" dirty="0">
                           <a:solidFill>
                             <a:srgbClr val="1F2429"/>
                           </a:solidFill>
@@ -6923,7 +11166,7 @@
                         </a:rPr>
                         <a:t>Statistics analysis</a:t>
                       </a:r>
-                      <a:endParaRPr lang="en-US" sz="1100" dirty="0">
+                      <a:endParaRPr lang="en-US" sz="1400" dirty="0">
                         <a:latin typeface="Calibri" charset="0"/>
                         <a:ea typeface="Calibri" charset="0"/>
                         <a:cs typeface="Calibri" charset="0"/>
@@ -6978,7 +11221,7 @@
                         <a:buNone/>
                       </a:pPr>
                       <a:r>
-                        <a:rPr lang="en-US" sz="1100" dirty="0">
+                        <a:rPr lang="en-US" sz="1400" dirty="0">
                           <a:solidFill>
                             <a:srgbClr val="1F2429"/>
                           </a:solidFill>
@@ -6988,7 +11231,7 @@
                         </a:rPr>
                         <a:t>Gathering data distribution info for the optimizer</a:t>
                       </a:r>
-                      <a:endParaRPr lang="en-US" sz="1100" dirty="0">
+                      <a:endParaRPr lang="en-US" sz="1400" dirty="0">
                         <a:latin typeface="Calibri" charset="0"/>
                         <a:ea typeface="Calibri" charset="0"/>
                         <a:cs typeface="Calibri" charset="0"/>
@@ -7043,7 +11286,7 @@
                         <a:buNone/>
                       </a:pPr>
                       <a:r>
-                        <a:rPr lang="en-US" sz="1100" dirty="0">
+                        <a:rPr lang="en-US" sz="1400" dirty="0">
                           <a:solidFill>
                             <a:srgbClr val="1F2429"/>
                           </a:solidFill>
@@ -7053,7 +11296,7 @@
                         </a:rPr>
                         <a:t>Recording 40% of loans are computer-science books</a:t>
                       </a:r>
-                      <a:endParaRPr lang="en-US" sz="1100" dirty="0">
+                      <a:endParaRPr lang="en-US" sz="1400" dirty="0">
                         <a:latin typeface="Calibri" charset="0"/>
                         <a:ea typeface="Calibri" charset="0"/>
                         <a:cs typeface="Calibri" charset="0"/>
@@ -7200,7 +11443,7 @@
               <a:buNone/>
             </a:pPr>
             <a:r>
-              <a:rPr lang="en-US" sz="1000" u="sng" dirty="0">
+              <a:rPr lang="en-US" sz="1200" u="sng" dirty="0">
                 <a:solidFill>
                   <a:srgbClr val="8A939B"/>
                 </a:solidFill>
@@ -7221,7 +11464,7 @@
               <a:buNone/>
             </a:pPr>
             <a:r>
-              <a:rPr lang="en-US" sz="1000" dirty="0">
+              <a:rPr lang="en-US" sz="1200" dirty="0">
                 <a:solidFill>
                   <a:srgbClr val="8A939B"/>
                 </a:solidFill>
@@ -7229,9 +11472,9 @@
                 <a:ea typeface="Calibri" pitchFamily="34" charset="-122"/>
                 <a:cs typeface="Calibri" pitchFamily="34" charset="-120"/>
               </a:rPr>
-              <a:t>  ·  8</a:t>
-            </a:r>
-            <a:endParaRPr lang="en-US" sz="1000" dirty="0"/>
+              <a:t>  ·  16</a:t>
+            </a:r>
+            <a:endParaRPr lang="en-US" sz="1200" dirty="0"/>
           </a:p>
         </p:txBody>
       </p:sp>
@@ -7260,7 +11503,7 @@
               <a:buNone/>
             </a:pPr>
             <a:r>
-              <a:rPr lang="en-US" sz="1400" dirty="0">
+              <a:rPr lang="en-US" sz="1800" dirty="0">
                 <a:solidFill>
                   <a:srgbClr val="1F2429"/>
                 </a:solidFill>
@@ -7270,7 +11513,7 @@
               </a:rPr>
               <a:t>Database administration is the ongoing, human side of keeping a database healthy — the day-to-day work of the DBA role:</a:t>
             </a:r>
-            <a:endParaRPr lang="en-US" sz="1400" dirty="0"/>
+            <a:endParaRPr lang="en-US" sz="1800" dirty="0"/>
           </a:p>
         </p:txBody>
       </p:sp>
@@ -7303,7 +11546,7 @@
               <a:buChar char="•"/>
             </a:pPr>
             <a:r>
-              <a:rPr lang="en-US" sz="1250" b="1" dirty="0">
+              <a:rPr lang="en-US" sz="1800" b="1" dirty="0">
                 <a:solidFill>
                   <a:srgbClr val="1F2429"/>
                 </a:solidFill>
@@ -7320,7 +11563,7 @@
               <a:buNone/>
             </a:pPr>
             <a:r>
-              <a:rPr lang="en-US" sz="1250" dirty="0">
+              <a:rPr lang="en-US" sz="1800" dirty="0">
                 <a:solidFill>
                   <a:srgbClr val="1F2429"/>
                 </a:solidFill>
@@ -7330,7 +11573,7 @@
               </a:rPr>
               <a:t> — physical storage decisions and creating DDL-defined structures</a:t>
             </a:r>
-            <a:endParaRPr lang="en-US" sz="1250" dirty="0"/>
+            <a:endParaRPr lang="en-US" sz="1800" dirty="0"/>
           </a:p>
           <a:p>
             <a:pPr marL="342900" indent="-342900">
@@ -7341,7 +11584,7 @@
               <a:buChar char="•"/>
             </a:pPr>
             <a:r>
-              <a:rPr lang="en-US" sz="1250" b="1" dirty="0">
+              <a:rPr lang="en-US" sz="1800" b="1" dirty="0">
                 <a:solidFill>
                   <a:srgbClr val="1F2429"/>
                 </a:solidFill>
@@ -7358,7 +11601,7 @@
               <a:buNone/>
             </a:pPr>
             <a:r>
-              <a:rPr lang="en-US" sz="1250" dirty="0">
+              <a:rPr lang="en-US" sz="1800" dirty="0">
                 <a:solidFill>
                   <a:srgbClr val="1F2429"/>
                 </a:solidFill>
@@ -7368,7 +11611,7 @@
               </a:rPr>
               <a:t> — issuing and revoking DCL privileges as staff join, change roles, or leave</a:t>
             </a:r>
-            <a:endParaRPr lang="en-US" sz="1250" dirty="0"/>
+            <a:endParaRPr lang="en-US" sz="1800" dirty="0"/>
           </a:p>
           <a:p>
             <a:pPr marL="342900" indent="-342900">
@@ -7379,7 +11622,7 @@
               <a:buChar char="•"/>
             </a:pPr>
             <a:r>
-              <a:rPr lang="en-US" sz="1250" b="1" dirty="0">
+              <a:rPr lang="en-US" sz="1800" b="1" dirty="0">
                 <a:solidFill>
                   <a:srgbClr val="1F2429"/>
                 </a:solidFill>
@@ -7396,7 +11639,7 @@
               <a:buNone/>
             </a:pPr>
             <a:r>
-              <a:rPr lang="en-US" sz="1250" dirty="0">
+              <a:rPr lang="en-US" sz="1800" dirty="0">
                 <a:solidFill>
                   <a:srgbClr val="1F2429"/>
                 </a:solidFill>
@@ -7406,7 +11649,7 @@
               </a:rPr>
               <a:t> — watching for slow queries and adjusting indexes or configuration</a:t>
             </a:r>
-            <a:endParaRPr lang="en-US" sz="1250" dirty="0"/>
+            <a:endParaRPr lang="en-US" sz="1800" dirty="0"/>
           </a:p>
           <a:p>
             <a:pPr marL="342900" indent="-342900">
@@ -7417,7 +11660,7 @@
               <a:buChar char="•"/>
             </a:pPr>
             <a:r>
-              <a:rPr lang="en-US" sz="1250" b="1" dirty="0">
+              <a:rPr lang="en-US" sz="1800" b="1" dirty="0">
                 <a:solidFill>
                   <a:srgbClr val="1F2429"/>
                 </a:solidFill>
@@ -7434,7 +11677,7 @@
               <a:buNone/>
             </a:pPr>
             <a:r>
-              <a:rPr lang="en-US" sz="1250" dirty="0">
+              <a:rPr lang="en-US" sz="1800" dirty="0">
                 <a:solidFill>
                   <a:srgbClr val="1F2429"/>
                 </a:solidFill>
@@ -7444,7 +11687,7 @@
               </a:rPr>
               <a:t> — scheduling backups and rehearsing recovery before a real failure</a:t>
             </a:r>
-            <a:endParaRPr lang="en-US" sz="1250" dirty="0"/>
+            <a:endParaRPr lang="en-US" sz="1800" dirty="0"/>
           </a:p>
           <a:p>
             <a:pPr marL="342900" indent="-342900">
@@ -7455,7 +11698,7 @@
               <a:buChar char="•"/>
             </a:pPr>
             <a:r>
-              <a:rPr lang="en-US" sz="1250" b="1" dirty="0">
+              <a:rPr lang="en-US" sz="1800" b="1" dirty="0">
                 <a:solidFill>
                   <a:srgbClr val="1F2429"/>
                 </a:solidFill>
@@ -7472,7 +11715,7 @@
               <a:buNone/>
             </a:pPr>
             <a:r>
-              <a:rPr lang="en-US" sz="1250" dirty="0">
+              <a:rPr lang="en-US" sz="1800" dirty="0">
                 <a:solidFill>
                   <a:srgbClr val="1F2429"/>
                 </a:solidFill>
@@ -7482,7 +11725,7 @@
               </a:rPr>
               <a:t> — reviewing that constraints still reflect the organization's rules</a:t>
             </a:r>
-            <a:endParaRPr lang="en-US" sz="1250" dirty="0"/>
+            <a:endParaRPr lang="en-US" sz="1800" dirty="0"/>
           </a:p>
           <a:p>
             <a:pPr marL="342900" indent="-342900">
@@ -7493,7 +11736,7 @@
               <a:buChar char="•"/>
             </a:pPr>
             <a:r>
-              <a:rPr lang="en-US" sz="1250" b="1" dirty="0">
+              <a:rPr lang="en-US" sz="1800" b="1" dirty="0">
                 <a:solidFill>
                   <a:srgbClr val="1F2429"/>
                 </a:solidFill>
@@ -7510,7 +11753,7 @@
               <a:buNone/>
             </a:pPr>
             <a:r>
-              <a:rPr lang="en-US" sz="1250" dirty="0">
+              <a:rPr lang="en-US" sz="1800" dirty="0">
                 <a:solidFill>
                   <a:srgbClr val="1F2429"/>
                 </a:solidFill>
@@ -7520,7 +11763,7 @@
               </a:rPr>
               <a:t> — translating user and developer needs into database changes</a:t>
             </a:r>
-            <a:endParaRPr lang="en-US" sz="1250" dirty="0"/>
+            <a:endParaRPr lang="en-US" sz="1800" dirty="0"/>
           </a:p>
         </p:txBody>
       </p:sp>
@@ -7576,7 +11819,7 @@
               <a:buNone/>
             </a:pPr>
             <a:r>
-              <a:rPr lang="en-US" sz="1200" b="1" dirty="0">
+              <a:rPr lang="en-US" sz="1800" b="1" dirty="0">
                 <a:solidFill>
                   <a:srgbClr val="1F2429"/>
                 </a:solidFill>
@@ -7590,7 +11833,7 @@
               <a:buNone/>
             </a:pPr>
             <a:r>
-              <a:rPr lang="en-US" sz="1200" dirty="0">
+              <a:rPr lang="en-US" sz="1800" dirty="0">
                 <a:solidFill>
                   <a:srgbClr val="1F2429"/>
                 </a:solidFill>
@@ -7600,7 +11843,7 @@
               </a:rPr>
               <a:t>Utilities are tools; administration is the ongoing responsibility that uses those tools. A backup utility can exist for years without protecting anyone if no administrator schedules it to run.</a:t>
             </a:r>
-            <a:endParaRPr lang="en-US" sz="1200" dirty="0"/>
+            <a:endParaRPr lang="en-US" sz="1800" dirty="0"/>
           </a:p>
         </p:txBody>
       </p:sp>
@@ -7704,7 +11947,7 @@
               <a:buChar char="•"/>
             </a:pPr>
             <a:r>
-              <a:rPr lang="en-US" sz="1600" dirty="0">
+              <a:rPr lang="en-US" sz="1800" dirty="0">
                 <a:solidFill>
                   <a:srgbClr val="FFFFFF"/>
                 </a:solidFill>
@@ -7714,7 +11957,7 @@
               </a:rPr>
               <a:t>Database languages split by purpose into DDL (define structure), DML (work with data), and DCL (control access) — usually unified into one language such as SQL</a:t>
             </a:r>
-            <a:endParaRPr lang="en-US" sz="1600" dirty="0"/>
+            <a:endParaRPr lang="en-US" sz="1800" dirty="0"/>
           </a:p>
           <a:p>
             <a:pPr marL="342900" indent="-342900">
@@ -7725,7 +11968,7 @@
               <a:buChar char="•"/>
             </a:pPr>
             <a:r>
-              <a:rPr lang="en-US" sz="1600" dirty="0">
+              <a:rPr lang="en-US" sz="1800" dirty="0">
                 <a:solidFill>
                   <a:srgbClr val="FFFFFF"/>
                 </a:solidFill>
@@ -7735,7 +11978,7 @@
               </a:rPr>
               <a:t>DDL creates, alters, and drops schema objects; every DDL statement updates the system catalog immediately</a:t>
             </a:r>
-            <a:endParaRPr lang="en-US" sz="1600" dirty="0"/>
+            <a:endParaRPr lang="en-US" sz="1800" dirty="0"/>
           </a:p>
           <a:p>
             <a:pPr marL="342900" indent="-342900">
@@ -7746,7 +11989,7 @@
               <a:buChar char="•"/>
             </a:pPr>
             <a:r>
-              <a:rPr lang="en-US" sz="1600" dirty="0">
+              <a:rPr lang="en-US" sz="1800" dirty="0">
                 <a:solidFill>
                   <a:srgbClr val="FFFFFF"/>
                 </a:solidFill>
@@ -7756,7 +11999,7 @@
               </a:rPr>
               <a:t>DML retrieves and updates data; it can be procedural (specify how) or declarative (specify only what) — modern SQL is predominantly declarative</a:t>
             </a:r>
-            <a:endParaRPr lang="en-US" sz="1600" dirty="0"/>
+            <a:endParaRPr lang="en-US" sz="1800" dirty="0"/>
           </a:p>
           <a:p>
             <a:pPr marL="342900" indent="-342900">
@@ -7767,7 +12010,7 @@
               <a:buChar char="•"/>
             </a:pPr>
             <a:r>
-              <a:rPr lang="en-US" sz="1600" dirty="0">
+              <a:rPr lang="en-US" sz="1800" dirty="0">
                 <a:solidFill>
                   <a:srgbClr val="FFFFFF"/>
                 </a:solidFill>
@@ -7777,7 +12020,7 @@
               </a:rPr>
               <a:t>DCL grants and revokes privileges, turning security policy into rules the DBMS enforces on every request</a:t>
             </a:r>
-            <a:endParaRPr lang="en-US" sz="1600" dirty="0"/>
+            <a:endParaRPr lang="en-US" sz="1800" dirty="0"/>
           </a:p>
           <a:p>
             <a:pPr marL="342900" indent="-342900">
@@ -7788,7 +12031,7 @@
               <a:buChar char="•"/>
             </a:pPr>
             <a:r>
-              <a:rPr lang="en-US" sz="1600" dirty="0">
+              <a:rPr lang="en-US" sz="1800" dirty="0">
                 <a:solidFill>
                   <a:srgbClr val="FFFFFF"/>
                 </a:solidFill>
@@ -7798,7 +12041,7 @@
               </a:rPr>
               <a:t>Database utilities (load, backup, reorganize, monitor) are the tools; database administration is the DBA's ongoing responsibility that relies on them day to day</a:t>
             </a:r>
-            <a:endParaRPr lang="en-US" sz="1600" dirty="0"/>
+            <a:endParaRPr lang="en-US" sz="1800" dirty="0"/>
           </a:p>
         </p:txBody>
       </p:sp>
@@ -7827,7 +12070,7 @@
               <a:buNone/>
             </a:pPr>
             <a:r>
-              <a:rPr lang="en-US" sz="1000" u="sng" dirty="0">
+              <a:rPr lang="en-US" sz="1200" u="sng" dirty="0">
                 <a:solidFill>
                   <a:srgbClr val="8A939B"/>
                 </a:solidFill>
@@ -7848,7 +12091,7 @@
               <a:buNone/>
             </a:pPr>
             <a:r>
-              <a:rPr lang="en-US" sz="1000" dirty="0">
+              <a:rPr lang="en-US" sz="1200" dirty="0">
                 <a:solidFill>
                   <a:srgbClr val="8A939B"/>
                 </a:solidFill>
@@ -7856,9 +12099,9 @@
                 <a:ea typeface="Calibri" pitchFamily="34" charset="-122"/>
                 <a:cs typeface="Calibri" pitchFamily="34" charset="-120"/>
               </a:rPr>
-              <a:t>  ·  9</a:t>
-            </a:r>
-            <a:endParaRPr lang="en-US" sz="1000" dirty="0"/>
+              <a:t>  ·  19</a:t>
+            </a:r>
+            <a:endParaRPr lang="en-US" sz="1200" dirty="0"/>
           </a:p>
         </p:txBody>
       </p:sp>
